--- a/clients/juhi-agarwal-nexther/neXtHer-What-I-Found.pptx
+++ b/clients/juhi-agarwal-nexther/neXtHer-What-I-Found.pptx
@@ -26,9 +26,12 @@
     <p:sldId id="274" r:id="rId20"/>
     <p:sldId id="275" r:id="rId21"/>
     <p:sldId id="276" r:id="rId22"/>
+    <p:sldId id="277" r:id="rId23"/>
+    <p:sldId id="278" r:id="rId24"/>
+    <p:sldId id="279" r:id="rId25"/>
   </p:sldIdLst>
   <p:notesMasterIdLst>
-    <p:notesMasterId r:id="rId23"/>
+    <p:notesMasterId r:id="rId26"/>
   </p:notesMasterIdLst>
   <p:sldSz cx="12192000" cy="6858000"/>
   <p:notesSz cx="6858000" cy="12192000"/>
@@ -1690,6 +1693,270 @@
             <a:fld id="{F7021451-1387-4CA6-816F-3879F97B5CBC}" type="slidenum">
               <a:rPr lang="en-US"/>
               <a:t>21</a:t>
+            </a:fld>
+            <a:endParaRPr lang="en-US"/>
+          </a:p>
+        </p:txBody>
+      </p:sp>
+    </p:spTree>
+    <p:extLst>
+      <p:ext uri="{BB962C8B-B14F-4D97-AF65-F5344CB8AC3E}">
+        <p14:creationId xmlns:p14="http://schemas.microsoft.com/office/powerpoint/2010/main" val="1024086991"/>
+      </p:ext>
+    </p:extLst>
+  </p:cSld>
+  <p:clrMapOvr>
+    <a:masterClrMapping/>
+  </p:clrMapOvr>
+</p:notes>
+</file>
+
+<file path=ppt/notesSlides/notesSlide22.xml><?xml version="1.0" encoding="utf-8"?>
+<p:notes xmlns:a="http://schemas.openxmlformats.org/drawingml/2006/main" xmlns:r="http://schemas.openxmlformats.org/officeDocument/2006/relationships" xmlns:p="http://schemas.openxmlformats.org/presentationml/2006/main">
+  <p:cSld>
+    <p:spTree>
+      <p:nvGrpSpPr>
+        <p:cNvPr id="1" name=""/>
+        <p:cNvGrpSpPr/>
+        <p:nvPr/>
+      </p:nvGrpSpPr>
+      <p:grpSpPr>
+        <a:xfrm>
+          <a:off x="0" y="0"/>
+          <a:ext cx="0" cy="0"/>
+          <a:chOff x="0" y="0"/>
+          <a:chExt cx="0" cy="0"/>
+        </a:xfrm>
+      </p:grpSpPr>
+      <p:sp>
+        <p:nvSpPr>
+          <p:cNvPr id="2" name="Slide Image Placeholder 1"/>
+          <p:cNvSpPr>
+            <a:spLocks noGrp="1" noRot="1" noChangeAspect="1"/>
+          </p:cNvSpPr>
+          <p:nvPr>
+            <p:ph type="sldImg"/>
+          </p:nvPr>
+        </p:nvSpPr>
+        <p:spPr/>
+      </p:sp>
+      <p:sp>
+        <p:nvSpPr>
+          <p:cNvPr id="3" name="Notes Placeholder 2"/>
+          <p:cNvSpPr>
+            <a:spLocks noGrp="1"/>
+          </p:cNvSpPr>
+          <p:nvPr>
+            <p:ph type="body" idx="1"/>
+          </p:nvPr>
+        </p:nvSpPr>
+        <p:spPr/>
+        <p:txBody>
+          <a:bodyPr/>
+          <a:lstStyle/>
+          <a:p>
+            <a:r>
+              <a:rPr lang="en-US" dirty="0"/>
+              <a:t/>
+            </a:r>
+            <a:endParaRPr lang="en-US" dirty="0"/>
+          </a:p>
+        </p:txBody>
+      </p:sp>
+      <p:sp>
+        <p:nvSpPr>
+          <p:cNvPr id="4" name="Slide Number Placeholder 3"/>
+          <p:cNvSpPr>
+            <a:spLocks noGrp="1"/>
+          </p:cNvSpPr>
+          <p:nvPr>
+            <p:ph type="sldNum" sz="quarter" idx="10"/>
+          </p:nvPr>
+        </p:nvSpPr>
+        <p:spPr/>
+        <p:txBody>
+          <a:bodyPr/>
+          <a:lstStyle/>
+          <a:p>
+            <a:fld id="{F7021451-1387-4CA6-816F-3879F97B5CBC}" type="slidenum">
+              <a:rPr lang="en-US"/>
+              <a:t>22</a:t>
+            </a:fld>
+            <a:endParaRPr lang="en-US"/>
+          </a:p>
+        </p:txBody>
+      </p:sp>
+    </p:spTree>
+    <p:extLst>
+      <p:ext uri="{BB962C8B-B14F-4D97-AF65-F5344CB8AC3E}">
+        <p14:creationId xmlns:p14="http://schemas.microsoft.com/office/powerpoint/2010/main" val="1024086991"/>
+      </p:ext>
+    </p:extLst>
+  </p:cSld>
+  <p:clrMapOvr>
+    <a:masterClrMapping/>
+  </p:clrMapOvr>
+</p:notes>
+</file>
+
+<file path=ppt/notesSlides/notesSlide23.xml><?xml version="1.0" encoding="utf-8"?>
+<p:notes xmlns:a="http://schemas.openxmlformats.org/drawingml/2006/main" xmlns:r="http://schemas.openxmlformats.org/officeDocument/2006/relationships" xmlns:p="http://schemas.openxmlformats.org/presentationml/2006/main">
+  <p:cSld>
+    <p:spTree>
+      <p:nvGrpSpPr>
+        <p:cNvPr id="1" name=""/>
+        <p:cNvGrpSpPr/>
+        <p:nvPr/>
+      </p:nvGrpSpPr>
+      <p:grpSpPr>
+        <a:xfrm>
+          <a:off x="0" y="0"/>
+          <a:ext cx="0" cy="0"/>
+          <a:chOff x="0" y="0"/>
+          <a:chExt cx="0" cy="0"/>
+        </a:xfrm>
+      </p:grpSpPr>
+      <p:sp>
+        <p:nvSpPr>
+          <p:cNvPr id="2" name="Slide Image Placeholder 1"/>
+          <p:cNvSpPr>
+            <a:spLocks noGrp="1" noRot="1" noChangeAspect="1"/>
+          </p:cNvSpPr>
+          <p:nvPr>
+            <p:ph type="sldImg"/>
+          </p:nvPr>
+        </p:nvSpPr>
+        <p:spPr/>
+      </p:sp>
+      <p:sp>
+        <p:nvSpPr>
+          <p:cNvPr id="3" name="Notes Placeholder 2"/>
+          <p:cNvSpPr>
+            <a:spLocks noGrp="1"/>
+          </p:cNvSpPr>
+          <p:nvPr>
+            <p:ph type="body" idx="1"/>
+          </p:nvPr>
+        </p:nvSpPr>
+        <p:spPr/>
+        <p:txBody>
+          <a:bodyPr/>
+          <a:lstStyle/>
+          <a:p>
+            <a:r>
+              <a:rPr lang="en-US" dirty="0"/>
+              <a:t/>
+            </a:r>
+            <a:endParaRPr lang="en-US" dirty="0"/>
+          </a:p>
+        </p:txBody>
+      </p:sp>
+      <p:sp>
+        <p:nvSpPr>
+          <p:cNvPr id="4" name="Slide Number Placeholder 3"/>
+          <p:cNvSpPr>
+            <a:spLocks noGrp="1"/>
+          </p:cNvSpPr>
+          <p:nvPr>
+            <p:ph type="sldNum" sz="quarter" idx="10"/>
+          </p:nvPr>
+        </p:nvSpPr>
+        <p:spPr/>
+        <p:txBody>
+          <a:bodyPr/>
+          <a:lstStyle/>
+          <a:p>
+            <a:fld id="{F7021451-1387-4CA6-816F-3879F97B5CBC}" type="slidenum">
+              <a:rPr lang="en-US"/>
+              <a:t>23</a:t>
+            </a:fld>
+            <a:endParaRPr lang="en-US"/>
+          </a:p>
+        </p:txBody>
+      </p:sp>
+    </p:spTree>
+    <p:extLst>
+      <p:ext uri="{BB962C8B-B14F-4D97-AF65-F5344CB8AC3E}">
+        <p14:creationId xmlns:p14="http://schemas.microsoft.com/office/powerpoint/2010/main" val="1024086991"/>
+      </p:ext>
+    </p:extLst>
+  </p:cSld>
+  <p:clrMapOvr>
+    <a:masterClrMapping/>
+  </p:clrMapOvr>
+</p:notes>
+</file>
+
+<file path=ppt/notesSlides/notesSlide24.xml><?xml version="1.0" encoding="utf-8"?>
+<p:notes xmlns:a="http://schemas.openxmlformats.org/drawingml/2006/main" xmlns:r="http://schemas.openxmlformats.org/officeDocument/2006/relationships" xmlns:p="http://schemas.openxmlformats.org/presentationml/2006/main">
+  <p:cSld>
+    <p:spTree>
+      <p:nvGrpSpPr>
+        <p:cNvPr id="1" name=""/>
+        <p:cNvGrpSpPr/>
+        <p:nvPr/>
+      </p:nvGrpSpPr>
+      <p:grpSpPr>
+        <a:xfrm>
+          <a:off x="0" y="0"/>
+          <a:ext cx="0" cy="0"/>
+          <a:chOff x="0" y="0"/>
+          <a:chExt cx="0" cy="0"/>
+        </a:xfrm>
+      </p:grpSpPr>
+      <p:sp>
+        <p:nvSpPr>
+          <p:cNvPr id="2" name="Slide Image Placeholder 1"/>
+          <p:cNvSpPr>
+            <a:spLocks noGrp="1" noRot="1" noChangeAspect="1"/>
+          </p:cNvSpPr>
+          <p:nvPr>
+            <p:ph type="sldImg"/>
+          </p:nvPr>
+        </p:nvSpPr>
+        <p:spPr/>
+      </p:sp>
+      <p:sp>
+        <p:nvSpPr>
+          <p:cNvPr id="3" name="Notes Placeholder 2"/>
+          <p:cNvSpPr>
+            <a:spLocks noGrp="1"/>
+          </p:cNvSpPr>
+          <p:nvPr>
+            <p:ph type="body" idx="1"/>
+          </p:nvPr>
+        </p:nvSpPr>
+        <p:spPr/>
+        <p:txBody>
+          <a:bodyPr/>
+          <a:lstStyle/>
+          <a:p>
+            <a:r>
+              <a:rPr lang="en-US" dirty="0"/>
+              <a:t/>
+            </a:r>
+            <a:endParaRPr lang="en-US" dirty="0"/>
+          </a:p>
+        </p:txBody>
+      </p:sp>
+      <p:sp>
+        <p:nvSpPr>
+          <p:cNvPr id="4" name="Slide Number Placeholder 3"/>
+          <p:cNvSpPr>
+            <a:spLocks noGrp="1"/>
+          </p:cNvSpPr>
+          <p:nvPr>
+            <p:ph type="sldNum" sz="quarter" idx="10"/>
+          </p:nvPr>
+        </p:nvSpPr>
+        <p:spPr/>
+        <p:txBody>
+          <a:bodyPr/>
+          <a:lstStyle/>
+          <a:p>
+            <a:fld id="{F7021451-1387-4CA6-816F-3879F97B5CBC}" type="slidenum">
+              <a:rPr lang="en-US"/>
+              <a:t>24</a:t>
             </a:fld>
             <a:endParaRPr lang="en-US"/>
           </a:p>
@@ -9095,7 +9362,7 @@
                 <a:ea typeface="Calibri" pitchFamily="34" charset="-122"/>
                 <a:cs typeface="Calibri" pitchFamily="34" charset="-120"/>
               </a:rPr>
-              <a:t>TWO WAYS WE CAN WORK</a:t>
+              <a:t>THE PART EVERYTHING ELSE EXISTS FOR</a:t>
             </a:r>
             <a:endParaRPr lang="en-US" sz="1200" dirty="0"/>
           </a:p>
@@ -9137,7 +9404,7 @@
                 <a:ea typeface="Cambria" pitchFamily="34" charset="-122"/>
                 <a:cs typeface="Cambria" pitchFamily="34" charset="-120"/>
               </a:rPr>
-              <a:t>Both are real. They do different jobs.</a:t>
+              <a:t>How this actually turns into money</a:t>
             </a:r>
             <a:endParaRPr lang="en-US" sz="3900" dirty="0"/>
           </a:p>
@@ -9145,18 +9412,57 @@
       </p:sp>
       <p:sp>
         <p:nvSpPr>
-          <p:cNvPr id="4" name="Shape 2"/>
-          <p:cNvSpPr/>
-          <p:nvPr/>
-        </p:nvSpPr>
-        <p:spPr>
-          <a:xfrm>
-            <a:off x="713232" y="1783080"/>
-            <a:ext cx="5257800" cy="3566160"/>
+          <p:cNvPr id="4" name="Text 2"/>
+          <p:cNvSpPr/>
+          <p:nvPr/>
+        </p:nvSpPr>
+        <p:spPr>
+          <a:xfrm>
+            <a:off x="713232" y="1737360"/>
+            <a:ext cx="10735056" cy="320040"/>
+          </a:xfrm>
+          <a:prstGeom prst="rect">
+            <a:avLst/>
+          </a:prstGeom>
+          <a:noFill/>
+          <a:ln/>
+        </p:spPr>
+        <p:txBody>
+          <a:bodyPr wrap="square" lIns="0" tIns="0" rIns="0" bIns="0" rtlCol="0" anchor="ctr"/>
+          <a:lstStyle/>
+          <a:p>
+            <a:pPr indent="0" marL="0">
+              <a:buNone/>
+            </a:pPr>
+            <a:r>
+              <a:rPr lang="en-US" sz="1600" dirty="0">
+                <a:solidFill>
+                  <a:srgbClr val="7A6068"/>
+                </a:solidFill>
+                <a:latin typeface="Calibri" pitchFamily="34" charset="0"/>
+                <a:ea typeface="Calibri" pitchFamily="34" charset="-122"/>
+                <a:cs typeface="Calibri" pitchFamily="34" charset="-120"/>
+              </a:rPr>
+              <a:t>Nobody buys from a stranger. This is the path from someone who scrolls past you to someone who pays you.</a:t>
+            </a:r>
+            <a:endParaRPr lang="en-US" sz="1600" dirty="0"/>
+          </a:p>
+        </p:txBody>
+      </p:sp>
+      <p:sp>
+        <p:nvSpPr>
+          <p:cNvPr id="5" name="Shape 3"/>
+          <p:cNvSpPr/>
+          <p:nvPr/>
+        </p:nvSpPr>
+        <p:spPr>
+          <a:xfrm>
+            <a:off x="713232" y="2194560"/>
+            <a:ext cx="2048256" cy="1627632"/>
           </a:xfrm>
           <a:prstGeom prst="roundRect">
             <a:avLst>
-              <a:gd name="adj" fmla="val 3590"/>
+              <a:gd name="adj" fmla="val 7865"/>
             </a:avLst>
           </a:prstGeom>
           <a:solidFill>
@@ -9167,30 +9473,134 @@
       </p:sp>
       <p:sp>
         <p:nvSpPr>
-          <p:cNvPr id="5" name="Text 3"/>
-          <p:cNvSpPr/>
-          <p:nvPr/>
-        </p:nvSpPr>
-        <p:spPr>
-          <a:xfrm>
-            <a:off x="1060704" y="1993392"/>
-            <a:ext cx="4572000" cy="256032"/>
-          </a:xfrm>
-          <a:prstGeom prst="rect">
-            <a:avLst/>
-          </a:prstGeom>
-          <a:noFill/>
-          <a:ln/>
-        </p:spPr>
-        <p:txBody>
-          <a:bodyPr wrap="square" lIns="0" tIns="0" rIns="0" bIns="0" rtlCol="0" anchor="ctr"/>
-          <a:lstStyle/>
-          <a:p>
-            <a:pPr indent="0" marL="0">
-              <a:buNone/>
-            </a:pPr>
-            <a:r>
-              <a:rPr lang="en-US" sz="1250" b="1" spc="160" kern="0" dirty="0">
+          <p:cNvPr id="6" name="Shape 4"/>
+          <p:cNvSpPr/>
+          <p:nvPr/>
+        </p:nvSpPr>
+        <p:spPr>
+          <a:xfrm>
+            <a:off x="932688" y="2377440"/>
+            <a:ext cx="329184" cy="329184"/>
+          </a:xfrm>
+          <a:prstGeom prst="ellipse">
+            <a:avLst/>
+          </a:prstGeom>
+          <a:solidFill>
+            <a:srgbClr val="6D2E46"/>
+          </a:solidFill>
+          <a:ln/>
+        </p:spPr>
+      </p:sp>
+      <p:sp>
+        <p:nvSpPr>
+          <p:cNvPr id="7" name="Text 5"/>
+          <p:cNvSpPr/>
+          <p:nvPr/>
+        </p:nvSpPr>
+        <p:spPr>
+          <a:xfrm>
+            <a:off x="932688" y="2377440"/>
+            <a:ext cx="329184" cy="329184"/>
+          </a:xfrm>
+          <a:prstGeom prst="rect">
+            <a:avLst/>
+          </a:prstGeom>
+          <a:noFill/>
+          <a:ln/>
+        </p:spPr>
+        <p:txBody>
+          <a:bodyPr wrap="square" lIns="0" tIns="0" rIns="0" bIns="0" rtlCol="0" anchor="ctr"/>
+          <a:lstStyle/>
+          <a:p>
+            <a:pPr algn="ctr" indent="0" marL="0">
+              <a:buNone/>
+            </a:pPr>
+            <a:r>
+              <a:rPr lang="en-US" sz="1300" b="1" dirty="0">
+                <a:solidFill>
+                  <a:srgbClr val="FFFFFF"/>
+                </a:solidFill>
+                <a:latin typeface="Calibri" pitchFamily="34" charset="0"/>
+                <a:ea typeface="Calibri" pitchFamily="34" charset="-122"/>
+                <a:cs typeface="Calibri" pitchFamily="34" charset="-120"/>
+              </a:rPr>
+              <a:t>1</a:t>
+            </a:r>
+            <a:endParaRPr lang="en-US" sz="1300" dirty="0"/>
+          </a:p>
+        </p:txBody>
+      </p:sp>
+      <p:sp>
+        <p:nvSpPr>
+          <p:cNvPr id="8" name="Text 6"/>
+          <p:cNvSpPr/>
+          <p:nvPr/>
+        </p:nvSpPr>
+        <p:spPr>
+          <a:xfrm>
+            <a:off x="932688" y="2798064"/>
+            <a:ext cx="1691640" cy="384048"/>
+          </a:xfrm>
+          <a:prstGeom prst="rect">
+            <a:avLst/>
+          </a:prstGeom>
+          <a:noFill/>
+          <a:ln/>
+        </p:spPr>
+        <p:txBody>
+          <a:bodyPr wrap="square" lIns="0" tIns="0" rIns="0" bIns="0" rtlCol="0" anchor="ctr"/>
+          <a:lstStyle/>
+          <a:p>
+            <a:pPr indent="0" marL="0">
+              <a:lnSpc>
+                <a:spcPts val="1800"/>
+              </a:lnSpc>
+              <a:buNone/>
+            </a:pPr>
+            <a:r>
+              <a:rPr lang="en-US" sz="1400" b="1" dirty="0">
+                <a:solidFill>
+                  <a:srgbClr val="2B1620"/>
+                </a:solidFill>
+                <a:latin typeface="Calibri" pitchFamily="34" charset="0"/>
+                <a:ea typeface="Calibri" pitchFamily="34" charset="-122"/>
+                <a:cs typeface="Calibri" pitchFamily="34" charset="-120"/>
+              </a:rPr>
+              <a:t>She sees a reel</a:t>
+            </a:r>
+            <a:endParaRPr lang="en-US" sz="1400" dirty="0"/>
+          </a:p>
+        </p:txBody>
+      </p:sp>
+      <p:sp>
+        <p:nvSpPr>
+          <p:cNvPr id="9" name="Text 7"/>
+          <p:cNvSpPr/>
+          <p:nvPr/>
+        </p:nvSpPr>
+        <p:spPr>
+          <a:xfrm>
+            <a:off x="932688" y="3182112"/>
+            <a:ext cx="1737360" cy="566928"/>
+          </a:xfrm>
+          <a:prstGeom prst="rect">
+            <a:avLst/>
+          </a:prstGeom>
+          <a:noFill/>
+          <a:ln/>
+        </p:spPr>
+        <p:txBody>
+          <a:bodyPr wrap="square" lIns="0" tIns="0" rIns="0" bIns="0" rtlCol="0" anchor="ctr"/>
+          <a:lstStyle/>
+          <a:p>
+            <a:pPr indent="0" marL="0">
+              <a:lnSpc>
+                <a:spcPts val="1400"/>
+              </a:lnSpc>
+              <a:buNone/>
+            </a:pPr>
+            <a:r>
+              <a:rPr lang="en-US" sz="1100" dirty="0">
                 <a:solidFill>
                   <a:srgbClr val="7A6068"/>
                 </a:solidFill>
@@ -9198,668 +9608,773 @@
                 <a:ea typeface="Calibri" pitchFamily="34" charset="-122"/>
                 <a:cs typeface="Calibri" pitchFamily="34" charset="-120"/>
               </a:rPr>
-              <a:t>OPTION 1</a:t>
-            </a:r>
-            <a:endParaRPr lang="en-US" sz="1250" dirty="0"/>
-          </a:p>
-        </p:txBody>
-      </p:sp>
-      <p:sp>
-        <p:nvSpPr>
-          <p:cNvPr id="6" name="Text 4"/>
-          <p:cNvSpPr/>
-          <p:nvPr/>
-        </p:nvSpPr>
-        <p:spPr>
-          <a:xfrm>
-            <a:off x="1060704" y="2286000"/>
-            <a:ext cx="4572000" cy="411480"/>
-          </a:xfrm>
-          <a:prstGeom prst="rect">
-            <a:avLst/>
-          </a:prstGeom>
-          <a:noFill/>
-          <a:ln/>
-        </p:spPr>
-        <p:txBody>
-          <a:bodyPr wrap="square" lIns="0" tIns="0" rIns="0" bIns="0" rtlCol="0" anchor="ctr"/>
-          <a:lstStyle/>
-          <a:p>
-            <a:pPr indent="0" marL="0">
-              <a:buNone/>
-            </a:pPr>
-            <a:r>
-              <a:rPr lang="en-US" sz="2600" b="1" dirty="0">
+              <a:t>You show a result. You hold back the method.</a:t>
+            </a:r>
+            <a:endParaRPr lang="en-US" sz="1100" dirty="0"/>
+          </a:p>
+        </p:txBody>
+      </p:sp>
+      <p:sp>
+        <p:nvSpPr>
+          <p:cNvPr id="10" name="Shape 8"/>
+          <p:cNvSpPr/>
+          <p:nvPr/>
+        </p:nvSpPr>
+        <p:spPr>
+          <a:xfrm>
+            <a:off x="2889504" y="2194560"/>
+            <a:ext cx="2048256" cy="1627632"/>
+          </a:xfrm>
+          <a:prstGeom prst="roundRect">
+            <a:avLst>
+              <a:gd name="adj" fmla="val 7865"/>
+            </a:avLst>
+          </a:prstGeom>
+          <a:solidFill>
+            <a:srgbClr val="F7F2F4"/>
+          </a:solidFill>
+          <a:ln/>
+        </p:spPr>
+      </p:sp>
+      <p:sp>
+        <p:nvSpPr>
+          <p:cNvPr id="11" name="Shape 9"/>
+          <p:cNvSpPr/>
+          <p:nvPr/>
+        </p:nvSpPr>
+        <p:spPr>
+          <a:xfrm>
+            <a:off x="3108960" y="2377440"/>
+            <a:ext cx="329184" cy="329184"/>
+          </a:xfrm>
+          <a:prstGeom prst="ellipse">
+            <a:avLst/>
+          </a:prstGeom>
+          <a:solidFill>
+            <a:srgbClr val="6D2E46"/>
+          </a:solidFill>
+          <a:ln/>
+        </p:spPr>
+      </p:sp>
+      <p:sp>
+        <p:nvSpPr>
+          <p:cNvPr id="12" name="Text 10"/>
+          <p:cNvSpPr/>
+          <p:nvPr/>
+        </p:nvSpPr>
+        <p:spPr>
+          <a:xfrm>
+            <a:off x="3108960" y="2377440"/>
+            <a:ext cx="329184" cy="329184"/>
+          </a:xfrm>
+          <a:prstGeom prst="rect">
+            <a:avLst/>
+          </a:prstGeom>
+          <a:noFill/>
+          <a:ln/>
+        </p:spPr>
+        <p:txBody>
+          <a:bodyPr wrap="square" lIns="0" tIns="0" rIns="0" bIns="0" rtlCol="0" anchor="ctr"/>
+          <a:lstStyle/>
+          <a:p>
+            <a:pPr algn="ctr" indent="0" marL="0">
+              <a:buNone/>
+            </a:pPr>
+            <a:r>
+              <a:rPr lang="en-US" sz="1300" b="1" dirty="0">
+                <a:solidFill>
+                  <a:srgbClr val="FFFFFF"/>
+                </a:solidFill>
+                <a:latin typeface="Calibri" pitchFamily="34" charset="0"/>
+                <a:ea typeface="Calibri" pitchFamily="34" charset="-122"/>
+                <a:cs typeface="Calibri" pitchFamily="34" charset="-120"/>
+              </a:rPr>
+              <a:t>2</a:t>
+            </a:r>
+            <a:endParaRPr lang="en-US" sz="1300" dirty="0"/>
+          </a:p>
+        </p:txBody>
+      </p:sp>
+      <p:sp>
+        <p:nvSpPr>
+          <p:cNvPr id="13" name="Text 11"/>
+          <p:cNvSpPr/>
+          <p:nvPr/>
+        </p:nvSpPr>
+        <p:spPr>
+          <a:xfrm>
+            <a:off x="3108960" y="2798064"/>
+            <a:ext cx="1691640" cy="384048"/>
+          </a:xfrm>
+          <a:prstGeom prst="rect">
+            <a:avLst/>
+          </a:prstGeom>
+          <a:noFill/>
+          <a:ln/>
+        </p:spPr>
+        <p:txBody>
+          <a:bodyPr wrap="square" lIns="0" tIns="0" rIns="0" bIns="0" rtlCol="0" anchor="ctr"/>
+          <a:lstStyle/>
+          <a:p>
+            <a:pPr indent="0" marL="0">
+              <a:lnSpc>
+                <a:spcPts val="1800"/>
+              </a:lnSpc>
+              <a:buNone/>
+            </a:pPr>
+            <a:r>
+              <a:rPr lang="en-US" sz="1400" b="1" dirty="0">
                 <a:solidFill>
                   <a:srgbClr val="2B1620"/>
+                </a:solidFill>
+                <a:latin typeface="Calibri" pitchFamily="34" charset="0"/>
+                <a:ea typeface="Calibri" pitchFamily="34" charset="-122"/>
+                <a:cs typeface="Calibri" pitchFamily="34" charset="-120"/>
+              </a:rPr>
+              <a:t>She asks for it</a:t>
+            </a:r>
+            <a:endParaRPr lang="en-US" sz="1400" dirty="0"/>
+          </a:p>
+        </p:txBody>
+      </p:sp>
+      <p:sp>
+        <p:nvSpPr>
+          <p:cNvPr id="14" name="Text 12"/>
+          <p:cNvSpPr/>
+          <p:nvPr/>
+        </p:nvSpPr>
+        <p:spPr>
+          <a:xfrm>
+            <a:off x="3108960" y="3182112"/>
+            <a:ext cx="1737360" cy="566928"/>
+          </a:xfrm>
+          <a:prstGeom prst="rect">
+            <a:avLst/>
+          </a:prstGeom>
+          <a:noFill/>
+          <a:ln/>
+        </p:spPr>
+        <p:txBody>
+          <a:bodyPr wrap="square" lIns="0" tIns="0" rIns="0" bIns="0" rtlCol="0" anchor="ctr"/>
+          <a:lstStyle/>
+          <a:p>
+            <a:pPr indent="0" marL="0">
+              <a:lnSpc>
+                <a:spcPts val="1400"/>
+              </a:lnSpc>
+              <a:buNone/>
+            </a:pPr>
+            <a:r>
+              <a:rPr lang="en-US" sz="1100" dirty="0">
+                <a:solidFill>
+                  <a:srgbClr val="7A6068"/>
+                </a:solidFill>
+                <a:latin typeface="Calibri" pitchFamily="34" charset="0"/>
+                <a:ea typeface="Calibri" pitchFamily="34" charset="-122"/>
+                <a:cs typeface="Calibri" pitchFamily="34" charset="-120"/>
+              </a:rPr>
+              <a:t>A comment or a DM. This is the moment we design for.</a:t>
+            </a:r>
+            <a:endParaRPr lang="en-US" sz="1100" dirty="0"/>
+          </a:p>
+        </p:txBody>
+      </p:sp>
+      <p:sp>
+        <p:nvSpPr>
+          <p:cNvPr id="15" name="Shape 13"/>
+          <p:cNvSpPr/>
+          <p:nvPr/>
+        </p:nvSpPr>
+        <p:spPr>
+          <a:xfrm>
+            <a:off x="5065776" y="2194560"/>
+            <a:ext cx="2048256" cy="1627632"/>
+          </a:xfrm>
+          <a:prstGeom prst="roundRect">
+            <a:avLst>
+              <a:gd name="adj" fmla="val 7865"/>
+            </a:avLst>
+          </a:prstGeom>
+          <a:solidFill>
+            <a:srgbClr val="6D2E46"/>
+          </a:solidFill>
+          <a:ln/>
+        </p:spPr>
+      </p:sp>
+      <p:sp>
+        <p:nvSpPr>
+          <p:cNvPr id="16" name="Shape 14"/>
+          <p:cNvSpPr/>
+          <p:nvPr/>
+        </p:nvSpPr>
+        <p:spPr>
+          <a:xfrm>
+            <a:off x="5285232" y="2377440"/>
+            <a:ext cx="329184" cy="329184"/>
+          </a:xfrm>
+          <a:prstGeom prst="ellipse">
+            <a:avLst/>
+          </a:prstGeom>
+          <a:solidFill>
+            <a:srgbClr val="D9A441"/>
+          </a:solidFill>
+          <a:ln/>
+        </p:spPr>
+      </p:sp>
+      <p:sp>
+        <p:nvSpPr>
+          <p:cNvPr id="17" name="Text 15"/>
+          <p:cNvSpPr/>
+          <p:nvPr/>
+        </p:nvSpPr>
+        <p:spPr>
+          <a:xfrm>
+            <a:off x="5285232" y="2377440"/>
+            <a:ext cx="329184" cy="329184"/>
+          </a:xfrm>
+          <a:prstGeom prst="rect">
+            <a:avLst/>
+          </a:prstGeom>
+          <a:noFill/>
+          <a:ln/>
+        </p:spPr>
+        <p:txBody>
+          <a:bodyPr wrap="square" lIns="0" tIns="0" rIns="0" bIns="0" rtlCol="0" anchor="ctr"/>
+          <a:lstStyle/>
+          <a:p>
+            <a:pPr algn="ctr" indent="0" marL="0">
+              <a:buNone/>
+            </a:pPr>
+            <a:r>
+              <a:rPr lang="en-US" sz="1300" b="1" dirty="0">
+                <a:solidFill>
+                  <a:srgbClr val="3D1B2E"/>
+                </a:solidFill>
+                <a:latin typeface="Calibri" pitchFamily="34" charset="0"/>
+                <a:ea typeface="Calibri" pitchFamily="34" charset="-122"/>
+                <a:cs typeface="Calibri" pitchFamily="34" charset="-120"/>
+              </a:rPr>
+              <a:t>3</a:t>
+            </a:r>
+            <a:endParaRPr lang="en-US" sz="1300" dirty="0"/>
+          </a:p>
+        </p:txBody>
+      </p:sp>
+      <p:sp>
+        <p:nvSpPr>
+          <p:cNvPr id="18" name="Text 16"/>
+          <p:cNvSpPr/>
+          <p:nvPr/>
+        </p:nvSpPr>
+        <p:spPr>
+          <a:xfrm>
+            <a:off x="5285232" y="2798064"/>
+            <a:ext cx="1691640" cy="384048"/>
+          </a:xfrm>
+          <a:prstGeom prst="rect">
+            <a:avLst/>
+          </a:prstGeom>
+          <a:noFill/>
+          <a:ln/>
+        </p:spPr>
+        <p:txBody>
+          <a:bodyPr wrap="square" lIns="0" tIns="0" rIns="0" bIns="0" rtlCol="0" anchor="ctr"/>
+          <a:lstStyle/>
+          <a:p>
+            <a:pPr indent="0" marL="0">
+              <a:lnSpc>
+                <a:spcPts val="1800"/>
+              </a:lnSpc>
+              <a:buNone/>
+            </a:pPr>
+            <a:r>
+              <a:rPr lang="en-US" sz="1400" b="1" dirty="0">
+                <a:solidFill>
+                  <a:srgbClr val="FFFFFF"/>
+                </a:solidFill>
+                <a:latin typeface="Calibri" pitchFamily="34" charset="0"/>
+                <a:ea typeface="Calibri" pitchFamily="34" charset="-122"/>
+                <a:cs typeface="Calibri" pitchFamily="34" charset="-120"/>
+              </a:rPr>
+              <a:t>She joins your WhatsApp</a:t>
+            </a:r>
+            <a:endParaRPr lang="en-US" sz="1400" dirty="0"/>
+          </a:p>
+        </p:txBody>
+      </p:sp>
+      <p:sp>
+        <p:nvSpPr>
+          <p:cNvPr id="19" name="Text 17"/>
+          <p:cNvSpPr/>
+          <p:nvPr/>
+        </p:nvSpPr>
+        <p:spPr>
+          <a:xfrm>
+            <a:off x="5285232" y="3182112"/>
+            <a:ext cx="1737360" cy="566928"/>
+          </a:xfrm>
+          <a:prstGeom prst="rect">
+            <a:avLst/>
+          </a:prstGeom>
+          <a:noFill/>
+          <a:ln/>
+        </p:spPr>
+        <p:txBody>
+          <a:bodyPr wrap="square" lIns="0" tIns="0" rIns="0" bIns="0" rtlCol="0" anchor="ctr"/>
+          <a:lstStyle/>
+          <a:p>
+            <a:pPr indent="0" marL="0">
+              <a:lnSpc>
+                <a:spcPts val="1400"/>
+              </a:lnSpc>
+              <a:buNone/>
+            </a:pPr>
+            <a:r>
+              <a:rPr lang="en-US" sz="1100" dirty="0">
+                <a:solidFill>
+                  <a:srgbClr val="C9AEB8"/>
+                </a:solidFill>
+                <a:latin typeface="Calibri" pitchFamily="34" charset="0"/>
+                <a:ea typeface="Calibri" pitchFamily="34" charset="-122"/>
+                <a:cs typeface="Calibri" pitchFamily="34" charset="-120"/>
+              </a:rPr>
+              <a:t>Now she's yours, not Instagram's.</a:t>
+            </a:r>
+            <a:endParaRPr lang="en-US" sz="1100" dirty="0"/>
+          </a:p>
+        </p:txBody>
+      </p:sp>
+      <p:sp>
+        <p:nvSpPr>
+          <p:cNvPr id="20" name="Shape 18"/>
+          <p:cNvSpPr/>
+          <p:nvPr/>
+        </p:nvSpPr>
+        <p:spPr>
+          <a:xfrm>
+            <a:off x="7242048" y="2194560"/>
+            <a:ext cx="2048256" cy="1627632"/>
+          </a:xfrm>
+          <a:prstGeom prst="roundRect">
+            <a:avLst>
+              <a:gd name="adj" fmla="val 7865"/>
+            </a:avLst>
+          </a:prstGeom>
+          <a:solidFill>
+            <a:srgbClr val="F7F2F4"/>
+          </a:solidFill>
+          <a:ln/>
+        </p:spPr>
+      </p:sp>
+      <p:sp>
+        <p:nvSpPr>
+          <p:cNvPr id="21" name="Shape 19"/>
+          <p:cNvSpPr/>
+          <p:nvPr/>
+        </p:nvSpPr>
+        <p:spPr>
+          <a:xfrm>
+            <a:off x="7461504" y="2377440"/>
+            <a:ext cx="329184" cy="329184"/>
+          </a:xfrm>
+          <a:prstGeom prst="ellipse">
+            <a:avLst/>
+          </a:prstGeom>
+          <a:solidFill>
+            <a:srgbClr val="6D2E46"/>
+          </a:solidFill>
+          <a:ln/>
+        </p:spPr>
+      </p:sp>
+      <p:sp>
+        <p:nvSpPr>
+          <p:cNvPr id="22" name="Text 20"/>
+          <p:cNvSpPr/>
+          <p:nvPr/>
+        </p:nvSpPr>
+        <p:spPr>
+          <a:xfrm>
+            <a:off x="7461504" y="2377440"/>
+            <a:ext cx="329184" cy="329184"/>
+          </a:xfrm>
+          <a:prstGeom prst="rect">
+            <a:avLst/>
+          </a:prstGeom>
+          <a:noFill/>
+          <a:ln/>
+        </p:spPr>
+        <p:txBody>
+          <a:bodyPr wrap="square" lIns="0" tIns="0" rIns="0" bIns="0" rtlCol="0" anchor="ctr"/>
+          <a:lstStyle/>
+          <a:p>
+            <a:pPr algn="ctr" indent="0" marL="0">
+              <a:buNone/>
+            </a:pPr>
+            <a:r>
+              <a:rPr lang="en-US" sz="1300" b="1" dirty="0">
+                <a:solidFill>
+                  <a:srgbClr val="FFFFFF"/>
+                </a:solidFill>
+                <a:latin typeface="Calibri" pitchFamily="34" charset="0"/>
+                <a:ea typeface="Calibri" pitchFamily="34" charset="-122"/>
+                <a:cs typeface="Calibri" pitchFamily="34" charset="-120"/>
+              </a:rPr>
+              <a:t>4</a:t>
+            </a:r>
+            <a:endParaRPr lang="en-US" sz="1300" dirty="0"/>
+          </a:p>
+        </p:txBody>
+      </p:sp>
+      <p:sp>
+        <p:nvSpPr>
+          <p:cNvPr id="23" name="Text 21"/>
+          <p:cNvSpPr/>
+          <p:nvPr/>
+        </p:nvSpPr>
+        <p:spPr>
+          <a:xfrm>
+            <a:off x="7461504" y="2798064"/>
+            <a:ext cx="1691640" cy="384048"/>
+          </a:xfrm>
+          <a:prstGeom prst="rect">
+            <a:avLst/>
+          </a:prstGeom>
+          <a:noFill/>
+          <a:ln/>
+        </p:spPr>
+        <p:txBody>
+          <a:bodyPr wrap="square" lIns="0" tIns="0" rIns="0" bIns="0" rtlCol="0" anchor="ctr"/>
+          <a:lstStyle/>
+          <a:p>
+            <a:pPr indent="0" marL="0">
+              <a:lnSpc>
+                <a:spcPts val="1800"/>
+              </a:lnSpc>
+              <a:buNone/>
+            </a:pPr>
+            <a:r>
+              <a:rPr lang="en-US" sz="1400" b="1" dirty="0">
+                <a:solidFill>
+                  <a:srgbClr val="2B1620"/>
+                </a:solidFill>
+                <a:latin typeface="Calibri" pitchFamily="34" charset="0"/>
+                <a:ea typeface="Calibri" pitchFamily="34" charset="-122"/>
+                <a:cs typeface="Calibri" pitchFamily="34" charset="-120"/>
+              </a:rPr>
+              <a:t>She hears from you weekly</a:t>
+            </a:r>
+            <a:endParaRPr lang="en-US" sz="1400" dirty="0"/>
+          </a:p>
+        </p:txBody>
+      </p:sp>
+      <p:sp>
+        <p:nvSpPr>
+          <p:cNvPr id="24" name="Text 22"/>
+          <p:cNvSpPr/>
+          <p:nvPr/>
+        </p:nvSpPr>
+        <p:spPr>
+          <a:xfrm>
+            <a:off x="7461504" y="3182112"/>
+            <a:ext cx="1737360" cy="566928"/>
+          </a:xfrm>
+          <a:prstGeom prst="rect">
+            <a:avLst/>
+          </a:prstGeom>
+          <a:noFill/>
+          <a:ln/>
+        </p:spPr>
+        <p:txBody>
+          <a:bodyPr wrap="square" lIns="0" tIns="0" rIns="0" bIns="0" rtlCol="0" anchor="ctr"/>
+          <a:lstStyle/>
+          <a:p>
+            <a:pPr indent="0" marL="0">
+              <a:lnSpc>
+                <a:spcPts val="1400"/>
+              </a:lnSpc>
+              <a:buNone/>
+            </a:pPr>
+            <a:r>
+              <a:rPr lang="en-US" sz="1100" dirty="0">
+                <a:solidFill>
+                  <a:srgbClr val="7A6068"/>
+                </a:solidFill>
+                <a:latin typeface="Calibri" pitchFamily="34" charset="0"/>
+                <a:ea typeface="Calibri" pitchFamily="34" charset="-122"/>
+                <a:cs typeface="Calibri" pitchFamily="34" charset="-120"/>
+              </a:rPr>
+              <a:t>Useful things. Not selling. Trust is built here.</a:t>
+            </a:r>
+            <a:endParaRPr lang="en-US" sz="1100" dirty="0"/>
+          </a:p>
+        </p:txBody>
+      </p:sp>
+      <p:sp>
+        <p:nvSpPr>
+          <p:cNvPr id="25" name="Shape 23"/>
+          <p:cNvSpPr/>
+          <p:nvPr/>
+        </p:nvSpPr>
+        <p:spPr>
+          <a:xfrm>
+            <a:off x="9418320" y="2194560"/>
+            <a:ext cx="2048256" cy="1627632"/>
+          </a:xfrm>
+          <a:prstGeom prst="roundRect">
+            <a:avLst>
+              <a:gd name="adj" fmla="val 7865"/>
+            </a:avLst>
+          </a:prstGeom>
+          <a:solidFill>
+            <a:srgbClr val="3D1B2E"/>
+          </a:solidFill>
+          <a:ln/>
+        </p:spPr>
+      </p:sp>
+      <p:sp>
+        <p:nvSpPr>
+          <p:cNvPr id="26" name="Shape 24"/>
+          <p:cNvSpPr/>
+          <p:nvPr/>
+        </p:nvSpPr>
+        <p:spPr>
+          <a:xfrm>
+            <a:off x="9637776" y="2377440"/>
+            <a:ext cx="329184" cy="329184"/>
+          </a:xfrm>
+          <a:prstGeom prst="ellipse">
+            <a:avLst/>
+          </a:prstGeom>
+          <a:solidFill>
+            <a:srgbClr val="D9A441"/>
+          </a:solidFill>
+          <a:ln/>
+        </p:spPr>
+      </p:sp>
+      <p:sp>
+        <p:nvSpPr>
+          <p:cNvPr id="27" name="Text 25"/>
+          <p:cNvSpPr/>
+          <p:nvPr/>
+        </p:nvSpPr>
+        <p:spPr>
+          <a:xfrm>
+            <a:off x="9637776" y="2377440"/>
+            <a:ext cx="329184" cy="329184"/>
+          </a:xfrm>
+          <a:prstGeom prst="rect">
+            <a:avLst/>
+          </a:prstGeom>
+          <a:noFill/>
+          <a:ln/>
+        </p:spPr>
+        <p:txBody>
+          <a:bodyPr wrap="square" lIns="0" tIns="0" rIns="0" bIns="0" rtlCol="0" anchor="ctr"/>
+          <a:lstStyle/>
+          <a:p>
+            <a:pPr algn="ctr" indent="0" marL="0">
+              <a:buNone/>
+            </a:pPr>
+            <a:r>
+              <a:rPr lang="en-US" sz="1300" b="1" dirty="0">
+                <a:solidFill>
+                  <a:srgbClr val="3D1B2E"/>
+                </a:solidFill>
+                <a:latin typeface="Calibri" pitchFamily="34" charset="0"/>
+                <a:ea typeface="Calibri" pitchFamily="34" charset="-122"/>
+                <a:cs typeface="Calibri" pitchFamily="34" charset="-120"/>
+              </a:rPr>
+              <a:t>5</a:t>
+            </a:r>
+            <a:endParaRPr lang="en-US" sz="1300" dirty="0"/>
+          </a:p>
+        </p:txBody>
+      </p:sp>
+      <p:sp>
+        <p:nvSpPr>
+          <p:cNvPr id="28" name="Text 26"/>
+          <p:cNvSpPr/>
+          <p:nvPr/>
+        </p:nvSpPr>
+        <p:spPr>
+          <a:xfrm>
+            <a:off x="9637776" y="2798064"/>
+            <a:ext cx="1691640" cy="384048"/>
+          </a:xfrm>
+          <a:prstGeom prst="rect">
+            <a:avLst/>
+          </a:prstGeom>
+          <a:noFill/>
+          <a:ln/>
+        </p:spPr>
+        <p:txBody>
+          <a:bodyPr wrap="square" lIns="0" tIns="0" rIns="0" bIns="0" rtlCol="0" anchor="ctr"/>
+          <a:lstStyle/>
+          <a:p>
+            <a:pPr indent="0" marL="0">
+              <a:lnSpc>
+                <a:spcPts val="1800"/>
+              </a:lnSpc>
+              <a:buNone/>
+            </a:pPr>
+            <a:r>
+              <a:rPr lang="en-US" sz="1400" b="1" dirty="0">
+                <a:solidFill>
+                  <a:srgbClr val="FFFFFF"/>
+                </a:solidFill>
+                <a:latin typeface="Calibri" pitchFamily="34" charset="0"/>
+                <a:ea typeface="Calibri" pitchFamily="34" charset="-122"/>
+                <a:cs typeface="Calibri" pitchFamily="34" charset="-120"/>
+              </a:rPr>
+              <a:t>She buys</a:t>
+            </a:r>
+            <a:endParaRPr lang="en-US" sz="1400" dirty="0"/>
+          </a:p>
+        </p:txBody>
+      </p:sp>
+      <p:sp>
+        <p:nvSpPr>
+          <p:cNvPr id="29" name="Text 27"/>
+          <p:cNvSpPr/>
+          <p:nvPr/>
+        </p:nvSpPr>
+        <p:spPr>
+          <a:xfrm>
+            <a:off x="9637776" y="3182112"/>
+            <a:ext cx="1737360" cy="566928"/>
+          </a:xfrm>
+          <a:prstGeom prst="rect">
+            <a:avLst/>
+          </a:prstGeom>
+          <a:noFill/>
+          <a:ln/>
+        </p:spPr>
+        <p:txBody>
+          <a:bodyPr wrap="square" lIns="0" tIns="0" rIns="0" bIns="0" rtlCol="0" anchor="ctr"/>
+          <a:lstStyle/>
+          <a:p>
+            <a:pPr indent="0" marL="0">
+              <a:lnSpc>
+                <a:spcPts val="1400"/>
+              </a:lnSpc>
+              <a:buNone/>
+            </a:pPr>
+            <a:r>
+              <a:rPr lang="en-US" sz="1100" dirty="0">
+                <a:solidFill>
+                  <a:srgbClr val="C9AEB8"/>
+                </a:solidFill>
+                <a:latin typeface="Calibri" pitchFamily="34" charset="0"/>
+                <a:ea typeface="Calibri" pitchFamily="34" charset="-122"/>
+                <a:cs typeface="Calibri" pitchFamily="34" charset="-120"/>
+              </a:rPr>
+              <a:t>Something small first. Then the real thing.</a:t>
+            </a:r>
+            <a:endParaRPr lang="en-US" sz="1100" dirty="0"/>
+          </a:p>
+        </p:txBody>
+      </p:sp>
+      <p:sp>
+        <p:nvSpPr>
+          <p:cNvPr id="30" name="Shape 28"/>
+          <p:cNvSpPr/>
+          <p:nvPr/>
+        </p:nvSpPr>
+        <p:spPr>
+          <a:xfrm>
+            <a:off x="713232" y="4160520"/>
+            <a:ext cx="10735056" cy="1078992"/>
+          </a:xfrm>
+          <a:prstGeom prst="roundRect">
+            <a:avLst>
+              <a:gd name="adj" fmla="val 11864"/>
+            </a:avLst>
+          </a:prstGeom>
+          <a:solidFill>
+            <a:srgbClr val="6D2E46"/>
+          </a:solidFill>
+          <a:ln/>
+        </p:spPr>
+      </p:sp>
+      <p:sp>
+        <p:nvSpPr>
+          <p:cNvPr id="31" name="Text 29"/>
+          <p:cNvSpPr/>
+          <p:nvPr/>
+        </p:nvSpPr>
+        <p:spPr>
+          <a:xfrm>
+            <a:off x="1170432" y="4160520"/>
+            <a:ext cx="9820656" cy="1078992"/>
+          </a:xfrm>
+          <a:prstGeom prst="rect">
+            <a:avLst/>
+          </a:prstGeom>
+          <a:noFill/>
+          <a:ln/>
+        </p:spPr>
+        <p:txBody>
+          <a:bodyPr wrap="square" lIns="0" tIns="0" rIns="0" bIns="0" rtlCol="0" anchor="ctr"/>
+          <a:lstStyle/>
+          <a:p>
+            <a:pPr indent="0" marL="0">
+              <a:lnSpc>
+                <a:spcPts val="2500"/>
+              </a:lnSpc>
+              <a:buNone/>
+            </a:pPr>
+            <a:r>
+              <a:rPr lang="en-US" sz="1800" dirty="0">
+                <a:solidFill>
+                  <a:srgbClr val="FFFFFF"/>
+                </a:solidFill>
+                <a:latin typeface="Calibri" pitchFamily="34" charset="0"/>
+                <a:ea typeface="Calibri" pitchFamily="34" charset="-122"/>
+                <a:cs typeface="Calibri" pitchFamily="34" charset="-120"/>
+              </a:rPr>
+              <a:t>We're not bringing you clients from outside. We're building the machine that turns the women already watching you into women who pay you.</a:t>
+            </a:r>
+            <a:endParaRPr lang="en-US" sz="1800" dirty="0"/>
+          </a:p>
+        </p:txBody>
+      </p:sp>
+      <p:sp>
+        <p:nvSpPr>
+          <p:cNvPr id="32" name="Text 30"/>
+          <p:cNvSpPr/>
+          <p:nvPr/>
+        </p:nvSpPr>
+        <p:spPr>
+          <a:xfrm>
+            <a:off x="713232" y="5532120"/>
+            <a:ext cx="10735056" cy="640080"/>
+          </a:xfrm>
+          <a:prstGeom prst="rect">
+            <a:avLst/>
+          </a:prstGeom>
+          <a:noFill/>
+          <a:ln/>
+        </p:spPr>
+        <p:txBody>
+          <a:bodyPr wrap="square" lIns="0" tIns="0" rIns="0" bIns="0" rtlCol="0" anchor="ctr"/>
+          <a:lstStyle/>
+          <a:p>
+            <a:pPr indent="0" marL="0">
+              <a:lnSpc>
+                <a:spcPts val="2400"/>
+              </a:lnSpc>
+              <a:buNone/>
+            </a:pPr>
+            <a:r>
+              <a:rPr lang="en-US" sz="1700" i="1" dirty="0">
+                <a:solidFill>
+                  <a:srgbClr val="D9A441"/>
                 </a:solidFill>
                 <a:latin typeface="Cambria" pitchFamily="34" charset="0"/>
                 <a:ea typeface="Cambria" pitchFamily="34" charset="-122"/>
                 <a:cs typeface="Cambria" pitchFamily="34" charset="-120"/>
               </a:rPr>
-              <a:t>Production only</a:t>
-            </a:r>
-            <a:endParaRPr lang="en-US" sz="2600" dirty="0"/>
-          </a:p>
-        </p:txBody>
-      </p:sp>
-      <p:sp>
-        <p:nvSpPr>
-          <p:cNvPr id="7" name="Text 5"/>
-          <p:cNvSpPr/>
-          <p:nvPr/>
-        </p:nvSpPr>
-        <p:spPr>
-          <a:xfrm>
-            <a:off x="1060704" y="2743200"/>
-            <a:ext cx="4572000" cy="274320"/>
-          </a:xfrm>
-          <a:prstGeom prst="rect">
-            <a:avLst/>
-          </a:prstGeom>
-          <a:noFill/>
-          <a:ln/>
-        </p:spPr>
-        <p:txBody>
-          <a:bodyPr wrap="square" lIns="0" tIns="0" rIns="0" bIns="0" rtlCol="0" anchor="ctr"/>
-          <a:lstStyle/>
-          <a:p>
-            <a:pPr indent="0" marL="0">
-              <a:buNone/>
-            </a:pPr>
-            <a:r>
-              <a:rPr lang="en-US" sz="1400" dirty="0">
-                <a:solidFill>
-                  <a:srgbClr val="7A6068"/>
-                </a:solidFill>
-                <a:latin typeface="Calibri" pitchFamily="34" charset="0"/>
-                <a:ea typeface="Calibri" pitchFamily="34" charset="-122"/>
-                <a:cs typeface="Calibri" pitchFamily="34" charset="-120"/>
-              </a:rPr>
-              <a:t>You direct. We shoot and edit.</a:t>
-            </a:r>
-            <a:endParaRPr lang="en-US" sz="1400" dirty="0"/>
-          </a:p>
-        </p:txBody>
-      </p:sp>
-      <p:sp>
-        <p:nvSpPr>
-          <p:cNvPr id="8" name="Text 6"/>
-          <p:cNvSpPr/>
-          <p:nvPr/>
-        </p:nvSpPr>
-        <p:spPr>
-          <a:xfrm>
-            <a:off x="1060704" y="3108960"/>
-            <a:ext cx="4572000" cy="1188720"/>
-          </a:xfrm>
-          <a:prstGeom prst="rect">
-            <a:avLst/>
-          </a:prstGeom>
-          <a:noFill/>
-          <a:ln/>
-        </p:spPr>
-        <p:txBody>
-          <a:bodyPr wrap="square" lIns="0" tIns="0" rIns="0" bIns="0" rtlCol="0" anchor="ctr"/>
-          <a:lstStyle/>
-          <a:p>
-            <a:pPr marL="342900" indent="-342900">
-              <a:lnSpc>
-                <a:spcPts val="2000"/>
-              </a:lnSpc>
-              <a:spcAft>
-                <a:spcPts val="800"/>
-              </a:spcAft>
-              <a:buSzPct val="100000"/>
-              <a:buChar char="•"/>
-            </a:pPr>
-            <a:r>
-              <a:rPr lang="en-US" sz="1400" dirty="0">
-                <a:solidFill>
-                  <a:srgbClr val="2B1620"/>
-                </a:solidFill>
-                <a:latin typeface="Calibri" pitchFamily="34" charset="0"/>
-                <a:ea typeface="Calibri" pitchFamily="34" charset="-122"/>
-                <a:cs typeface="Calibri" pitchFamily="34" charset="-120"/>
-              </a:rPr>
-              <a:t>Shooting days and editing</a:t>
-            </a:r>
-            <a:endParaRPr lang="en-US" sz="1400" dirty="0"/>
-          </a:p>
-          <a:p>
-            <a:pPr marL="342900" indent="-342900">
-              <a:lnSpc>
-                <a:spcPts val="2000"/>
-              </a:lnSpc>
-              <a:spcAft>
-                <a:spcPts val="800"/>
-              </a:spcAft>
-              <a:buSzPct val="100000"/>
-              <a:buChar char="•"/>
-            </a:pPr>
-            <a:r>
-              <a:rPr lang="en-US" sz="1400" dirty="0">
-                <a:solidFill>
-                  <a:srgbClr val="2B1620"/>
-                </a:solidFill>
-                <a:latin typeface="Calibri" pitchFamily="34" charset="0"/>
-                <a:ea typeface="Calibri" pitchFamily="34" charset="-122"/>
-                <a:cs typeface="Calibri" pitchFamily="34" charset="-120"/>
-              </a:rPr>
-              <a:t>Covers, captions, subtitles</a:t>
-            </a:r>
-            <a:endParaRPr lang="en-US" sz="1400" dirty="0"/>
-          </a:p>
-          <a:p>
-            <a:pPr marL="342900" indent="-342900">
-              <a:lnSpc>
-                <a:spcPts val="2000"/>
-              </a:lnSpc>
-              <a:spcAft>
-                <a:spcPts val="800"/>
-              </a:spcAft>
-              <a:buSzPct val="100000"/>
-              <a:buChar char="•"/>
-            </a:pPr>
-            <a:r>
-              <a:rPr lang="en-US" sz="1400" dirty="0">
-                <a:solidFill>
-                  <a:srgbClr val="2B1620"/>
-                </a:solidFill>
-                <a:latin typeface="Calibri" pitchFamily="34" charset="0"/>
-                <a:ea typeface="Calibri" pitchFamily="34" charset="-122"/>
-                <a:cs typeface="Calibri" pitchFamily="34" charset="-120"/>
-              </a:rPr>
-              <a:t>You decide what to post and when</a:t>
-            </a:r>
-            <a:endParaRPr lang="en-US" sz="1400" dirty="0"/>
-          </a:p>
-          <a:p>
-            <a:pPr marL="342900" indent="-342900">
-              <a:lnSpc>
-                <a:spcPts val="2000"/>
-              </a:lnSpc>
-              <a:spcAft>
-                <a:spcPts val="800"/>
-              </a:spcAft>
-              <a:buSzPct val="100000"/>
-              <a:buChar char="•"/>
-            </a:pPr>
-            <a:r>
-              <a:rPr lang="en-US" sz="1400" dirty="0">
-                <a:solidFill>
-                  <a:srgbClr val="2B1620"/>
-                </a:solidFill>
-                <a:latin typeface="Calibri" pitchFamily="34" charset="0"/>
-                <a:ea typeface="Calibri" pitchFamily="34" charset="-122"/>
-                <a:cs typeface="Calibri" pitchFamily="34" charset="-120"/>
-              </a:rPr>
-              <a:t>Strategy, DMs and growth stay with you</a:t>
-            </a:r>
-            <a:endParaRPr lang="en-US" sz="1400" dirty="0"/>
-          </a:p>
-        </p:txBody>
-      </p:sp>
-      <p:sp>
-        <p:nvSpPr>
-          <p:cNvPr id="9" name="Text 7"/>
-          <p:cNvSpPr/>
-          <p:nvPr/>
-        </p:nvSpPr>
-        <p:spPr>
-          <a:xfrm>
-            <a:off x="1060704" y="4343400"/>
-            <a:ext cx="4572000" cy="868680"/>
-          </a:xfrm>
-          <a:prstGeom prst="rect">
-            <a:avLst/>
-          </a:prstGeom>
-          <a:noFill/>
-          <a:ln/>
-        </p:spPr>
-        <p:txBody>
-          <a:bodyPr wrap="square" lIns="0" tIns="0" rIns="0" bIns="0" rtlCol="0" anchor="ctr"/>
-          <a:lstStyle/>
-          <a:p>
-            <a:pPr indent="0" marL="0">
-              <a:lnSpc>
-                <a:spcPts val="1900"/>
-              </a:lnSpc>
-              <a:buNone/>
-            </a:pPr>
-            <a:r>
-              <a:rPr lang="en-US" sz="1300" b="1" dirty="0">
-                <a:solidFill>
-                  <a:srgbClr val="6D2E46"/>
-                </a:solidFill>
-                <a:latin typeface="Calibri" pitchFamily="34" charset="0"/>
-                <a:ea typeface="Calibri" pitchFamily="34" charset="-122"/>
-                <a:cs typeface="Calibri" pitchFamily="34" charset="-120"/>
-              </a:rPr>
-              <a:t>Straight answer: </a:t>
-            </a:r>
-            <a:pPr indent="0" marL="0">
-              <a:lnSpc>
-                <a:spcPts val="1900"/>
-              </a:lnSpc>
-              <a:buNone/>
-            </a:pPr>
-            <a:r>
-              <a:rPr lang="en-US" sz="1300" dirty="0">
-                <a:solidFill>
-                  <a:srgbClr val="6D2E46"/>
-                </a:solidFill>
-                <a:latin typeface="Calibri" pitchFamily="34" charset="0"/>
-                <a:ea typeface="Calibri" pitchFamily="34" charset="-122"/>
-                <a:cs typeface="Calibri" pitchFamily="34" charset="-120"/>
-              </a:rPr>
-              <a:t>this works well if you already know exactly what neXtHer is. It makes your content look better. It won't fix the five-identities problem — that isn't a filming problem.</a:t>
-            </a:r>
-            <a:endParaRPr lang="en-US" sz="1300" dirty="0"/>
-          </a:p>
-        </p:txBody>
-      </p:sp>
-      <p:sp>
-        <p:nvSpPr>
-          <p:cNvPr id="10" name="Shape 8"/>
-          <p:cNvSpPr/>
-          <p:nvPr/>
-        </p:nvSpPr>
-        <p:spPr>
-          <a:xfrm>
-            <a:off x="6446520" y="1783080"/>
-            <a:ext cx="5184648" cy="3566160"/>
-          </a:xfrm>
-          <a:prstGeom prst="roundRect">
-            <a:avLst>
-              <a:gd name="adj" fmla="val 3590"/>
-            </a:avLst>
-          </a:prstGeom>
-          <a:solidFill>
-            <a:srgbClr val="6D2E46"/>
-          </a:solidFill>
-          <a:ln/>
-        </p:spPr>
-      </p:sp>
-      <p:sp>
-        <p:nvSpPr>
-          <p:cNvPr id="11" name="Text 9"/>
-          <p:cNvSpPr/>
-          <p:nvPr/>
-        </p:nvSpPr>
-        <p:spPr>
-          <a:xfrm>
-            <a:off x="6793992" y="1993392"/>
-            <a:ext cx="4572000" cy="256032"/>
-          </a:xfrm>
-          <a:prstGeom prst="rect">
-            <a:avLst/>
-          </a:prstGeom>
-          <a:noFill/>
-          <a:ln/>
-        </p:spPr>
-        <p:txBody>
-          <a:bodyPr wrap="square" lIns="0" tIns="0" rIns="0" bIns="0" rtlCol="0" anchor="ctr"/>
-          <a:lstStyle/>
-          <a:p>
-            <a:pPr indent="0" marL="0">
-              <a:buNone/>
-            </a:pPr>
-            <a:r>
-              <a:rPr lang="en-US" sz="1250" b="1" spc="160" kern="0" dirty="0">
-                <a:solidFill>
-                  <a:srgbClr val="D9A441"/>
-                </a:solidFill>
-                <a:latin typeface="Calibri" pitchFamily="34" charset="0"/>
-                <a:ea typeface="Calibri" pitchFamily="34" charset="-122"/>
-                <a:cs typeface="Calibri" pitchFamily="34" charset="-120"/>
-              </a:rPr>
-              <a:t>OPTION 2 — WHAT I'D RECOMMEND</a:t>
-            </a:r>
-            <a:endParaRPr lang="en-US" sz="1250" dirty="0"/>
-          </a:p>
-        </p:txBody>
-      </p:sp>
-      <p:sp>
-        <p:nvSpPr>
-          <p:cNvPr id="12" name="Text 10"/>
-          <p:cNvSpPr/>
-          <p:nvPr/>
-        </p:nvSpPr>
-        <p:spPr>
-          <a:xfrm>
-            <a:off x="6793992" y="2286000"/>
-            <a:ext cx="4572000" cy="411480"/>
-          </a:xfrm>
-          <a:prstGeom prst="rect">
-            <a:avLst/>
-          </a:prstGeom>
-          <a:noFill/>
-          <a:ln/>
-        </p:spPr>
-        <p:txBody>
-          <a:bodyPr wrap="square" lIns="0" tIns="0" rIns="0" bIns="0" rtlCol="0" anchor="ctr"/>
-          <a:lstStyle/>
-          <a:p>
-            <a:pPr indent="0" marL="0">
-              <a:buNone/>
-            </a:pPr>
-            <a:r>
-              <a:rPr lang="en-US" sz="2600" b="1" dirty="0">
-                <a:solidFill>
-                  <a:srgbClr val="FFFFFF"/>
-                </a:solidFill>
-                <a:latin typeface="Cambria" pitchFamily="34" charset="0"/>
-                <a:ea typeface="Cambria" pitchFamily="34" charset="-122"/>
-                <a:cs typeface="Cambria" pitchFamily="34" charset="-120"/>
-              </a:rPr>
-              <a:t>Production + the system</a:t>
-            </a:r>
-            <a:endParaRPr lang="en-US" sz="2600" dirty="0"/>
-          </a:p>
-        </p:txBody>
-      </p:sp>
-      <p:sp>
-        <p:nvSpPr>
-          <p:cNvPr id="13" name="Text 11"/>
-          <p:cNvSpPr/>
-          <p:nvPr/>
-        </p:nvSpPr>
-        <p:spPr>
-          <a:xfrm>
-            <a:off x="6793992" y="2743200"/>
-            <a:ext cx="4572000" cy="274320"/>
-          </a:xfrm>
-          <a:prstGeom prst="rect">
-            <a:avLst/>
-          </a:prstGeom>
-          <a:noFill/>
-          <a:ln/>
-        </p:spPr>
-        <p:txBody>
-          <a:bodyPr wrap="square" lIns="0" tIns="0" rIns="0" bIns="0" rtlCol="0" anchor="ctr"/>
-          <a:lstStyle/>
-          <a:p>
-            <a:pPr indent="0" marL="0">
-              <a:buNone/>
-            </a:pPr>
-            <a:r>
-              <a:rPr lang="en-US" sz="1400" dirty="0">
-                <a:solidFill>
-                  <a:srgbClr val="C9AEB8"/>
-                </a:solidFill>
-                <a:latin typeface="Calibri" pitchFamily="34" charset="0"/>
-                <a:ea typeface="Calibri" pitchFamily="34" charset="-122"/>
-                <a:cs typeface="Calibri" pitchFamily="34" charset="-120"/>
-              </a:rPr>
-              <a:t>We build the brand with you, then run it every week.</a:t>
-            </a:r>
-            <a:endParaRPr lang="en-US" sz="1400" dirty="0"/>
-          </a:p>
-        </p:txBody>
-      </p:sp>
-      <p:sp>
-        <p:nvSpPr>
-          <p:cNvPr id="14" name="Text 12"/>
-          <p:cNvSpPr/>
-          <p:nvPr/>
-        </p:nvSpPr>
-        <p:spPr>
-          <a:xfrm>
-            <a:off x="6793992" y="3108960"/>
-            <a:ext cx="4526280" cy="1737360"/>
-          </a:xfrm>
-          <a:prstGeom prst="rect">
-            <a:avLst/>
-          </a:prstGeom>
-          <a:noFill/>
-          <a:ln/>
-        </p:spPr>
-        <p:txBody>
-          <a:bodyPr wrap="square" lIns="0" tIns="0" rIns="0" bIns="0" rtlCol="0" anchor="ctr"/>
-          <a:lstStyle/>
-          <a:p>
-            <a:pPr marL="342900" indent="-342900">
-              <a:lnSpc>
-                <a:spcPts val="2000"/>
-              </a:lnSpc>
-              <a:spcAft>
-                <a:spcPts val="800"/>
-              </a:spcAft>
-              <a:buSzPct val="100000"/>
-              <a:buChar char="•"/>
-            </a:pPr>
-            <a:r>
-              <a:rPr lang="en-US" sz="1400" dirty="0">
-                <a:solidFill>
-                  <a:srgbClr val="FFFFFF"/>
-                </a:solidFill>
-                <a:latin typeface="Calibri" pitchFamily="34" charset="0"/>
-                <a:ea typeface="Calibri" pitchFamily="34" charset="-122"/>
-                <a:cs typeface="Calibri" pitchFamily="34" charset="-120"/>
-              </a:rPr>
-              <a:t>Everything in Option 1</a:t>
-            </a:r>
-            <a:endParaRPr lang="en-US" sz="1400" dirty="0"/>
-          </a:p>
-          <a:p>
-            <a:pPr marL="342900" indent="-342900">
-              <a:lnSpc>
-                <a:spcPts val="2000"/>
-              </a:lnSpc>
-              <a:spcAft>
-                <a:spcPts val="800"/>
-              </a:spcAft>
-              <a:buSzPct val="100000"/>
-              <a:buChar char="•"/>
-            </a:pPr>
-            <a:r>
-              <a:rPr lang="en-US" sz="1400" dirty="0">
-                <a:solidFill>
-                  <a:srgbClr val="FFFFFF"/>
-                </a:solidFill>
-                <a:latin typeface="Calibri" pitchFamily="34" charset="0"/>
-                <a:ea typeface="Calibri" pitchFamily="34" charset="-122"/>
-                <a:cs typeface="Calibri" pitchFamily="34" charset="-120"/>
-              </a:rPr>
-              <a:t>The positioning decision and your named method</a:t>
-            </a:r>
-            <a:endParaRPr lang="en-US" sz="1400" dirty="0"/>
-          </a:p>
-          <a:p>
-            <a:pPr marL="342900" indent="-342900">
-              <a:lnSpc>
-                <a:spcPts val="2000"/>
-              </a:lnSpc>
-              <a:spcAft>
-                <a:spcPts val="800"/>
-              </a:spcAft>
-              <a:buSzPct val="100000"/>
-              <a:buChar char="•"/>
-            </a:pPr>
-            <a:r>
-              <a:rPr lang="en-US" sz="1400" dirty="0">
-                <a:solidFill>
-                  <a:srgbClr val="FFFFFF"/>
-                </a:solidFill>
-                <a:latin typeface="Calibri" pitchFamily="34" charset="0"/>
-                <a:ea typeface="Calibri" pitchFamily="34" charset="-122"/>
-                <a:cs typeface="Calibri" pitchFamily="34" charset="-120"/>
-              </a:rPr>
-              <a:t>Profile rebuilt — bio, pinned posts, highlights</a:t>
-            </a:r>
-            <a:endParaRPr lang="en-US" sz="1400" dirty="0"/>
-          </a:p>
-          <a:p>
-            <a:pPr marL="342900" indent="-342900">
-              <a:lnSpc>
-                <a:spcPts val="2000"/>
-              </a:lnSpc>
-              <a:spcAft>
-                <a:spcPts val="800"/>
-              </a:spcAft>
-              <a:buSzPct val="100000"/>
-              <a:buChar char="•"/>
-            </a:pPr>
-            <a:r>
-              <a:rPr lang="en-US" sz="1400" dirty="0">
-                <a:solidFill>
-                  <a:srgbClr val="FFFFFF"/>
-                </a:solidFill>
-                <a:latin typeface="Calibri" pitchFamily="34" charset="0"/>
-                <a:ea typeface="Calibri" pitchFamily="34" charset="-122"/>
-                <a:cs typeface="Calibri" pitchFamily="34" charset="-120"/>
-              </a:rPr>
-              <a:t>Five posts a week, published for you</a:t>
-            </a:r>
-            <a:endParaRPr lang="en-US" sz="1400" dirty="0"/>
-          </a:p>
-          <a:p>
-            <a:pPr marL="342900" indent="-342900">
-              <a:lnSpc>
-                <a:spcPts val="2000"/>
-              </a:lnSpc>
-              <a:spcAft>
-                <a:spcPts val="800"/>
-              </a:spcAft>
-              <a:buSzPct val="100000"/>
-              <a:buChar char="•"/>
-            </a:pPr>
-            <a:r>
-              <a:rPr lang="en-US" sz="1400" dirty="0">
-                <a:solidFill>
-                  <a:srgbClr val="FFFFFF"/>
-                </a:solidFill>
-                <a:latin typeface="Calibri" pitchFamily="34" charset="0"/>
-                <a:ea typeface="Calibri" pitchFamily="34" charset="-122"/>
-                <a:cs typeface="Calibri" pitchFamily="34" charset="-120"/>
-              </a:rPr>
-              <a:t>YouTube and WhatsApp from the same shoot</a:t>
-            </a:r>
-            <a:endParaRPr lang="en-US" sz="1400" dirty="0"/>
-          </a:p>
-          <a:p>
-            <a:pPr marL="342900" indent="-342900">
-              <a:lnSpc>
-                <a:spcPts val="2000"/>
-              </a:lnSpc>
-              <a:spcAft>
-                <a:spcPts val="800"/>
-              </a:spcAft>
-              <a:buSzPct val="100000"/>
-              <a:buChar char="•"/>
-            </a:pPr>
-            <a:r>
-              <a:rPr lang="en-US" sz="1400" dirty="0">
-                <a:solidFill>
-                  <a:srgbClr val="FFFFFF"/>
-                </a:solidFill>
-                <a:latin typeface="Calibri" pitchFamily="34" charset="0"/>
-                <a:ea typeface="Calibri" pitchFamily="34" charset="-122"/>
-                <a:cs typeface="Calibri" pitchFamily="34" charset="-120"/>
-              </a:rPr>
-              <a:t>Weekly numbers, so you always know what's working</a:t>
-            </a:r>
-            <a:endParaRPr lang="en-US" sz="1400" dirty="0"/>
-          </a:p>
-        </p:txBody>
-      </p:sp>
-      <p:sp>
-        <p:nvSpPr>
-          <p:cNvPr id="15" name="Text 13"/>
-          <p:cNvSpPr/>
-          <p:nvPr/>
-        </p:nvSpPr>
-        <p:spPr>
-          <a:xfrm>
-            <a:off x="6793992" y="4846320"/>
-            <a:ext cx="4526280" cy="457200"/>
-          </a:xfrm>
-          <a:prstGeom prst="rect">
-            <a:avLst/>
-          </a:prstGeom>
-          <a:noFill/>
-          <a:ln/>
-        </p:spPr>
-        <p:txBody>
-          <a:bodyPr wrap="square" lIns="0" tIns="0" rIns="0" bIns="0" rtlCol="0" anchor="ctr"/>
-          <a:lstStyle/>
-          <a:p>
-            <a:pPr indent="0" marL="0">
-              <a:lnSpc>
-                <a:spcPts val="1900"/>
-              </a:lnSpc>
-              <a:buNone/>
-            </a:pPr>
-            <a:r>
-              <a:rPr lang="en-US" sz="1300" b="1" dirty="0">
-                <a:solidFill>
-                  <a:srgbClr val="D9A441"/>
-                </a:solidFill>
-                <a:latin typeface="Calibri" pitchFamily="34" charset="0"/>
-                <a:ea typeface="Calibri" pitchFamily="34" charset="-122"/>
-                <a:cs typeface="Calibri" pitchFamily="34" charset="-120"/>
-              </a:rPr>
-              <a:t>This is the one that changes the outcome</a:t>
-            </a:r>
-            <a:pPr indent="0" marL="0">
-              <a:lnSpc>
-                <a:spcPts val="1900"/>
-              </a:lnSpc>
-              <a:buNone/>
-            </a:pPr>
-            <a:r>
-              <a:rPr lang="en-US" sz="1300" dirty="0">
-                <a:solidFill>
-                  <a:srgbClr val="D9A441"/>
-                </a:solidFill>
-                <a:latin typeface="Calibri" pitchFamily="34" charset="0"/>
-                <a:ea typeface="Calibri" pitchFamily="34" charset="-122"/>
-                <a:cs typeface="Calibri" pitchFamily="34" charset="-120"/>
-              </a:rPr>
-              <a:t>, because it fixes what's actually holding the account back.</a:t>
-            </a:r>
-            <a:endParaRPr lang="en-US" sz="1300" dirty="0"/>
-          </a:p>
-        </p:txBody>
-      </p:sp>
-      <p:sp>
-        <p:nvSpPr>
-          <p:cNvPr id="16" name="Text 14"/>
-          <p:cNvSpPr/>
-          <p:nvPr/>
-        </p:nvSpPr>
-        <p:spPr>
-          <a:xfrm>
-            <a:off x="713232" y="5577840"/>
-            <a:ext cx="10735056" cy="640080"/>
-          </a:xfrm>
-          <a:prstGeom prst="rect">
-            <a:avLst/>
-          </a:prstGeom>
-          <a:noFill/>
-          <a:ln/>
-        </p:spPr>
-        <p:txBody>
-          <a:bodyPr wrap="square" lIns="0" tIns="0" rIns="0" bIns="0" rtlCol="0" anchor="ctr"/>
-          <a:lstStyle/>
-          <a:p>
-            <a:pPr indent="0" marL="0">
-              <a:lnSpc>
-                <a:spcPts val="2400"/>
-              </a:lnSpc>
-              <a:buNone/>
-            </a:pPr>
-            <a:r>
-              <a:rPr lang="en-US" sz="1700" i="1" dirty="0">
-                <a:solidFill>
-                  <a:srgbClr val="D9A441"/>
-                </a:solidFill>
-                <a:latin typeface="Cambria" pitchFamily="34" charset="0"/>
-                <a:ea typeface="Cambria" pitchFamily="34" charset="-122"/>
-                <a:cs typeface="Cambria" pitchFamily="34" charset="-120"/>
-              </a:rPr>
-              <a:t>If Option 1 is what you want, say so and we'll do it properly. I'd just rather you chose it knowing what it does and doesn't solve.</a:t>
+              <a:t>Right now that machine doesn't exist. There's no free thing, no list, no first step — so even the people who love your posts have nowhere to go.</a:t>
             </a:r>
             <a:endParaRPr lang="en-US" sz="1700" dirty="0"/>
           </a:p>
@@ -9930,7 +10445,7 @@
                 <a:ea typeface="Calibri" pitchFamily="34" charset="-122"/>
                 <a:cs typeface="Calibri" pitchFamily="34" charset="-120"/>
               </a:rPr>
-              <a:t>WHAT CHANGES</a:t>
+              <a:t>THE OFFER</a:t>
             </a:r>
             <a:endParaRPr lang="en-US" sz="1200" dirty="0"/>
           </a:p>
@@ -9972,7 +10487,7 @@
                 <a:ea typeface="Cambria" pitchFamily="34" charset="-122"/>
                 <a:cs typeface="Cambria" pitchFamily="34" charset="-120"/>
               </a:rPr>
-              <a:t>The first 90 days, honestly</a:t>
+              <a:t>What you'd actually sell</a:t>
             </a:r>
             <a:endParaRPr lang="en-US" sz="3900" dirty="0"/>
           </a:p>
@@ -9980,18 +10495,57 @@
       </p:sp>
       <p:sp>
         <p:nvSpPr>
-          <p:cNvPr id="4" name="Shape 2"/>
-          <p:cNvSpPr/>
-          <p:nvPr/>
-        </p:nvSpPr>
-        <p:spPr>
-          <a:xfrm>
-            <a:off x="713232" y="1783080"/>
-            <a:ext cx="3493008" cy="1874520"/>
+          <p:cNvPr id="4" name="Text 2"/>
+          <p:cNvSpPr/>
+          <p:nvPr/>
+        </p:nvSpPr>
+        <p:spPr>
+          <a:xfrm>
+            <a:off x="713232" y="1737360"/>
+            <a:ext cx="10735056" cy="320040"/>
+          </a:xfrm>
+          <a:prstGeom prst="rect">
+            <a:avLst/>
+          </a:prstGeom>
+          <a:noFill/>
+          <a:ln/>
+        </p:spPr>
+        <p:txBody>
+          <a:bodyPr wrap="square" lIns="0" tIns="0" rIns="0" bIns="0" rtlCol="0" anchor="ctr"/>
+          <a:lstStyle/>
+          <a:p>
+            <a:pPr indent="0" marL="0">
+              <a:buNone/>
+            </a:pPr>
+            <a:r>
+              <a:rPr lang="en-US" sz="1600" dirty="0">
+                <a:solidFill>
+                  <a:srgbClr val="7A6068"/>
+                </a:solidFill>
+                <a:latin typeface="Calibri" pitchFamily="34" charset="0"/>
+                <a:ea typeface="Calibri" pitchFamily="34" charset="-122"/>
+                <a:cs typeface="Calibri" pitchFamily="34" charset="-120"/>
+              </a:rPr>
+              <a:t>Four steps, each one a bigger commitment than the last. You don't build them all at once — you build them in this order.</a:t>
+            </a:r>
+            <a:endParaRPr lang="en-US" sz="1600" dirty="0"/>
+          </a:p>
+        </p:txBody>
+      </p:sp>
+      <p:sp>
+        <p:nvSpPr>
+          <p:cNvPr id="5" name="Shape 3"/>
+          <p:cNvSpPr/>
+          <p:nvPr/>
+        </p:nvSpPr>
+        <p:spPr>
+          <a:xfrm>
+            <a:off x="713232" y="2240280"/>
+            <a:ext cx="10735056" cy="841248"/>
           </a:xfrm>
           <a:prstGeom prst="roundRect">
             <a:avLst>
-              <a:gd name="adj" fmla="val 6829"/>
+              <a:gd name="adj" fmla="val 10870"/>
             </a:avLst>
           </a:prstGeom>
           <a:solidFill>
@@ -10002,30 +10556,30 @@
       </p:sp>
       <p:sp>
         <p:nvSpPr>
-          <p:cNvPr id="5" name="Text 3"/>
-          <p:cNvSpPr/>
-          <p:nvPr/>
-        </p:nvSpPr>
-        <p:spPr>
-          <a:xfrm>
-            <a:off x="987552" y="1965960"/>
-            <a:ext cx="2926080" cy="256032"/>
-          </a:xfrm>
-          <a:prstGeom prst="rect">
-            <a:avLst/>
-          </a:prstGeom>
-          <a:noFill/>
-          <a:ln/>
-        </p:spPr>
-        <p:txBody>
-          <a:bodyPr wrap="square" lIns="0" tIns="0" rIns="0" bIns="0" rtlCol="0" anchor="ctr"/>
-          <a:lstStyle/>
-          <a:p>
-            <a:pPr indent="0" marL="0">
-              <a:buNone/>
-            </a:pPr>
-            <a:r>
-              <a:rPr lang="en-US" sz="1200" b="1" spc="160" kern="0" dirty="0">
+          <p:cNvPr id="6" name="Text 4"/>
+          <p:cNvSpPr/>
+          <p:nvPr/>
+        </p:nvSpPr>
+        <p:spPr>
+          <a:xfrm>
+            <a:off x="1005840" y="2386584"/>
+            <a:ext cx="2103120" cy="274320"/>
+          </a:xfrm>
+          <a:prstGeom prst="rect">
+            <a:avLst/>
+          </a:prstGeom>
+          <a:noFill/>
+          <a:ln/>
+        </p:spPr>
+        <p:txBody>
+          <a:bodyPr wrap="square" lIns="0" tIns="0" rIns="0" bIns="0" rtlCol="0" anchor="ctr"/>
+          <a:lstStyle/>
+          <a:p>
+            <a:pPr indent="0" marL="0">
+              <a:buNone/>
+            </a:pPr>
+            <a:r>
+              <a:rPr lang="en-US" sz="1500" b="1" dirty="0">
                 <a:solidFill>
                   <a:srgbClr val="6D2E46"/>
                 </a:solidFill>
@@ -10033,84 +10587,100 @@
                 <a:ea typeface="Calibri" pitchFamily="34" charset="-122"/>
                 <a:cs typeface="Calibri" pitchFamily="34" charset="-120"/>
               </a:rPr>
-              <a:t>WEEKS 1–2</a:t>
-            </a:r>
-            <a:endParaRPr lang="en-US" sz="1200" dirty="0"/>
-          </a:p>
-        </p:txBody>
-      </p:sp>
-      <p:sp>
-        <p:nvSpPr>
-          <p:cNvPr id="6" name="Text 4"/>
-          <p:cNvSpPr/>
-          <p:nvPr/>
-        </p:nvSpPr>
-        <p:spPr>
-          <a:xfrm>
-            <a:off x="987552" y="2258568"/>
-            <a:ext cx="2926080" cy="347472"/>
-          </a:xfrm>
-          <a:prstGeom prst="rect">
-            <a:avLst/>
-          </a:prstGeom>
-          <a:noFill/>
-          <a:ln/>
-        </p:spPr>
-        <p:txBody>
-          <a:bodyPr wrap="square" lIns="0" tIns="0" rIns="0" bIns="0" rtlCol="0" anchor="ctr"/>
-          <a:lstStyle/>
-          <a:p>
-            <a:pPr indent="0" marL="0">
-              <a:buNone/>
-            </a:pPr>
-            <a:r>
-              <a:rPr lang="en-US" sz="2000" b="1" dirty="0">
+              <a:t>Free</a:t>
+            </a:r>
+            <a:endParaRPr lang="en-US" sz="1500" dirty="0"/>
+          </a:p>
+        </p:txBody>
+      </p:sp>
+      <p:sp>
+        <p:nvSpPr>
+          <p:cNvPr id="7" name="Text 5"/>
+          <p:cNvSpPr/>
+          <p:nvPr/>
+        </p:nvSpPr>
+        <p:spPr>
+          <a:xfrm>
+            <a:off x="1005840" y="2660904"/>
+            <a:ext cx="2240280" cy="384048"/>
+          </a:xfrm>
+          <a:prstGeom prst="rect">
+            <a:avLst/>
+          </a:prstGeom>
+          <a:noFill/>
+          <a:ln/>
+        </p:spPr>
+        <p:txBody>
+          <a:bodyPr wrap="square" lIns="0" tIns="0" rIns="0" bIns="0" rtlCol="0" anchor="ctr"/>
+          <a:lstStyle/>
+          <a:p>
+            <a:pPr indent="0" marL="0">
+              <a:lnSpc>
+                <a:spcPts val="1400"/>
+              </a:lnSpc>
+              <a:buNone/>
+            </a:pPr>
+            <a:r>
+              <a:rPr lang="en-US" sz="1150" dirty="0">
+                <a:solidFill>
+                  <a:srgbClr val="7A6068"/>
+                </a:solidFill>
+                <a:latin typeface="Calibri" pitchFamily="34" charset="0"/>
+                <a:ea typeface="Calibri" pitchFamily="34" charset="-122"/>
+                <a:cs typeface="Calibri" pitchFamily="34" charset="-120"/>
+              </a:rPr>
+              <a:t>a prompt pack she can use tonight</a:t>
+            </a:r>
+            <a:endParaRPr lang="en-US" sz="1150" dirty="0"/>
+          </a:p>
+        </p:txBody>
+      </p:sp>
+      <p:sp>
+        <p:nvSpPr>
+          <p:cNvPr id="8" name="Text 6"/>
+          <p:cNvSpPr/>
+          <p:nvPr/>
+        </p:nvSpPr>
+        <p:spPr>
+          <a:xfrm>
+            <a:off x="3456432" y="2240280"/>
+            <a:ext cx="7671816" cy="841248"/>
+          </a:xfrm>
+          <a:prstGeom prst="rect">
+            <a:avLst/>
+          </a:prstGeom>
+          <a:noFill/>
+          <a:ln/>
+        </p:spPr>
+        <p:txBody>
+          <a:bodyPr wrap="square" lIns="0" tIns="0" rIns="0" bIns="0" rtlCol="0" anchor="ctr"/>
+          <a:lstStyle/>
+          <a:p>
+            <a:pPr indent="0" marL="0">
+              <a:lnSpc>
+                <a:spcPts val="2000"/>
+              </a:lnSpc>
+              <a:buNone/>
+            </a:pPr>
+            <a:r>
+              <a:rPr lang="en-US" sz="1500" b="1" dirty="0">
                 <a:solidFill>
                   <a:srgbClr val="2B1620"/>
                 </a:solidFill>
-                <a:latin typeface="Cambria" pitchFamily="34" charset="0"/>
-                <a:ea typeface="Cambria" pitchFamily="34" charset="-122"/>
-                <a:cs typeface="Cambria" pitchFamily="34" charset="-120"/>
-              </a:rPr>
-              <a:t>Decide and rebuild</a:t>
-            </a:r>
-            <a:endParaRPr lang="en-US" sz="2000" dirty="0"/>
-          </a:p>
-        </p:txBody>
-      </p:sp>
-      <p:sp>
-        <p:nvSpPr>
-          <p:cNvPr id="7" name="Text 5"/>
-          <p:cNvSpPr/>
-          <p:nvPr/>
-        </p:nvSpPr>
-        <p:spPr>
-          <a:xfrm>
-            <a:off x="987552" y="2688336"/>
-            <a:ext cx="2926080" cy="868680"/>
-          </a:xfrm>
-          <a:prstGeom prst="rect">
-            <a:avLst/>
-          </a:prstGeom>
-          <a:noFill/>
-          <a:ln/>
-        </p:spPr>
-        <p:txBody>
-          <a:bodyPr wrap="square" lIns="0" tIns="0" rIns="0" bIns="0" rtlCol="0" anchor="ctr"/>
-          <a:lstStyle/>
-          <a:p>
-            <a:pPr marL="342900" indent="-342900">
+                <a:latin typeface="Calibri" pitchFamily="34" charset="0"/>
+                <a:ea typeface="Calibri" pitchFamily="34" charset="-122"/>
+                <a:cs typeface="Calibri" pitchFamily="34" charset="-120"/>
+              </a:rPr>
+              <a:t>Its job: </a:t>
+            </a:r>
+            <a:pPr indent="0" marL="0">
               <a:lnSpc>
-                <a:spcPts val="1700"/>
+                <a:spcPts val="2000"/>
               </a:lnSpc>
-              <a:spcAft>
-                <a:spcPts val="400"/>
-              </a:spcAft>
-              <a:buSzPct val="100000"/>
-              <a:buChar char="•"/>
-            </a:pPr>
-            <a:r>
-              <a:rPr lang="en-US" sz="1250" dirty="0">
+              <a:buNone/>
+            </a:pPr>
+            <a:r>
+              <a:rPr lang="en-US" sz="1500" dirty="0">
                 <a:solidFill>
                   <a:srgbClr val="2B1620"/>
                 </a:solidFill>
@@ -10118,74 +10688,26 @@
                 <a:ea typeface="Calibri" pitchFamily="34" charset="-122"/>
                 <a:cs typeface="Calibri" pitchFamily="34" charset="-120"/>
               </a:rPr>
-              <a:t>One audience, one promise</a:t>
-            </a:r>
-            <a:endParaRPr lang="en-US" sz="1250" dirty="0"/>
-          </a:p>
-          <a:p>
-            <a:pPr marL="342900" indent="-342900">
-              <a:lnSpc>
-                <a:spcPts val="1700"/>
-              </a:lnSpc>
-              <a:spcAft>
-                <a:spcPts val="400"/>
-              </a:spcAft>
-              <a:buSzPct val="100000"/>
-              <a:buChar char="•"/>
-            </a:pPr>
-            <a:r>
-              <a:rPr lang="en-US" sz="1250" dirty="0">
-                <a:solidFill>
-                  <a:srgbClr val="2B1620"/>
-                </a:solidFill>
-                <a:latin typeface="Calibri" pitchFamily="34" charset="0"/>
-                <a:ea typeface="Calibri" pitchFamily="34" charset="-122"/>
-                <a:cs typeface="Calibri" pitchFamily="34" charset="-120"/>
-              </a:rPr>
-              <a:t>Your named method</a:t>
-            </a:r>
-            <a:endParaRPr lang="en-US" sz="1250" dirty="0"/>
-          </a:p>
-          <a:p>
-            <a:pPr marL="342900" indent="-342900">
-              <a:lnSpc>
-                <a:spcPts val="1700"/>
-              </a:lnSpc>
-              <a:spcAft>
-                <a:spcPts val="400"/>
-              </a:spcAft>
-              <a:buSzPct val="100000"/>
-              <a:buChar char="•"/>
-            </a:pPr>
-            <a:r>
-              <a:rPr lang="en-US" sz="1250" dirty="0">
-                <a:solidFill>
-                  <a:srgbClr val="2B1620"/>
-                </a:solidFill>
-                <a:latin typeface="Calibri" pitchFamily="34" charset="0"/>
-                <a:ea typeface="Calibri" pitchFamily="34" charset="-122"/>
-                <a:cs typeface="Calibri" pitchFamily="34" charset="-120"/>
-              </a:rPr>
-              <a:t>Bio, pinned posts, highlights</a:t>
-            </a:r>
-            <a:endParaRPr lang="en-US" sz="1250" dirty="0"/>
-          </a:p>
-        </p:txBody>
-      </p:sp>
-      <p:sp>
-        <p:nvSpPr>
-          <p:cNvPr id="8" name="Shape 6"/>
-          <p:cNvSpPr/>
-          <p:nvPr/>
-        </p:nvSpPr>
-        <p:spPr>
-          <a:xfrm>
-            <a:off x="4389120" y="1783080"/>
-            <a:ext cx="3493008" cy="1874520"/>
+              <a:t>to get her WhatsApp number. Nothing else.</a:t>
+            </a:r>
+            <a:endParaRPr lang="en-US" sz="1500" dirty="0"/>
+          </a:p>
+        </p:txBody>
+      </p:sp>
+      <p:sp>
+        <p:nvSpPr>
+          <p:cNvPr id="9" name="Shape 7"/>
+          <p:cNvSpPr/>
+          <p:nvPr/>
+        </p:nvSpPr>
+        <p:spPr>
+          <a:xfrm>
+            <a:off x="713232" y="3182112"/>
+            <a:ext cx="10735056" cy="841248"/>
           </a:xfrm>
           <a:prstGeom prst="roundRect">
             <a:avLst>
-              <a:gd name="adj" fmla="val 6829"/>
+              <a:gd name="adj" fmla="val 10870"/>
             </a:avLst>
           </a:prstGeom>
           <a:solidFill>
@@ -10196,30 +10718,30 @@
       </p:sp>
       <p:sp>
         <p:nvSpPr>
-          <p:cNvPr id="9" name="Text 7"/>
-          <p:cNvSpPr/>
-          <p:nvPr/>
-        </p:nvSpPr>
-        <p:spPr>
-          <a:xfrm>
-            <a:off x="4663440" y="1965960"/>
-            <a:ext cx="2926080" cy="256032"/>
-          </a:xfrm>
-          <a:prstGeom prst="rect">
-            <a:avLst/>
-          </a:prstGeom>
-          <a:noFill/>
-          <a:ln/>
-        </p:spPr>
-        <p:txBody>
-          <a:bodyPr wrap="square" lIns="0" tIns="0" rIns="0" bIns="0" rtlCol="0" anchor="ctr"/>
-          <a:lstStyle/>
-          <a:p>
-            <a:pPr indent="0" marL="0">
-              <a:buNone/>
-            </a:pPr>
-            <a:r>
-              <a:rPr lang="en-US" sz="1200" b="1" spc="160" kern="0" dirty="0">
+          <p:cNvPr id="10" name="Text 8"/>
+          <p:cNvSpPr/>
+          <p:nvPr/>
+        </p:nvSpPr>
+        <p:spPr>
+          <a:xfrm>
+            <a:off x="1005840" y="3328416"/>
+            <a:ext cx="2103120" cy="274320"/>
+          </a:xfrm>
+          <a:prstGeom prst="rect">
+            <a:avLst/>
+          </a:prstGeom>
+          <a:noFill/>
+          <a:ln/>
+        </p:spPr>
+        <p:txBody>
+          <a:bodyPr wrap="square" lIns="0" tIns="0" rIns="0" bIns="0" rtlCol="0" anchor="ctr"/>
+          <a:lstStyle/>
+          <a:p>
+            <a:pPr indent="0" marL="0">
+              <a:buNone/>
+            </a:pPr>
+            <a:r>
+              <a:rPr lang="en-US" sz="1500" b="1" dirty="0">
                 <a:solidFill>
                   <a:srgbClr val="6D2E46"/>
                 </a:solidFill>
@@ -10227,84 +10749,100 @@
                 <a:ea typeface="Calibri" pitchFamily="34" charset="-122"/>
                 <a:cs typeface="Calibri" pitchFamily="34" charset="-120"/>
               </a:rPr>
-              <a:t>WEEKS 3–8</a:t>
-            </a:r>
-            <a:endParaRPr lang="en-US" sz="1200" dirty="0"/>
-          </a:p>
-        </p:txBody>
-      </p:sp>
-      <p:sp>
-        <p:nvSpPr>
-          <p:cNvPr id="10" name="Text 8"/>
-          <p:cNvSpPr/>
-          <p:nvPr/>
-        </p:nvSpPr>
-        <p:spPr>
-          <a:xfrm>
-            <a:off x="4663440" y="2258568"/>
-            <a:ext cx="2926080" cy="347472"/>
-          </a:xfrm>
-          <a:prstGeom prst="rect">
-            <a:avLst/>
-          </a:prstGeom>
-          <a:noFill/>
-          <a:ln/>
-        </p:spPr>
-        <p:txBody>
-          <a:bodyPr wrap="square" lIns="0" tIns="0" rIns="0" bIns="0" rtlCol="0" anchor="ctr"/>
-          <a:lstStyle/>
-          <a:p>
-            <a:pPr indent="0" marL="0">
-              <a:buNone/>
-            </a:pPr>
-            <a:r>
-              <a:rPr lang="en-US" sz="2000" b="1" dirty="0">
+              <a:t>One evening</a:t>
+            </a:r>
+            <a:endParaRPr lang="en-US" sz="1500" dirty="0"/>
+          </a:p>
+        </p:txBody>
+      </p:sp>
+      <p:sp>
+        <p:nvSpPr>
+          <p:cNvPr id="11" name="Text 9"/>
+          <p:cNvSpPr/>
+          <p:nvPr/>
+        </p:nvSpPr>
+        <p:spPr>
+          <a:xfrm>
+            <a:off x="1005840" y="3602736"/>
+            <a:ext cx="2240280" cy="384048"/>
+          </a:xfrm>
+          <a:prstGeom prst="rect">
+            <a:avLst/>
+          </a:prstGeom>
+          <a:noFill/>
+          <a:ln/>
+        </p:spPr>
+        <p:txBody>
+          <a:bodyPr wrap="square" lIns="0" tIns="0" rIns="0" bIns="0" rtlCol="0" anchor="ctr"/>
+          <a:lstStyle/>
+          <a:p>
+            <a:pPr indent="0" marL="0">
+              <a:lnSpc>
+                <a:spcPts val="1400"/>
+              </a:lnSpc>
+              <a:buNone/>
+            </a:pPr>
+            <a:r>
+              <a:rPr lang="en-US" sz="1150" dirty="0">
+                <a:solidFill>
+                  <a:srgbClr val="7A6068"/>
+                </a:solidFill>
+                <a:latin typeface="Calibri" pitchFamily="34" charset="0"/>
+                <a:ea typeface="Calibri" pitchFamily="34" charset="-122"/>
+                <a:cs typeface="Calibri" pitchFamily="34" charset="-120"/>
+              </a:rPr>
+              <a:t>a live workshop, 90 minutes</a:t>
+            </a:r>
+            <a:endParaRPr lang="en-US" sz="1150" dirty="0"/>
+          </a:p>
+        </p:txBody>
+      </p:sp>
+      <p:sp>
+        <p:nvSpPr>
+          <p:cNvPr id="12" name="Text 10"/>
+          <p:cNvSpPr/>
+          <p:nvPr/>
+        </p:nvSpPr>
+        <p:spPr>
+          <a:xfrm>
+            <a:off x="3456432" y="3182112"/>
+            <a:ext cx="7671816" cy="841248"/>
+          </a:xfrm>
+          <a:prstGeom prst="rect">
+            <a:avLst/>
+          </a:prstGeom>
+          <a:noFill/>
+          <a:ln/>
+        </p:spPr>
+        <p:txBody>
+          <a:bodyPr wrap="square" lIns="0" tIns="0" rIns="0" bIns="0" rtlCol="0" anchor="ctr"/>
+          <a:lstStyle/>
+          <a:p>
+            <a:pPr indent="0" marL="0">
+              <a:lnSpc>
+                <a:spcPts val="2000"/>
+              </a:lnSpc>
+              <a:buNone/>
+            </a:pPr>
+            <a:r>
+              <a:rPr lang="en-US" sz="1500" b="1" dirty="0">
                 <a:solidFill>
                   <a:srgbClr val="2B1620"/>
                 </a:solidFill>
-                <a:latin typeface="Cambria" pitchFamily="34" charset="0"/>
-                <a:ea typeface="Cambria" pitchFamily="34" charset="-122"/>
-                <a:cs typeface="Cambria" pitchFamily="34" charset="-120"/>
-              </a:rPr>
-              <a:t>Volume and voice</a:t>
-            </a:r>
-            <a:endParaRPr lang="en-US" sz="2000" dirty="0"/>
-          </a:p>
-        </p:txBody>
-      </p:sp>
-      <p:sp>
-        <p:nvSpPr>
-          <p:cNvPr id="11" name="Text 9"/>
-          <p:cNvSpPr/>
-          <p:nvPr/>
-        </p:nvSpPr>
-        <p:spPr>
-          <a:xfrm>
-            <a:off x="4663440" y="2688336"/>
-            <a:ext cx="2926080" cy="868680"/>
-          </a:xfrm>
-          <a:prstGeom prst="rect">
-            <a:avLst/>
-          </a:prstGeom>
-          <a:noFill/>
-          <a:ln/>
-        </p:spPr>
-        <p:txBody>
-          <a:bodyPr wrap="square" lIns="0" tIns="0" rIns="0" bIns="0" rtlCol="0" anchor="ctr"/>
-          <a:lstStyle/>
-          <a:p>
-            <a:pPr marL="342900" indent="-342900">
+                <a:latin typeface="Calibri" pitchFamily="34" charset="0"/>
+                <a:ea typeface="Calibri" pitchFamily="34" charset="-122"/>
+                <a:cs typeface="Calibri" pitchFamily="34" charset="-120"/>
+              </a:rPr>
+              <a:t>Its job: </a:t>
+            </a:r>
+            <a:pPr indent="0" marL="0">
               <a:lnSpc>
-                <a:spcPts val="1700"/>
+                <a:spcPts val="2000"/>
               </a:lnSpc>
-              <a:spcAft>
-                <a:spcPts val="400"/>
-              </a:spcAft>
-              <a:buSzPct val="100000"/>
-              <a:buChar char="•"/>
-            </a:pPr>
-            <a:r>
-              <a:rPr lang="en-US" sz="1250" dirty="0">
+              <a:buNone/>
+            </a:pPr>
+            <a:r>
+              <a:rPr lang="en-US" sz="1500" dirty="0">
                 <a:solidFill>
                   <a:srgbClr val="2B1620"/>
                 </a:solidFill>
@@ -10312,74 +10850,26 @@
                 <a:ea typeface="Calibri" pitchFamily="34" charset="-122"/>
                 <a:cs typeface="Calibri" pitchFamily="34" charset="-120"/>
               </a:rPr>
-              <a:t>Five posts a week, every week</a:t>
-            </a:r>
-            <a:endParaRPr lang="en-US" sz="1250" dirty="0"/>
-          </a:p>
-          <a:p>
-            <a:pPr marL="342900" indent="-342900">
-              <a:lnSpc>
-                <a:spcPts val="1700"/>
-              </a:lnSpc>
-              <a:spcAft>
-                <a:spcPts val="400"/>
-              </a:spcAft>
-              <a:buSzPct val="100000"/>
-              <a:buChar char="•"/>
-            </a:pPr>
-            <a:r>
-              <a:rPr lang="en-US" sz="1250" dirty="0">
-                <a:solidFill>
-                  <a:srgbClr val="2B1620"/>
-                </a:solidFill>
-                <a:latin typeface="Calibri" pitchFamily="34" charset="0"/>
-                <a:ea typeface="Calibri" pitchFamily="34" charset="-122"/>
-                <a:cs typeface="Calibri" pitchFamily="34" charset="-120"/>
-              </a:rPr>
-              <a:t>You, teaching, on camera</a:t>
-            </a:r>
-            <a:endParaRPr lang="en-US" sz="1250" dirty="0"/>
-          </a:p>
-          <a:p>
-            <a:pPr marL="342900" indent="-342900">
-              <a:lnSpc>
-                <a:spcPts val="1700"/>
-              </a:lnSpc>
-              <a:spcAft>
-                <a:spcPts val="400"/>
-              </a:spcAft>
-              <a:buSzPct val="100000"/>
-              <a:buChar char="•"/>
-            </a:pPr>
-            <a:r>
-              <a:rPr lang="en-US" sz="1250" dirty="0">
-                <a:solidFill>
-                  <a:srgbClr val="2B1620"/>
-                </a:solidFill>
-                <a:latin typeface="Calibri" pitchFamily="34" charset="0"/>
-                <a:ea typeface="Calibri" pitchFamily="34" charset="-122"/>
-                <a:cs typeface="Calibri" pitchFamily="34" charset="-120"/>
-              </a:rPr>
-              <a:t>YouTube from the same shoot</a:t>
-            </a:r>
-            <a:endParaRPr lang="en-US" sz="1250" dirty="0"/>
-          </a:p>
-        </p:txBody>
-      </p:sp>
-      <p:sp>
-        <p:nvSpPr>
-          <p:cNvPr id="12" name="Shape 10"/>
-          <p:cNvSpPr/>
-          <p:nvPr/>
-        </p:nvSpPr>
-        <p:spPr>
-          <a:xfrm>
-            <a:off x="8065008" y="1783080"/>
-            <a:ext cx="3493008" cy="1874520"/>
+              <a:t>the first time she pays you. Small enough to say yes to, real enough to prove she's serious.</a:t>
+            </a:r>
+            <a:endParaRPr lang="en-US" sz="1500" dirty="0"/>
+          </a:p>
+        </p:txBody>
+      </p:sp>
+      <p:sp>
+        <p:nvSpPr>
+          <p:cNvPr id="13" name="Shape 11"/>
+          <p:cNvSpPr/>
+          <p:nvPr/>
+        </p:nvSpPr>
+        <p:spPr>
+          <a:xfrm>
+            <a:off x="713232" y="4123944"/>
+            <a:ext cx="10735056" cy="841248"/>
           </a:xfrm>
           <a:prstGeom prst="roundRect">
             <a:avLst>
-              <a:gd name="adj" fmla="val 6829"/>
+              <a:gd name="adj" fmla="val 10870"/>
             </a:avLst>
           </a:prstGeom>
           <a:solidFill>
@@ -10390,30 +10880,30 @@
       </p:sp>
       <p:sp>
         <p:nvSpPr>
-          <p:cNvPr id="13" name="Text 11"/>
-          <p:cNvSpPr/>
-          <p:nvPr/>
-        </p:nvSpPr>
-        <p:spPr>
-          <a:xfrm>
-            <a:off x="8339328" y="1965960"/>
-            <a:ext cx="2926080" cy="256032"/>
-          </a:xfrm>
-          <a:prstGeom prst="rect">
-            <a:avLst/>
-          </a:prstGeom>
-          <a:noFill/>
-          <a:ln/>
-        </p:spPr>
-        <p:txBody>
-          <a:bodyPr wrap="square" lIns="0" tIns="0" rIns="0" bIns="0" rtlCol="0" anchor="ctr"/>
-          <a:lstStyle/>
-          <a:p>
-            <a:pPr indent="0" marL="0">
-              <a:buNone/>
-            </a:pPr>
-            <a:r>
-              <a:rPr lang="en-US" sz="1200" b="1" spc="160" kern="0" dirty="0">
+          <p:cNvPr id="14" name="Text 12"/>
+          <p:cNvSpPr/>
+          <p:nvPr/>
+        </p:nvSpPr>
+        <p:spPr>
+          <a:xfrm>
+            <a:off x="1005840" y="4270248"/>
+            <a:ext cx="2103120" cy="274320"/>
+          </a:xfrm>
+          <a:prstGeom prst="rect">
+            <a:avLst/>
+          </a:prstGeom>
+          <a:noFill/>
+          <a:ln/>
+        </p:spPr>
+        <p:txBody>
+          <a:bodyPr wrap="square" lIns="0" tIns="0" rIns="0" bIns="0" rtlCol="0" anchor="ctr"/>
+          <a:lstStyle/>
+          <a:p>
+            <a:pPr indent="0" marL="0">
+              <a:buNone/>
+            </a:pPr>
+            <a:r>
+              <a:rPr lang="en-US" sz="1500" b="1" dirty="0">
                 <a:solidFill>
                   <a:srgbClr val="D9A441"/>
                 </a:solidFill>
@@ -10421,84 +10911,100 @@
                 <a:ea typeface="Calibri" pitchFamily="34" charset="-122"/>
                 <a:cs typeface="Calibri" pitchFamily="34" charset="-120"/>
               </a:rPr>
-              <a:t>WEEKS 9–12</a:t>
-            </a:r>
-            <a:endParaRPr lang="en-US" sz="1200" dirty="0"/>
-          </a:p>
-        </p:txBody>
-      </p:sp>
-      <p:sp>
-        <p:nvSpPr>
-          <p:cNvPr id="14" name="Text 12"/>
-          <p:cNvSpPr/>
-          <p:nvPr/>
-        </p:nvSpPr>
-        <p:spPr>
-          <a:xfrm>
-            <a:off x="8339328" y="2258568"/>
-            <a:ext cx="2926080" cy="347472"/>
-          </a:xfrm>
-          <a:prstGeom prst="rect">
-            <a:avLst/>
-          </a:prstGeom>
-          <a:noFill/>
-          <a:ln/>
-        </p:spPr>
-        <p:txBody>
-          <a:bodyPr wrap="square" lIns="0" tIns="0" rIns="0" bIns="0" rtlCol="0" anchor="ctr"/>
-          <a:lstStyle/>
-          <a:p>
-            <a:pPr indent="0" marL="0">
-              <a:buNone/>
-            </a:pPr>
-            <a:r>
-              <a:rPr lang="en-US" sz="2000" b="1" dirty="0">
+              <a:t>Six weeks</a:t>
+            </a:r>
+            <a:endParaRPr lang="en-US" sz="1500" dirty="0"/>
+          </a:p>
+        </p:txBody>
+      </p:sp>
+      <p:sp>
+        <p:nvSpPr>
+          <p:cNvPr id="15" name="Text 13"/>
+          <p:cNvSpPr/>
+          <p:nvPr/>
+        </p:nvSpPr>
+        <p:spPr>
+          <a:xfrm>
+            <a:off x="1005840" y="4544568"/>
+            <a:ext cx="2240280" cy="384048"/>
+          </a:xfrm>
+          <a:prstGeom prst="rect">
+            <a:avLst/>
+          </a:prstGeom>
+          <a:noFill/>
+          <a:ln/>
+        </p:spPr>
+        <p:txBody>
+          <a:bodyPr wrap="square" lIns="0" tIns="0" rIns="0" bIns="0" rtlCol="0" anchor="ctr"/>
+          <a:lstStyle/>
+          <a:p>
+            <a:pPr indent="0" marL="0">
+              <a:lnSpc>
+                <a:spcPts val="1400"/>
+              </a:lnSpc>
+              <a:buNone/>
+            </a:pPr>
+            <a:r>
+              <a:rPr lang="en-US" sz="1150" dirty="0">
+                <a:solidFill>
+                  <a:srgbClr val="C9AEB8"/>
+                </a:solidFill>
+                <a:latin typeface="Calibri" pitchFamily="34" charset="0"/>
+                <a:ea typeface="Calibri" pitchFamily="34" charset="-122"/>
+                <a:cs typeface="Calibri" pitchFamily="34" charset="-120"/>
+              </a:rPr>
+              <a:t>a group programme with live calls</a:t>
+            </a:r>
+            <a:endParaRPr lang="en-US" sz="1150" dirty="0"/>
+          </a:p>
+        </p:txBody>
+      </p:sp>
+      <p:sp>
+        <p:nvSpPr>
+          <p:cNvPr id="16" name="Text 14"/>
+          <p:cNvSpPr/>
+          <p:nvPr/>
+        </p:nvSpPr>
+        <p:spPr>
+          <a:xfrm>
+            <a:off x="3456432" y="4123944"/>
+            <a:ext cx="7671816" cy="841248"/>
+          </a:xfrm>
+          <a:prstGeom prst="rect">
+            <a:avLst/>
+          </a:prstGeom>
+          <a:noFill/>
+          <a:ln/>
+        </p:spPr>
+        <p:txBody>
+          <a:bodyPr wrap="square" lIns="0" tIns="0" rIns="0" bIns="0" rtlCol="0" anchor="ctr"/>
+          <a:lstStyle/>
+          <a:p>
+            <a:pPr indent="0" marL="0">
+              <a:lnSpc>
+                <a:spcPts val="2000"/>
+              </a:lnSpc>
+              <a:buNone/>
+            </a:pPr>
+            <a:r>
+              <a:rPr lang="en-US" sz="1500" b="1" dirty="0">
                 <a:solidFill>
                   <a:srgbClr val="FFFFFF"/>
                 </a:solidFill>
-                <a:latin typeface="Cambria" pitchFamily="34" charset="0"/>
-                <a:ea typeface="Cambria" pitchFamily="34" charset="-122"/>
-                <a:cs typeface="Cambria" pitchFamily="34" charset="-120"/>
-              </a:rPr>
-              <a:t>Compound</a:t>
-            </a:r>
-            <a:endParaRPr lang="en-US" sz="2000" dirty="0"/>
-          </a:p>
-        </p:txBody>
-      </p:sp>
-      <p:sp>
-        <p:nvSpPr>
-          <p:cNvPr id="15" name="Text 13"/>
-          <p:cNvSpPr/>
-          <p:nvPr/>
-        </p:nvSpPr>
-        <p:spPr>
-          <a:xfrm>
-            <a:off x="8339328" y="2688336"/>
-            <a:ext cx="2926080" cy="868680"/>
-          </a:xfrm>
-          <a:prstGeom prst="rect">
-            <a:avLst/>
-          </a:prstGeom>
-          <a:noFill/>
-          <a:ln/>
-        </p:spPr>
-        <p:txBody>
-          <a:bodyPr wrap="square" lIns="0" tIns="0" rIns="0" bIns="0" rtlCol="0" anchor="ctr"/>
-          <a:lstStyle/>
-          <a:p>
-            <a:pPr marL="342900" indent="-342900">
+                <a:latin typeface="Calibri" pitchFamily="34" charset="0"/>
+                <a:ea typeface="Calibri" pitchFamily="34" charset="-122"/>
+                <a:cs typeface="Calibri" pitchFamily="34" charset="-120"/>
+              </a:rPr>
+              <a:t>Its job: </a:t>
+            </a:r>
+            <a:pPr indent="0" marL="0">
               <a:lnSpc>
-                <a:spcPts val="1700"/>
+                <a:spcPts val="2000"/>
               </a:lnSpc>
-              <a:spcAft>
-                <a:spcPts val="400"/>
-              </a:spcAft>
-              <a:buSzPct val="100000"/>
-              <a:buChar char="•"/>
-            </a:pPr>
-            <a:r>
-              <a:rPr lang="en-US" sz="1250" dirty="0">
+              <a:buNone/>
+            </a:pPr>
+            <a:r>
+              <a:rPr lang="en-US" sz="1500" dirty="0">
                 <a:solidFill>
                   <a:srgbClr val="FFFFFF"/>
                 </a:solidFill>
@@ -10506,96 +11012,9 @@
                 <a:ea typeface="Calibri" pitchFamily="34" charset="-122"/>
                 <a:cs typeface="Calibri" pitchFamily="34" charset="-120"/>
               </a:rPr>
-              <a:t>Double down on what worked</a:t>
-            </a:r>
-            <a:endParaRPr lang="en-US" sz="1250" dirty="0"/>
-          </a:p>
-          <a:p>
-            <a:pPr marL="342900" indent="-342900">
-              <a:lnSpc>
-                <a:spcPts val="1700"/>
-              </a:lnSpc>
-              <a:spcAft>
-                <a:spcPts val="400"/>
-              </a:spcAft>
-              <a:buSzPct val="100000"/>
-              <a:buChar char="•"/>
-            </a:pPr>
-            <a:r>
-              <a:rPr lang="en-US" sz="1250" dirty="0">
-                <a:solidFill>
-                  <a:srgbClr val="FFFFFF"/>
-                </a:solidFill>
-                <a:latin typeface="Calibri" pitchFamily="34" charset="0"/>
-                <a:ea typeface="Calibri" pitchFamily="34" charset="-122"/>
-                <a:cs typeface="Calibri" pitchFamily="34" charset="-120"/>
-              </a:rPr>
-              <a:t>Your first paid workshop</a:t>
-            </a:r>
-            <a:endParaRPr lang="en-US" sz="1250" dirty="0"/>
-          </a:p>
-          <a:p>
-            <a:pPr marL="342900" indent="-342900">
-              <a:lnSpc>
-                <a:spcPts val="1700"/>
-              </a:lnSpc>
-              <a:spcAft>
-                <a:spcPts val="400"/>
-              </a:spcAft>
-              <a:buSzPct val="100000"/>
-              <a:buChar char="•"/>
-            </a:pPr>
-            <a:r>
-              <a:rPr lang="en-US" sz="1250" dirty="0">
-                <a:solidFill>
-                  <a:srgbClr val="FFFFFF"/>
-                </a:solidFill>
-                <a:latin typeface="Calibri" pitchFamily="34" charset="0"/>
-                <a:ea typeface="Calibri" pitchFamily="34" charset="-122"/>
-                <a:cs typeface="Calibri" pitchFamily="34" charset="-120"/>
-              </a:rPr>
-              <a:t>Systems running on their own</a:t>
-            </a:r>
-            <a:endParaRPr lang="en-US" sz="1250" dirty="0"/>
-          </a:p>
-        </p:txBody>
-      </p:sp>
-      <p:sp>
-        <p:nvSpPr>
-          <p:cNvPr id="16" name="Text 14"/>
-          <p:cNvSpPr/>
-          <p:nvPr/>
-        </p:nvSpPr>
-        <p:spPr>
-          <a:xfrm>
-            <a:off x="713232" y="3977640"/>
-            <a:ext cx="10735056" cy="320040"/>
-          </a:xfrm>
-          <a:prstGeom prst="rect">
-            <a:avLst/>
-          </a:prstGeom>
-          <a:noFill/>
-          <a:ln/>
-        </p:spPr>
-        <p:txBody>
-          <a:bodyPr wrap="square" lIns="0" tIns="0" rIns="0" bIns="0" rtlCol="0" anchor="ctr"/>
-          <a:lstStyle/>
-          <a:p>
-            <a:pPr indent="0" marL="0">
-              <a:buNone/>
-            </a:pPr>
-            <a:r>
-              <a:rPr lang="en-US" sz="1600" b="1" dirty="0">
-                <a:solidFill>
-                  <a:srgbClr val="6D2E46"/>
-                </a:solidFill>
-                <a:latin typeface="Calibri" pitchFamily="34" charset="0"/>
-                <a:ea typeface="Calibri" pitchFamily="34" charset="-122"/>
-                <a:cs typeface="Calibri" pitchFamily="34" charset="-120"/>
-              </a:rPr>
-              <a:t>Where you'd realistically be at day 90:</a:t>
-            </a:r>
-            <a:endParaRPr lang="en-US" sz="1600" dirty="0"/>
+              <a:t>your real income. Taught once, to a room — so it doesn't eat your calendar the way 1:1 does.</a:t>
+            </a:r>
+            <a:endParaRPr lang="en-US" sz="1500" dirty="0"/>
           </a:p>
         </p:txBody>
       </p:sp>
@@ -10607,12 +11026,12 @@
         </p:nvSpPr>
         <p:spPr>
           <a:xfrm>
-            <a:off x="713232" y="4343400"/>
-            <a:ext cx="2532888" cy="1261872"/>
+            <a:off x="713232" y="5065776"/>
+            <a:ext cx="10735056" cy="841248"/>
           </a:xfrm>
           <a:prstGeom prst="roundRect">
             <a:avLst>
-              <a:gd name="adj" fmla="val 10145"/>
+              <a:gd name="adj" fmla="val 10870"/>
             </a:avLst>
           </a:prstGeom>
           <a:solidFill>
@@ -10629,34 +11048,34 @@
         </p:nvSpPr>
         <p:spPr>
           <a:xfrm>
-            <a:off x="969264" y="4517136"/>
-            <a:ext cx="2011680" cy="457200"/>
-          </a:xfrm>
-          <a:prstGeom prst="rect">
-            <a:avLst/>
-          </a:prstGeom>
-          <a:noFill/>
-          <a:ln/>
-        </p:spPr>
-        <p:txBody>
-          <a:bodyPr wrap="square" lIns="0" tIns="0" rIns="0" bIns="0" rtlCol="0" anchor="ctr"/>
-          <a:lstStyle/>
-          <a:p>
-            <a:pPr indent="0" marL="0">
-              <a:buNone/>
-            </a:pPr>
-            <a:r>
-              <a:rPr lang="en-US" sz="3000" b="1" dirty="0">
+            <a:off x="1005840" y="5212080"/>
+            <a:ext cx="2103120" cy="274320"/>
+          </a:xfrm>
+          <a:prstGeom prst="rect">
+            <a:avLst/>
+          </a:prstGeom>
+          <a:noFill/>
+          <a:ln/>
+        </p:spPr>
+        <p:txBody>
+          <a:bodyPr wrap="square" lIns="0" tIns="0" rIns="0" bIns="0" rtlCol="0" anchor="ctr"/>
+          <a:lstStyle/>
+          <a:p>
+            <a:pPr indent="0" marL="0">
+              <a:buNone/>
+            </a:pPr>
+            <a:r>
+              <a:rPr lang="en-US" sz="1500" b="1" dirty="0">
                 <a:solidFill>
                   <a:srgbClr val="D9A441"/>
                 </a:solidFill>
-                <a:latin typeface="Cambria" pitchFamily="34" charset="0"/>
-                <a:ea typeface="Cambria" pitchFamily="34" charset="-122"/>
-                <a:cs typeface="Cambria" pitchFamily="34" charset="-120"/>
-              </a:rPr>
-              <a:t>~65</a:t>
-            </a:r>
-            <a:endParaRPr lang="en-US" sz="3000" dirty="0"/>
+                <a:latin typeface="Calibri" pitchFamily="34" charset="0"/>
+                <a:ea typeface="Calibri" pitchFamily="34" charset="-122"/>
+                <a:cs typeface="Calibri" pitchFamily="34" charset="-120"/>
+              </a:rPr>
+              <a:t>Every month</a:t>
+            </a:r>
+            <a:endParaRPr lang="en-US" sz="1500" dirty="0"/>
           </a:p>
         </p:txBody>
       </p:sp>
@@ -10668,8 +11087,8 @@
         </p:nvSpPr>
         <p:spPr>
           <a:xfrm>
-            <a:off x="969264" y="4992624"/>
-            <a:ext cx="2103120" cy="548640"/>
+            <a:off x="1005840" y="5486400"/>
+            <a:ext cx="2240280" cy="384048"/>
           </a:xfrm>
           <a:prstGeom prst="rect">
             <a:avLst/>
@@ -10683,12 +11102,12 @@
           <a:p>
             <a:pPr indent="0" marL="0">
               <a:lnSpc>
-                <a:spcPts val="1600"/>
+                <a:spcPts val="1400"/>
               </a:lnSpc>
               <a:buNone/>
             </a:pPr>
             <a:r>
-              <a:rPr lang="en-US" sz="1200" dirty="0">
+              <a:rPr lang="en-US" sz="1150" dirty="0">
                 <a:solidFill>
                   <a:srgbClr val="C9AEB8"/>
                 </a:solidFill>
@@ -10696,33 +11115,70 @@
                 <a:ea typeface="Calibri" pitchFamily="34" charset="-122"/>
                 <a:cs typeface="Calibri" pitchFamily="34" charset="-120"/>
               </a:rPr>
-              <a:t>posts, vs 34 today — your library doubles</a:t>
-            </a:r>
-            <a:endParaRPr lang="en-US" sz="1200" dirty="0"/>
-          </a:p>
-        </p:txBody>
-      </p:sp>
-      <p:sp>
-        <p:nvSpPr>
-          <p:cNvPr id="20" name="Shape 18"/>
-          <p:cNvSpPr/>
-          <p:nvPr/>
-        </p:nvSpPr>
-        <p:spPr>
-          <a:xfrm>
-            <a:off x="3429000" y="4343400"/>
-            <a:ext cx="2532888" cy="1261872"/>
-          </a:xfrm>
-          <a:prstGeom prst="roundRect">
-            <a:avLst>
-              <a:gd name="adj" fmla="val 10145"/>
-            </a:avLst>
-          </a:prstGeom>
-          <a:solidFill>
-            <a:srgbClr val="3D1B2E"/>
-          </a:solidFill>
-          <a:ln/>
-        </p:spPr>
+              <a:t>a membership, billed monthly</a:t>
+            </a:r>
+            <a:endParaRPr lang="en-US" sz="1150" dirty="0"/>
+          </a:p>
+        </p:txBody>
+      </p:sp>
+      <p:sp>
+        <p:nvSpPr>
+          <p:cNvPr id="20" name="Text 18"/>
+          <p:cNvSpPr/>
+          <p:nvPr/>
+        </p:nvSpPr>
+        <p:spPr>
+          <a:xfrm>
+            <a:off x="3456432" y="5065776"/>
+            <a:ext cx="7671816" cy="841248"/>
+          </a:xfrm>
+          <a:prstGeom prst="rect">
+            <a:avLst/>
+          </a:prstGeom>
+          <a:noFill/>
+          <a:ln/>
+        </p:spPr>
+        <p:txBody>
+          <a:bodyPr wrap="square" lIns="0" tIns="0" rIns="0" bIns="0" rtlCol="0" anchor="ctr"/>
+          <a:lstStyle/>
+          <a:p>
+            <a:pPr indent="0" marL="0">
+              <a:lnSpc>
+                <a:spcPts val="2000"/>
+              </a:lnSpc>
+              <a:buNone/>
+            </a:pPr>
+            <a:r>
+              <a:rPr lang="en-US" sz="1500" b="1" dirty="0">
+                <a:solidFill>
+                  <a:srgbClr val="FFFFFF"/>
+                </a:solidFill>
+                <a:latin typeface="Calibri" pitchFamily="34" charset="0"/>
+                <a:ea typeface="Calibri" pitchFamily="34" charset="-122"/>
+                <a:cs typeface="Calibri" pitchFamily="34" charset="-120"/>
+              </a:rPr>
+              <a:t>Its job: </a:t>
+            </a:r>
+            <a:pPr indent="0" marL="0">
+              <a:lnSpc>
+                <a:spcPts val="2000"/>
+              </a:lnSpc>
+              <a:buNone/>
+            </a:pPr>
+            <a:r>
+              <a:rPr lang="en-US" sz="1500" dirty="0">
+                <a:solidFill>
+                  <a:srgbClr val="FFFFFF"/>
+                </a:solidFill>
+                <a:latin typeface="Calibri" pitchFamily="34" charset="0"/>
+                <a:ea typeface="Calibri" pitchFamily="34" charset="-122"/>
+                <a:cs typeface="Calibri" pitchFamily="34" charset="-120"/>
+              </a:rPr>
+              <a:t>money that arrives without a launch. The most valuable thing you can build.</a:t>
+            </a:r>
+            <a:endParaRPr lang="en-US" sz="1500" dirty="0"/>
+          </a:p>
+        </p:txBody>
       </p:sp>
       <p:sp>
         <p:nvSpPr>
@@ -10732,321 +11188,62 @@
         </p:nvSpPr>
         <p:spPr>
           <a:xfrm>
-            <a:off x="3685032" y="4517136"/>
-            <a:ext cx="2011680" cy="457200"/>
-          </a:xfrm>
-          <a:prstGeom prst="rect">
-            <a:avLst/>
-          </a:prstGeom>
-          <a:noFill/>
-          <a:ln/>
-        </p:spPr>
-        <p:txBody>
-          <a:bodyPr wrap="square" lIns="0" tIns="0" rIns="0" bIns="0" rtlCol="0" anchor="ctr"/>
-          <a:lstStyle/>
-          <a:p>
-            <a:pPr indent="0" marL="0">
-              <a:buNone/>
-            </a:pPr>
-            <a:r>
-              <a:rPr lang="en-US" sz="3000" b="1" dirty="0">
-                <a:solidFill>
-                  <a:srgbClr val="D9A441"/>
-                </a:solidFill>
-                <a:latin typeface="Cambria" pitchFamily="34" charset="0"/>
-                <a:ea typeface="Cambria" pitchFamily="34" charset="-122"/>
-                <a:cs typeface="Cambria" pitchFamily="34" charset="-120"/>
-              </a:rPr>
-              <a:t>500</a:t>
-            </a:r>
-            <a:endParaRPr lang="en-US" sz="3000" dirty="0"/>
-          </a:p>
-        </p:txBody>
-      </p:sp>
-      <p:sp>
-        <p:nvSpPr>
-          <p:cNvPr id="22" name="Text 20"/>
-          <p:cNvSpPr/>
-          <p:nvPr/>
-        </p:nvSpPr>
-        <p:spPr>
-          <a:xfrm>
-            <a:off x="3685032" y="4992624"/>
-            <a:ext cx="2103120" cy="548640"/>
-          </a:xfrm>
-          <a:prstGeom prst="rect">
-            <a:avLst/>
-          </a:prstGeom>
-          <a:noFill/>
-          <a:ln/>
-        </p:spPr>
-        <p:txBody>
-          <a:bodyPr wrap="square" lIns="0" tIns="0" rIns="0" bIns="0" rtlCol="0" anchor="ctr"/>
-          <a:lstStyle/>
-          <a:p>
-            <a:pPr indent="0" marL="0">
-              <a:lnSpc>
-                <a:spcPts val="1600"/>
-              </a:lnSpc>
-              <a:buNone/>
-            </a:pPr>
-            <a:r>
-              <a:rPr lang="en-US" sz="1200" dirty="0">
-                <a:solidFill>
-                  <a:srgbClr val="C9AEB8"/>
-                </a:solidFill>
-                <a:latin typeface="Calibri" pitchFamily="34" charset="0"/>
-                <a:ea typeface="Calibri" pitchFamily="34" charset="-122"/>
-                <a:cs typeface="Calibri" pitchFamily="34" charset="-120"/>
-              </a:rPr>
-              <a:t>people on a WhatsApp list you own</a:t>
-            </a:r>
-            <a:endParaRPr lang="en-US" sz="1200" dirty="0"/>
-          </a:p>
-        </p:txBody>
-      </p:sp>
-      <p:sp>
-        <p:nvSpPr>
-          <p:cNvPr id="23" name="Shape 21"/>
-          <p:cNvSpPr/>
-          <p:nvPr/>
-        </p:nvSpPr>
-        <p:spPr>
-          <a:xfrm>
-            <a:off x="6144768" y="4343400"/>
-            <a:ext cx="2532888" cy="1261872"/>
-          </a:xfrm>
-          <a:prstGeom prst="roundRect">
-            <a:avLst>
-              <a:gd name="adj" fmla="val 10145"/>
-            </a:avLst>
-          </a:prstGeom>
-          <a:solidFill>
-            <a:srgbClr val="3D1B2E"/>
-          </a:solidFill>
-          <a:ln/>
-        </p:spPr>
-      </p:sp>
-      <p:sp>
-        <p:nvSpPr>
-          <p:cNvPr id="24" name="Text 22"/>
-          <p:cNvSpPr/>
-          <p:nvPr/>
-        </p:nvSpPr>
-        <p:spPr>
-          <a:xfrm>
-            <a:off x="6400800" y="4517136"/>
-            <a:ext cx="2011680" cy="457200"/>
-          </a:xfrm>
-          <a:prstGeom prst="rect">
-            <a:avLst/>
-          </a:prstGeom>
-          <a:noFill/>
-          <a:ln/>
-        </p:spPr>
-        <p:txBody>
-          <a:bodyPr wrap="square" lIns="0" tIns="0" rIns="0" bIns="0" rtlCol="0" anchor="ctr"/>
-          <a:lstStyle/>
-          <a:p>
-            <a:pPr indent="0" marL="0">
-              <a:buNone/>
-            </a:pPr>
-            <a:r>
-              <a:rPr lang="en-US" sz="3000" b="1" dirty="0">
-                <a:solidFill>
-                  <a:srgbClr val="D9A441"/>
-                </a:solidFill>
-                <a:latin typeface="Cambria" pitchFamily="34" charset="0"/>
-                <a:ea typeface="Cambria" pitchFamily="34" charset="-122"/>
-                <a:cs typeface="Cambria" pitchFamily="34" charset="-120"/>
-              </a:rPr>
-              <a:t>12</a:t>
-            </a:r>
-            <a:endParaRPr lang="en-US" sz="3000" dirty="0"/>
-          </a:p>
-        </p:txBody>
-      </p:sp>
-      <p:sp>
-        <p:nvSpPr>
-          <p:cNvPr id="25" name="Text 23"/>
-          <p:cNvSpPr/>
-          <p:nvPr/>
-        </p:nvSpPr>
-        <p:spPr>
-          <a:xfrm>
-            <a:off x="6400800" y="4992624"/>
-            <a:ext cx="2103120" cy="548640"/>
-          </a:xfrm>
-          <a:prstGeom prst="rect">
-            <a:avLst/>
-          </a:prstGeom>
-          <a:noFill/>
-          <a:ln/>
-        </p:spPr>
-        <p:txBody>
-          <a:bodyPr wrap="square" lIns="0" tIns="0" rIns="0" bIns="0" rtlCol="0" anchor="ctr"/>
-          <a:lstStyle/>
-          <a:p>
-            <a:pPr indent="0" marL="0">
-              <a:lnSpc>
-                <a:spcPts val="1600"/>
-              </a:lnSpc>
-              <a:buNone/>
-            </a:pPr>
-            <a:r>
-              <a:rPr lang="en-US" sz="1200" dirty="0">
-                <a:solidFill>
-                  <a:srgbClr val="C9AEB8"/>
-                </a:solidFill>
-                <a:latin typeface="Calibri" pitchFamily="34" charset="0"/>
-                <a:ea typeface="Calibri" pitchFamily="34" charset="-122"/>
-                <a:cs typeface="Calibri" pitchFamily="34" charset="-120"/>
-              </a:rPr>
-              <a:t>YouTube videos working in search for you</a:t>
-            </a:r>
-            <a:endParaRPr lang="en-US" sz="1200" dirty="0"/>
-          </a:p>
-        </p:txBody>
-      </p:sp>
-      <p:sp>
-        <p:nvSpPr>
-          <p:cNvPr id="26" name="Shape 24"/>
-          <p:cNvSpPr/>
-          <p:nvPr/>
-        </p:nvSpPr>
-        <p:spPr>
-          <a:xfrm>
-            <a:off x="8860536" y="4343400"/>
-            <a:ext cx="2532888" cy="1261872"/>
-          </a:xfrm>
-          <a:prstGeom prst="roundRect">
-            <a:avLst>
-              <a:gd name="adj" fmla="val 10145"/>
-            </a:avLst>
-          </a:prstGeom>
-          <a:solidFill>
-            <a:srgbClr val="3D1B2E"/>
-          </a:solidFill>
-          <a:ln/>
-        </p:spPr>
-      </p:sp>
-      <p:sp>
-        <p:nvSpPr>
-          <p:cNvPr id="27" name="Text 25"/>
-          <p:cNvSpPr/>
-          <p:nvPr/>
-        </p:nvSpPr>
-        <p:spPr>
-          <a:xfrm>
-            <a:off x="9116568" y="4517136"/>
-            <a:ext cx="2011680" cy="457200"/>
-          </a:xfrm>
-          <a:prstGeom prst="rect">
-            <a:avLst/>
-          </a:prstGeom>
-          <a:noFill/>
-          <a:ln/>
-        </p:spPr>
-        <p:txBody>
-          <a:bodyPr wrap="square" lIns="0" tIns="0" rIns="0" bIns="0" rtlCol="0" anchor="ctr"/>
-          <a:lstStyle/>
-          <a:p>
-            <a:pPr indent="0" marL="0">
-              <a:buNone/>
-            </a:pPr>
-            <a:r>
-              <a:rPr lang="en-US" sz="3000" b="1" dirty="0">
-                <a:solidFill>
-                  <a:srgbClr val="D9A441"/>
-                </a:solidFill>
-                <a:latin typeface="Cambria" pitchFamily="34" charset="0"/>
-                <a:ea typeface="Cambria" pitchFamily="34" charset="-122"/>
-                <a:cs typeface="Cambria" pitchFamily="34" charset="-120"/>
-              </a:rPr>
-              <a:t>1</a:t>
-            </a:r>
-            <a:endParaRPr lang="en-US" sz="3000" dirty="0"/>
-          </a:p>
-        </p:txBody>
-      </p:sp>
-      <p:sp>
-        <p:nvSpPr>
-          <p:cNvPr id="28" name="Text 26"/>
-          <p:cNvSpPr/>
-          <p:nvPr/>
-        </p:nvSpPr>
-        <p:spPr>
-          <a:xfrm>
-            <a:off x="9116568" y="4992624"/>
-            <a:ext cx="2103120" cy="548640"/>
-          </a:xfrm>
-          <a:prstGeom prst="rect">
-            <a:avLst/>
-          </a:prstGeom>
-          <a:noFill/>
-          <a:ln/>
-        </p:spPr>
-        <p:txBody>
-          <a:bodyPr wrap="square" lIns="0" tIns="0" rIns="0" bIns="0" rtlCol="0" anchor="ctr"/>
-          <a:lstStyle/>
-          <a:p>
-            <a:pPr indent="0" marL="0">
-              <a:lnSpc>
-                <a:spcPts val="1600"/>
-              </a:lnSpc>
-              <a:buNone/>
-            </a:pPr>
-            <a:r>
-              <a:rPr lang="en-US" sz="1200" dirty="0">
-                <a:solidFill>
-                  <a:srgbClr val="C9AEB8"/>
-                </a:solidFill>
-                <a:latin typeface="Calibri" pitchFamily="34" charset="0"/>
-                <a:ea typeface="Calibri" pitchFamily="34" charset="-122"/>
-                <a:cs typeface="Calibri" pitchFamily="34" charset="-120"/>
-              </a:rPr>
-              <a:t>clear brand a stranger gets in five seconds</a:t>
-            </a:r>
-            <a:endParaRPr lang="en-US" sz="1200" dirty="0"/>
-          </a:p>
-        </p:txBody>
-      </p:sp>
-      <p:sp>
-        <p:nvSpPr>
-          <p:cNvPr id="29" name="Text 27"/>
-          <p:cNvSpPr/>
-          <p:nvPr/>
-        </p:nvSpPr>
-        <p:spPr>
-          <a:xfrm>
-            <a:off x="713232" y="6309360"/>
-            <a:ext cx="10735056" cy="320040"/>
-          </a:xfrm>
-          <a:prstGeom prst="rect">
-            <a:avLst/>
-          </a:prstGeom>
-          <a:noFill/>
-          <a:ln/>
-        </p:spPr>
-        <p:txBody>
-          <a:bodyPr wrap="square" lIns="0" tIns="0" rIns="0" bIns="0" rtlCol="0" anchor="ctr"/>
-          <a:lstStyle/>
-          <a:p>
-            <a:pPr indent="0" marL="0">
-              <a:buNone/>
-            </a:pPr>
-            <a:r>
-              <a:rPr lang="en-US" sz="1050" i="1" dirty="0">
-                <a:solidFill>
-                  <a:srgbClr val="7A6068"/>
-                </a:solidFill>
-                <a:latin typeface="Calibri" pitchFamily="34" charset="0"/>
-                <a:ea typeface="Calibri" pitchFamily="34" charset="-122"/>
-                <a:cs typeface="Calibri" pitchFamily="34" charset="-120"/>
-              </a:rPr>
-              <a:t>Katie reached 415K in about a year across 369 posts. Nobody can promise you a follower number — but volume, clarity and consistency are the levers she pulled, and they're the ones we'd pull.</a:t>
-            </a:r>
-            <a:endParaRPr lang="en-US" sz="1050" dirty="0"/>
+            <a:off x="713232" y="6080760"/>
+            <a:ext cx="10607040" cy="457200"/>
+          </a:xfrm>
+          <a:prstGeom prst="rect">
+            <a:avLst/>
+          </a:prstGeom>
+          <a:noFill/>
+          <a:ln/>
+        </p:spPr>
+        <p:txBody>
+          <a:bodyPr wrap="square" lIns="0" tIns="0" rIns="0" bIns="0" rtlCol="0" anchor="ctr"/>
+          <a:lstStyle/>
+          <a:p>
+            <a:pPr indent="0" marL="0">
+              <a:buNone/>
+            </a:pPr>
+            <a:r>
+              <a:rPr lang="en-US" sz="1650" b="1" dirty="0">
+                <a:solidFill>
+                  <a:srgbClr val="6D2E46"/>
+                </a:solidFill>
+                <a:latin typeface="Calibri" pitchFamily="34" charset="0"/>
+                <a:ea typeface="Calibri" pitchFamily="34" charset="-122"/>
+                <a:cs typeface="Calibri" pitchFamily="34" charset="-120"/>
+              </a:rPr>
+              <a:t>And here's the neat part: the monthly challenge we'd film anyway </a:t>
+            </a:r>
+            <a:pPr indent="0" marL="0">
+              <a:buNone/>
+            </a:pPr>
+            <a:r>
+              <a:rPr lang="en-US" sz="1650" b="1" i="1" dirty="0">
+                <a:solidFill>
+                  <a:srgbClr val="6D2E46"/>
+                </a:solidFill>
+                <a:latin typeface="Calibri" pitchFamily="34" charset="0"/>
+                <a:ea typeface="Calibri" pitchFamily="34" charset="-122"/>
+                <a:cs typeface="Calibri" pitchFamily="34" charset="-120"/>
+              </a:rPr>
+              <a:t>is</a:t>
+            </a:r>
+            <a:pPr indent="0" marL="0">
+              <a:buNone/>
+            </a:pPr>
+            <a:r>
+              <a:rPr lang="en-US" sz="1650" b="1" dirty="0">
+                <a:solidFill>
+                  <a:srgbClr val="6D2E46"/>
+                </a:solidFill>
+                <a:latin typeface="Calibri" pitchFamily="34" charset="0"/>
+                <a:ea typeface="Calibri" pitchFamily="34" charset="-122"/>
+                <a:cs typeface="Calibri" pitchFamily="34" charset="-120"/>
+              </a:rPr>
+              <a:t> the membership. Same work, twice the use.</a:t>
+            </a:r>
+            <a:endParaRPr lang="en-US" sz="1650" dirty="0"/>
           </a:p>
         </p:txBody>
       </p:sp>
@@ -11441,7 +11638,7 @@
                 <a:ea typeface="Calibri" pitchFamily="34" charset="-122"/>
                 <a:cs typeface="Calibri" pitchFamily="34" charset="-120"/>
               </a:rPr>
-              <a:t>YOUR SIDE OF IT</a:t>
+              <a:t>THE ENGINE ROOM</a:t>
             </a:r>
             <a:endParaRPr lang="en-US" sz="1200" dirty="0"/>
           </a:p>
@@ -11483,7 +11680,7 @@
                 <a:ea typeface="Cambria" pitchFamily="34" charset="-122"/>
                 <a:cs typeface="Cambria" pitchFamily="34" charset="-120"/>
               </a:rPr>
-              <a:t>What I'd need from you</a:t>
+              <a:t>Why WhatsApp, and how we'd run it</a:t>
             </a:r>
             <a:endParaRPr lang="en-US" sz="3900" dirty="0"/>
           </a:p>
@@ -11491,14 +11688,75 @@
       </p:sp>
       <p:sp>
         <p:nvSpPr>
-          <p:cNvPr id="4" name="Text 2"/>
+          <p:cNvPr id="4" name="Shape 2"/>
           <p:cNvSpPr/>
           <p:nvPr/>
         </p:nvSpPr>
         <p:spPr>
           <a:xfrm>
             <a:off x="713232" y="1783080"/>
-            <a:ext cx="10424160" cy="548640"/>
+            <a:ext cx="2532888" cy="1371600"/>
+          </a:xfrm>
+          <a:prstGeom prst="roundRect">
+            <a:avLst>
+              <a:gd name="adj" fmla="val 9333"/>
+            </a:avLst>
+          </a:prstGeom>
+          <a:solidFill>
+            <a:srgbClr val="3D1B2E"/>
+          </a:solidFill>
+          <a:ln/>
+        </p:spPr>
+      </p:sp>
+      <p:sp>
+        <p:nvSpPr>
+          <p:cNvPr id="5" name="Text 3"/>
+          <p:cNvSpPr/>
+          <p:nvPr/>
+        </p:nvSpPr>
+        <p:spPr>
+          <a:xfrm>
+            <a:off x="969264" y="1956816"/>
+            <a:ext cx="2103120" cy="475488"/>
+          </a:xfrm>
+          <a:prstGeom prst="rect">
+            <a:avLst/>
+          </a:prstGeom>
+          <a:noFill/>
+          <a:ln/>
+        </p:spPr>
+        <p:txBody>
+          <a:bodyPr wrap="square" lIns="0" tIns="0" rIns="0" bIns="0" rtlCol="0" anchor="ctr"/>
+          <a:lstStyle/>
+          <a:p>
+            <a:pPr indent="0" marL="0">
+              <a:buNone/>
+            </a:pPr>
+            <a:r>
+              <a:rPr lang="en-US" sz="2900" b="1" dirty="0">
+                <a:solidFill>
+                  <a:srgbClr val="D9A441"/>
+                </a:solidFill>
+                <a:latin typeface="Cambria" pitchFamily="34" charset="0"/>
+                <a:ea typeface="Cambria" pitchFamily="34" charset="-122"/>
+                <a:cs typeface="Cambria" pitchFamily="34" charset="-120"/>
+              </a:rPr>
+              <a:t>535M</a:t>
+            </a:r>
+            <a:endParaRPr lang="en-US" sz="2900" dirty="0"/>
+          </a:p>
+        </p:txBody>
+      </p:sp>
+      <p:sp>
+        <p:nvSpPr>
+          <p:cNvPr id="6" name="Text 4"/>
+          <p:cNvSpPr/>
+          <p:nvPr/>
+        </p:nvSpPr>
+        <p:spPr>
+          <a:xfrm>
+            <a:off x="969264" y="2450592"/>
+            <a:ext cx="2103120" cy="621792"/>
           </a:xfrm>
           <a:prstGeom prst="rect">
             <a:avLst/>
@@ -11512,38 +11770,246 @@
           <a:p>
             <a:pPr indent="0" marL="0">
               <a:lnSpc>
-                <a:spcPts val="2400"/>
+                <a:spcPts val="1500"/>
               </a:lnSpc>
               <a:buNone/>
             </a:pPr>
             <a:r>
-              <a:rPr lang="en-US" sz="1700" dirty="0">
-                <a:solidFill>
-                  <a:srgbClr val="7A6068"/>
-                </a:solidFill>
-                <a:latin typeface="Calibri" pitchFamily="34" charset="0"/>
-                <a:ea typeface="Calibri" pitchFamily="34" charset="-122"/>
-                <a:cs typeface="Calibri" pitchFamily="34" charset="-120"/>
-              </a:rPr>
-              <a:t>Deliberately small. You have two children and a business to build — the point of a partner is that you do less, not more.</a:t>
-            </a:r>
-            <a:endParaRPr lang="en-US" sz="1700" dirty="0"/>
-          </a:p>
-        </p:txBody>
-      </p:sp>
-      <p:sp>
-        <p:nvSpPr>
-          <p:cNvPr id="5" name="Shape 3"/>
-          <p:cNvSpPr/>
-          <p:nvPr/>
-        </p:nvSpPr>
-        <p:spPr>
-          <a:xfrm>
-            <a:off x="713232" y="2606040"/>
-            <a:ext cx="502920" cy="502920"/>
-          </a:xfrm>
-          <a:prstGeom prst="ellipse">
-            <a:avLst/>
+              <a:rPr lang="en-US" sz="1150" dirty="0">
+                <a:solidFill>
+                  <a:srgbClr val="C9AEB8"/>
+                </a:solidFill>
+                <a:latin typeface="Calibri" pitchFamily="34" charset="0"/>
+                <a:ea typeface="Calibri" pitchFamily="34" charset="-122"/>
+                <a:cs typeface="Calibri" pitchFamily="34" charset="-120"/>
+              </a:rPr>
+              <a:t>Indians on WhatsApp. Your audience is already there, every day.</a:t>
+            </a:r>
+            <a:endParaRPr lang="en-US" sz="1150" dirty="0"/>
+          </a:p>
+        </p:txBody>
+      </p:sp>
+      <p:sp>
+        <p:nvSpPr>
+          <p:cNvPr id="7" name="Shape 5"/>
+          <p:cNvSpPr/>
+          <p:nvPr/>
+        </p:nvSpPr>
+        <p:spPr>
+          <a:xfrm>
+            <a:off x="3429000" y="1783080"/>
+            <a:ext cx="2532888" cy="1371600"/>
+          </a:xfrm>
+          <a:prstGeom prst="roundRect">
+            <a:avLst>
+              <a:gd name="adj" fmla="val 9333"/>
+            </a:avLst>
+          </a:prstGeom>
+          <a:solidFill>
+            <a:srgbClr val="3D1B2E"/>
+          </a:solidFill>
+          <a:ln/>
+        </p:spPr>
+      </p:sp>
+      <p:sp>
+        <p:nvSpPr>
+          <p:cNvPr id="8" name="Text 6"/>
+          <p:cNvSpPr/>
+          <p:nvPr/>
+        </p:nvSpPr>
+        <p:spPr>
+          <a:xfrm>
+            <a:off x="3685032" y="1956816"/>
+            <a:ext cx="2103120" cy="475488"/>
+          </a:xfrm>
+          <a:prstGeom prst="rect">
+            <a:avLst/>
+          </a:prstGeom>
+          <a:noFill/>
+          <a:ln/>
+        </p:spPr>
+        <p:txBody>
+          <a:bodyPr wrap="square" lIns="0" tIns="0" rIns="0" bIns="0" rtlCol="0" anchor="ctr"/>
+          <a:lstStyle/>
+          <a:p>
+            <a:pPr indent="0" marL="0">
+              <a:buNone/>
+            </a:pPr>
+            <a:r>
+              <a:rPr lang="en-US" sz="2900" b="1" dirty="0">
+                <a:solidFill>
+                  <a:srgbClr val="D9A441"/>
+                </a:solidFill>
+                <a:latin typeface="Cambria" pitchFamily="34" charset="0"/>
+                <a:ea typeface="Cambria" pitchFamily="34" charset="-122"/>
+                <a:cs typeface="Cambria" pitchFamily="34" charset="-120"/>
+              </a:rPr>
+              <a:t>90%+</a:t>
+            </a:r>
+            <a:endParaRPr lang="en-US" sz="2900" dirty="0"/>
+          </a:p>
+        </p:txBody>
+      </p:sp>
+      <p:sp>
+        <p:nvSpPr>
+          <p:cNvPr id="9" name="Text 7"/>
+          <p:cNvSpPr/>
+          <p:nvPr/>
+        </p:nvSpPr>
+        <p:spPr>
+          <a:xfrm>
+            <a:off x="3685032" y="2450592"/>
+            <a:ext cx="2103120" cy="621792"/>
+          </a:xfrm>
+          <a:prstGeom prst="rect">
+            <a:avLst/>
+          </a:prstGeom>
+          <a:noFill/>
+          <a:ln/>
+        </p:spPr>
+        <p:txBody>
+          <a:bodyPr wrap="square" lIns="0" tIns="0" rIns="0" bIns="0" rtlCol="0" anchor="ctr"/>
+          <a:lstStyle/>
+          <a:p>
+            <a:pPr indent="0" marL="0">
+              <a:lnSpc>
+                <a:spcPts val="1500"/>
+              </a:lnSpc>
+              <a:buNone/>
+            </a:pPr>
+            <a:r>
+              <a:rPr lang="en-US" sz="1150" dirty="0">
+                <a:solidFill>
+                  <a:srgbClr val="C9AEB8"/>
+                </a:solidFill>
+                <a:latin typeface="Calibri" pitchFamily="34" charset="0"/>
+                <a:ea typeface="Calibri" pitchFamily="34" charset="-122"/>
+                <a:cs typeface="Calibri" pitchFamily="34" charset="-120"/>
+              </a:rPr>
+              <a:t>read rate on a properly opted-in list. Email sits around 20–25%.</a:t>
+            </a:r>
+            <a:endParaRPr lang="en-US" sz="1150" dirty="0"/>
+          </a:p>
+        </p:txBody>
+      </p:sp>
+      <p:sp>
+        <p:nvSpPr>
+          <p:cNvPr id="10" name="Shape 8"/>
+          <p:cNvSpPr/>
+          <p:nvPr/>
+        </p:nvSpPr>
+        <p:spPr>
+          <a:xfrm>
+            <a:off x="6144768" y="1783080"/>
+            <a:ext cx="2532888" cy="1371600"/>
+          </a:xfrm>
+          <a:prstGeom prst="roundRect">
+            <a:avLst>
+              <a:gd name="adj" fmla="val 9333"/>
+            </a:avLst>
+          </a:prstGeom>
+          <a:solidFill>
+            <a:srgbClr val="3D1B2E"/>
+          </a:solidFill>
+          <a:ln/>
+        </p:spPr>
+      </p:sp>
+      <p:sp>
+        <p:nvSpPr>
+          <p:cNvPr id="11" name="Text 9"/>
+          <p:cNvSpPr/>
+          <p:nvPr/>
+        </p:nvSpPr>
+        <p:spPr>
+          <a:xfrm>
+            <a:off x="6400800" y="1956816"/>
+            <a:ext cx="2103120" cy="475488"/>
+          </a:xfrm>
+          <a:prstGeom prst="rect">
+            <a:avLst/>
+          </a:prstGeom>
+          <a:noFill/>
+          <a:ln/>
+        </p:spPr>
+        <p:txBody>
+          <a:bodyPr wrap="square" lIns="0" tIns="0" rIns="0" bIns="0" rtlCol="0" anchor="ctr"/>
+          <a:lstStyle/>
+          <a:p>
+            <a:pPr indent="0" marL="0">
+              <a:buNone/>
+            </a:pPr>
+            <a:r>
+              <a:rPr lang="en-US" sz="2900" b="1" dirty="0">
+                <a:solidFill>
+                  <a:srgbClr val="D9A441"/>
+                </a:solidFill>
+                <a:latin typeface="Cambria" pitchFamily="34" charset="0"/>
+                <a:ea typeface="Cambria" pitchFamily="34" charset="-122"/>
+                <a:cs typeface="Cambria" pitchFamily="34" charset="-120"/>
+              </a:rPr>
+              <a:t>~45%</a:t>
+            </a:r>
+            <a:endParaRPr lang="en-US" sz="2900" dirty="0"/>
+          </a:p>
+        </p:txBody>
+      </p:sp>
+      <p:sp>
+        <p:nvSpPr>
+          <p:cNvPr id="12" name="Text 10"/>
+          <p:cNvSpPr/>
+          <p:nvPr/>
+        </p:nvSpPr>
+        <p:spPr>
+          <a:xfrm>
+            <a:off x="6400800" y="2450592"/>
+            <a:ext cx="2103120" cy="621792"/>
+          </a:xfrm>
+          <a:prstGeom prst="rect">
+            <a:avLst/>
+          </a:prstGeom>
+          <a:noFill/>
+          <a:ln/>
+        </p:spPr>
+        <p:txBody>
+          <a:bodyPr wrap="square" lIns="0" tIns="0" rIns="0" bIns="0" rtlCol="0" anchor="ctr"/>
+          <a:lstStyle/>
+          <a:p>
+            <a:pPr indent="0" marL="0">
+              <a:lnSpc>
+                <a:spcPts val="1500"/>
+              </a:lnSpc>
+              <a:buNone/>
+            </a:pPr>
+            <a:r>
+              <a:rPr lang="en-US" sz="1150" dirty="0">
+                <a:solidFill>
+                  <a:srgbClr val="C9AEB8"/>
+                </a:solidFill>
+                <a:latin typeface="Calibri" pitchFamily="34" charset="0"/>
+                <a:ea typeface="Calibri" pitchFamily="34" charset="-122"/>
+                <a:cs typeface="Calibri" pitchFamily="34" charset="-120"/>
+              </a:rPr>
+              <a:t>reply rate, against about 6% on email. People actually answer.</a:t>
+            </a:r>
+            <a:endParaRPr lang="en-US" sz="1150" dirty="0"/>
+          </a:p>
+        </p:txBody>
+      </p:sp>
+      <p:sp>
+        <p:nvSpPr>
+          <p:cNvPr id="13" name="Shape 11"/>
+          <p:cNvSpPr/>
+          <p:nvPr/>
+        </p:nvSpPr>
+        <p:spPr>
+          <a:xfrm>
+            <a:off x="8860536" y="1783080"/>
+            <a:ext cx="2532888" cy="1371600"/>
+          </a:xfrm>
+          <a:prstGeom prst="roundRect">
+            <a:avLst>
+              <a:gd name="adj" fmla="val 9333"/>
+            </a:avLst>
           </a:prstGeom>
           <a:solidFill>
             <a:srgbClr val="6D2E46"/>
@@ -11553,69 +12019,175 @@
       </p:sp>
       <p:sp>
         <p:nvSpPr>
-          <p:cNvPr id="6" name="Text 4"/>
-          <p:cNvSpPr/>
-          <p:nvPr/>
-        </p:nvSpPr>
-        <p:spPr>
-          <a:xfrm>
-            <a:off x="713232" y="2606040"/>
-            <a:ext cx="502920" cy="502920"/>
-          </a:xfrm>
-          <a:prstGeom prst="rect">
-            <a:avLst/>
-          </a:prstGeom>
-          <a:noFill/>
-          <a:ln/>
-        </p:spPr>
-        <p:txBody>
-          <a:bodyPr wrap="square" lIns="0" tIns="0" rIns="0" bIns="0" rtlCol="0" anchor="ctr"/>
-          <a:lstStyle/>
-          <a:p>
-            <a:pPr algn="ctr" indent="0" marL="0">
-              <a:buNone/>
-            </a:pPr>
-            <a:r>
-              <a:rPr lang="en-US" sz="1500" b="1" dirty="0">
-                <a:solidFill>
-                  <a:srgbClr val="FFFFFF"/>
-                </a:solidFill>
-                <a:latin typeface="Calibri" pitchFamily="34" charset="0"/>
-                <a:ea typeface="Calibri" pitchFamily="34" charset="-122"/>
-                <a:cs typeface="Calibri" pitchFamily="34" charset="-120"/>
-              </a:rPr>
-              <a:t>1</a:t>
-            </a:r>
-            <a:endParaRPr lang="en-US" sz="1500" dirty="0"/>
-          </a:p>
-        </p:txBody>
-      </p:sp>
-      <p:sp>
-        <p:nvSpPr>
-          <p:cNvPr id="7" name="Text 5"/>
-          <p:cNvSpPr/>
-          <p:nvPr/>
-        </p:nvSpPr>
-        <p:spPr>
-          <a:xfrm>
-            <a:off x="1444752" y="2587752"/>
-            <a:ext cx="4663440" cy="320040"/>
-          </a:xfrm>
-          <a:prstGeom prst="rect">
-            <a:avLst/>
-          </a:prstGeom>
-          <a:noFill/>
-          <a:ln/>
-        </p:spPr>
-        <p:txBody>
-          <a:bodyPr wrap="square" lIns="0" tIns="0" rIns="0" bIns="0" rtlCol="0" anchor="ctr"/>
-          <a:lstStyle/>
-          <a:p>
-            <a:pPr indent="0" marL="0">
-              <a:buNone/>
-            </a:pPr>
-            <a:r>
-              <a:rPr lang="en-US" sz="1700" b="1" dirty="0">
+          <p:cNvPr id="14" name="Text 12"/>
+          <p:cNvSpPr/>
+          <p:nvPr/>
+        </p:nvSpPr>
+        <p:spPr>
+          <a:xfrm>
+            <a:off x="9116568" y="1956816"/>
+            <a:ext cx="2103120" cy="475488"/>
+          </a:xfrm>
+          <a:prstGeom prst="rect">
+            <a:avLst/>
+          </a:prstGeom>
+          <a:noFill/>
+          <a:ln/>
+        </p:spPr>
+        <p:txBody>
+          <a:bodyPr wrap="square" lIns="0" tIns="0" rIns="0" bIns="0" rtlCol="0" anchor="ctr"/>
+          <a:lstStyle/>
+          <a:p>
+            <a:pPr indent="0" marL="0">
+              <a:buNone/>
+            </a:pPr>
+            <a:r>
+              <a:rPr lang="en-US" sz="2900" b="1" dirty="0">
+                <a:solidFill>
+                  <a:srgbClr val="D9A441"/>
+                </a:solidFill>
+                <a:latin typeface="Cambria" pitchFamily="34" charset="0"/>
+                <a:ea typeface="Cambria" pitchFamily="34" charset="-122"/>
+                <a:cs typeface="Cambria" pitchFamily="34" charset="-120"/>
+              </a:rPr>
+              <a:t>Yours</a:t>
+            </a:r>
+            <a:endParaRPr lang="en-US" sz="2900" dirty="0"/>
+          </a:p>
+        </p:txBody>
+      </p:sp>
+      <p:sp>
+        <p:nvSpPr>
+          <p:cNvPr id="15" name="Text 13"/>
+          <p:cNvSpPr/>
+          <p:nvPr/>
+        </p:nvSpPr>
+        <p:spPr>
+          <a:xfrm>
+            <a:off x="9116568" y="2450592"/>
+            <a:ext cx="2103120" cy="621792"/>
+          </a:xfrm>
+          <a:prstGeom prst="rect">
+            <a:avLst/>
+          </a:prstGeom>
+          <a:noFill/>
+          <a:ln/>
+        </p:spPr>
+        <p:txBody>
+          <a:bodyPr wrap="square" lIns="0" tIns="0" rIns="0" bIns="0" rtlCol="0" anchor="ctr"/>
+          <a:lstStyle/>
+          <a:p>
+            <a:pPr indent="0" marL="0">
+              <a:lnSpc>
+                <a:spcPts val="1500"/>
+              </a:lnSpc>
+              <a:buNone/>
+            </a:pPr>
+            <a:r>
+              <a:rPr lang="en-US" sz="1150" dirty="0">
+                <a:solidFill>
+                  <a:srgbClr val="C9AEB8"/>
+                </a:solidFill>
+                <a:latin typeface="Calibri" pitchFamily="34" charset="0"/>
+                <a:ea typeface="Calibri" pitchFamily="34" charset="-122"/>
+                <a:cs typeface="Calibri" pitchFamily="34" charset="-120"/>
+              </a:rPr>
+              <a:t>If Instagram changes tomorrow, this list still exists.</a:t>
+            </a:r>
+            <a:endParaRPr lang="en-US" sz="1150" dirty="0"/>
+          </a:p>
+        </p:txBody>
+      </p:sp>
+      <p:sp>
+        <p:nvSpPr>
+          <p:cNvPr id="16" name="Shape 14"/>
+          <p:cNvSpPr/>
+          <p:nvPr/>
+        </p:nvSpPr>
+        <p:spPr>
+          <a:xfrm>
+            <a:off x="713232" y="3429000"/>
+            <a:ext cx="10735056" cy="713232"/>
+          </a:xfrm>
+          <a:prstGeom prst="roundRect">
+            <a:avLst>
+              <a:gd name="adj" fmla="val 12821"/>
+            </a:avLst>
+          </a:prstGeom>
+          <a:solidFill>
+            <a:srgbClr val="F7F2F4"/>
+          </a:solidFill>
+          <a:ln/>
+        </p:spPr>
+      </p:sp>
+      <p:sp>
+        <p:nvSpPr>
+          <p:cNvPr id="17" name="Text 15"/>
+          <p:cNvSpPr/>
+          <p:nvPr/>
+        </p:nvSpPr>
+        <p:spPr>
+          <a:xfrm>
+            <a:off x="1005840" y="3429000"/>
+            <a:ext cx="2194560" cy="713232"/>
+          </a:xfrm>
+          <a:prstGeom prst="rect">
+            <a:avLst/>
+          </a:prstGeom>
+          <a:noFill/>
+          <a:ln/>
+        </p:spPr>
+        <p:txBody>
+          <a:bodyPr wrap="square" lIns="0" tIns="0" rIns="0" bIns="0" rtlCol="0" anchor="ctr"/>
+          <a:lstStyle/>
+          <a:p>
+            <a:pPr indent="0" marL="0">
+              <a:buNone/>
+            </a:pPr>
+            <a:r>
+              <a:rPr lang="en-US" sz="1300" b="1" dirty="0">
+                <a:solidFill>
+                  <a:srgbClr val="6D2E46"/>
+                </a:solidFill>
+                <a:latin typeface="Calibri" pitchFamily="34" charset="0"/>
+                <a:ea typeface="Calibri" pitchFamily="34" charset="-122"/>
+                <a:cs typeface="Calibri" pitchFamily="34" charset="-120"/>
+              </a:rPr>
+              <a:t>GETTING THEM ON</a:t>
+            </a:r>
+            <a:endParaRPr lang="en-US" sz="1300" dirty="0"/>
+          </a:p>
+        </p:txBody>
+      </p:sp>
+      <p:sp>
+        <p:nvSpPr>
+          <p:cNvPr id="18" name="Text 16"/>
+          <p:cNvSpPr/>
+          <p:nvPr/>
+        </p:nvSpPr>
+        <p:spPr>
+          <a:xfrm>
+            <a:off x="3410712" y="3429000"/>
+            <a:ext cx="7717536" cy="713232"/>
+          </a:xfrm>
+          <a:prstGeom prst="rect">
+            <a:avLst/>
+          </a:prstGeom>
+          <a:noFill/>
+          <a:ln/>
+        </p:spPr>
+        <p:txBody>
+          <a:bodyPr wrap="square" lIns="0" tIns="0" rIns="0" bIns="0" rtlCol="0" anchor="ctr"/>
+          <a:lstStyle/>
+          <a:p>
+            <a:pPr indent="0" marL="0">
+              <a:lnSpc>
+                <a:spcPts val="2000"/>
+              </a:lnSpc>
+              <a:buNone/>
+            </a:pPr>
+            <a:r>
+              <a:rPr lang="en-US" sz="1450" dirty="0">
                 <a:solidFill>
                   <a:srgbClr val="2B1620"/>
                 </a:solidFill>
@@ -11623,22 +12195,83 @@
                 <a:ea typeface="Calibri" pitchFamily="34" charset="-122"/>
                 <a:cs typeface="Calibri" pitchFamily="34" charset="-120"/>
               </a:rPr>
-              <a:t>30 minutes of filming a week</a:t>
-            </a:r>
-            <a:endParaRPr lang="en-US" sz="1700" dirty="0"/>
-          </a:p>
-        </p:txBody>
-      </p:sp>
-      <p:sp>
-        <p:nvSpPr>
-          <p:cNvPr id="8" name="Text 6"/>
-          <p:cNvSpPr/>
-          <p:nvPr/>
-        </p:nvSpPr>
-        <p:spPr>
-          <a:xfrm>
-            <a:off x="1444752" y="2935224"/>
-            <a:ext cx="4663440" cy="640080"/>
+              <a:t>A keyword in the reel — "comment PROMPT" — triggers an automatic reply that asks for her number. We set it up and maintain it.</a:t>
+            </a:r>
+            <a:endParaRPr lang="en-US" sz="1450" dirty="0"/>
+          </a:p>
+        </p:txBody>
+      </p:sp>
+      <p:sp>
+        <p:nvSpPr>
+          <p:cNvPr id="19" name="Shape 17"/>
+          <p:cNvSpPr/>
+          <p:nvPr/>
+        </p:nvSpPr>
+        <p:spPr>
+          <a:xfrm>
+            <a:off x="713232" y="4242816"/>
+            <a:ext cx="10735056" cy="713232"/>
+          </a:xfrm>
+          <a:prstGeom prst="roundRect">
+            <a:avLst>
+              <a:gd name="adj" fmla="val 12821"/>
+            </a:avLst>
+          </a:prstGeom>
+          <a:solidFill>
+            <a:srgbClr val="F7F2F4"/>
+          </a:solidFill>
+          <a:ln/>
+        </p:spPr>
+      </p:sp>
+      <p:sp>
+        <p:nvSpPr>
+          <p:cNvPr id="20" name="Text 18"/>
+          <p:cNvSpPr/>
+          <p:nvPr/>
+        </p:nvSpPr>
+        <p:spPr>
+          <a:xfrm>
+            <a:off x="1005840" y="4242816"/>
+            <a:ext cx="2194560" cy="713232"/>
+          </a:xfrm>
+          <a:prstGeom prst="rect">
+            <a:avLst/>
+          </a:prstGeom>
+          <a:noFill/>
+          <a:ln/>
+        </p:spPr>
+        <p:txBody>
+          <a:bodyPr wrap="square" lIns="0" tIns="0" rIns="0" bIns="0" rtlCol="0" anchor="ctr"/>
+          <a:lstStyle/>
+          <a:p>
+            <a:pPr indent="0" marL="0">
+              <a:buNone/>
+            </a:pPr>
+            <a:r>
+              <a:rPr lang="en-US" sz="1300" b="1" dirty="0">
+                <a:solidFill>
+                  <a:srgbClr val="6D2E46"/>
+                </a:solidFill>
+                <a:latin typeface="Calibri" pitchFamily="34" charset="0"/>
+                <a:ea typeface="Calibri" pitchFamily="34" charset="-122"/>
+                <a:cs typeface="Calibri" pitchFamily="34" charset="-120"/>
+              </a:rPr>
+              <a:t>KEEPING THEM WARM</a:t>
+            </a:r>
+            <a:endParaRPr lang="en-US" sz="1300" dirty="0"/>
+          </a:p>
+        </p:txBody>
+      </p:sp>
+      <p:sp>
+        <p:nvSpPr>
+          <p:cNvPr id="21" name="Text 19"/>
+          <p:cNvSpPr/>
+          <p:nvPr/>
+        </p:nvSpPr>
+        <p:spPr>
+          <a:xfrm>
+            <a:off x="3410712" y="4242816"/>
+            <a:ext cx="7717536" cy="713232"/>
           </a:xfrm>
           <a:prstGeom prst="rect">
             <a:avLst/>
@@ -11652,38 +12285,40 @@
           <a:p>
             <a:pPr indent="0" marL="0">
               <a:lnSpc>
-                <a:spcPts val="1900"/>
+                <a:spcPts val="2000"/>
               </a:lnSpc>
               <a:buNone/>
             </a:pPr>
             <a:r>
-              <a:rPr lang="en-US" sz="1350" dirty="0">
-                <a:solidFill>
-                  <a:srgbClr val="7A6068"/>
-                </a:solidFill>
-                <a:latin typeface="Calibri" pitchFamily="34" charset="0"/>
-                <a:ea typeface="Calibri" pitchFamily="34" charset="-122"/>
-                <a:cs typeface="Calibri" pitchFamily="34" charset="-120"/>
-              </a:rPr>
-              <a:t>On your own phone, at home. We send the shot list and the setup.</a:t>
-            </a:r>
-            <a:endParaRPr lang="en-US" sz="1350" dirty="0"/>
-          </a:p>
-        </p:txBody>
-      </p:sp>
-      <p:sp>
-        <p:nvSpPr>
-          <p:cNvPr id="9" name="Shape 7"/>
-          <p:cNvSpPr/>
-          <p:nvPr/>
-        </p:nvSpPr>
-        <p:spPr>
-          <a:xfrm>
-            <a:off x="6336792" y="2606040"/>
-            <a:ext cx="502920" cy="502920"/>
-          </a:xfrm>
-          <a:prstGeom prst="ellipse">
-            <a:avLst/>
+              <a:rPr lang="en-US" sz="1450" dirty="0">
+                <a:solidFill>
+                  <a:srgbClr val="2B1620"/>
+                </a:solidFill>
+                <a:latin typeface="Calibri" pitchFamily="34" charset="0"/>
+                <a:ea typeface="Calibri" pitchFamily="34" charset="-122"/>
+                <a:cs typeface="Calibri" pitchFamily="34" charset="-120"/>
+              </a:rPr>
+              <a:t>One genuinely useful message a week. Written by us, in your voice, approved by you. No selling.</a:t>
+            </a:r>
+            <a:endParaRPr lang="en-US" sz="1450" dirty="0"/>
+          </a:p>
+        </p:txBody>
+      </p:sp>
+      <p:sp>
+        <p:nvSpPr>
+          <p:cNvPr id="22" name="Shape 20"/>
+          <p:cNvSpPr/>
+          <p:nvPr/>
+        </p:nvSpPr>
+        <p:spPr>
+          <a:xfrm>
+            <a:off x="713232" y="5056632"/>
+            <a:ext cx="10735056" cy="713232"/>
+          </a:xfrm>
+          <a:prstGeom prst="roundRect">
+            <a:avLst>
+              <a:gd name="adj" fmla="val 12821"/>
+            </a:avLst>
           </a:prstGeom>
           <a:solidFill>
             <a:srgbClr val="6D2E46"/>
@@ -11693,30 +12328,72 @@
       </p:sp>
       <p:sp>
         <p:nvSpPr>
-          <p:cNvPr id="10" name="Text 8"/>
-          <p:cNvSpPr/>
-          <p:nvPr/>
-        </p:nvSpPr>
-        <p:spPr>
-          <a:xfrm>
-            <a:off x="6336792" y="2606040"/>
-            <a:ext cx="502920" cy="502920"/>
-          </a:xfrm>
-          <a:prstGeom prst="rect">
-            <a:avLst/>
-          </a:prstGeom>
-          <a:noFill/>
-          <a:ln/>
-        </p:spPr>
-        <p:txBody>
-          <a:bodyPr wrap="square" lIns="0" tIns="0" rIns="0" bIns="0" rtlCol="0" anchor="ctr"/>
-          <a:lstStyle/>
-          <a:p>
-            <a:pPr algn="ctr" indent="0" marL="0">
-              <a:buNone/>
-            </a:pPr>
-            <a:r>
-              <a:rPr lang="en-US" sz="1500" b="1" dirty="0">
+          <p:cNvPr id="23" name="Text 21"/>
+          <p:cNvSpPr/>
+          <p:nvPr/>
+        </p:nvSpPr>
+        <p:spPr>
+          <a:xfrm>
+            <a:off x="1005840" y="5056632"/>
+            <a:ext cx="2194560" cy="713232"/>
+          </a:xfrm>
+          <a:prstGeom prst="rect">
+            <a:avLst/>
+          </a:prstGeom>
+          <a:noFill/>
+          <a:ln/>
+        </p:spPr>
+        <p:txBody>
+          <a:bodyPr wrap="square" lIns="0" tIns="0" rIns="0" bIns="0" rtlCol="0" anchor="ctr"/>
+          <a:lstStyle/>
+          <a:p>
+            <a:pPr indent="0" marL="0">
+              <a:buNone/>
+            </a:pPr>
+            <a:r>
+              <a:rPr lang="en-US" sz="1300" b="1" dirty="0">
+                <a:solidFill>
+                  <a:srgbClr val="D9A441"/>
+                </a:solidFill>
+                <a:latin typeface="Calibri" pitchFamily="34" charset="0"/>
+                <a:ea typeface="Calibri" pitchFamily="34" charset="-122"/>
+                <a:cs typeface="Calibri" pitchFamily="34" charset="-120"/>
+              </a:rPr>
+              <a:t>WHEN YOU LAUNCH</a:t>
+            </a:r>
+            <a:endParaRPr lang="en-US" sz="1300" dirty="0"/>
+          </a:p>
+        </p:txBody>
+      </p:sp>
+      <p:sp>
+        <p:nvSpPr>
+          <p:cNvPr id="24" name="Text 22"/>
+          <p:cNvSpPr/>
+          <p:nvPr/>
+        </p:nvSpPr>
+        <p:spPr>
+          <a:xfrm>
+            <a:off x="3410712" y="5056632"/>
+            <a:ext cx="7717536" cy="713232"/>
+          </a:xfrm>
+          <a:prstGeom prst="rect">
+            <a:avLst/>
+          </a:prstGeom>
+          <a:noFill/>
+          <a:ln/>
+        </p:spPr>
+        <p:txBody>
+          <a:bodyPr wrap="square" lIns="0" tIns="0" rIns="0" bIns="0" rtlCol="0" anchor="ctr"/>
+          <a:lstStyle/>
+          <a:p>
+            <a:pPr indent="0" marL="0">
+              <a:lnSpc>
+                <a:spcPts val="2000"/>
+              </a:lnSpc>
+              <a:buNone/>
+            </a:pPr>
+            <a:r>
+              <a:rPr lang="en-US" sz="1450" dirty="0">
                 <a:solidFill>
                   <a:srgbClr val="FFFFFF"/>
                 </a:solidFill>
@@ -11724,80 +12401,38 @@
                 <a:ea typeface="Calibri" pitchFamily="34" charset="-122"/>
                 <a:cs typeface="Calibri" pitchFamily="34" charset="-120"/>
               </a:rPr>
-              <a:t>2</a:t>
-            </a:r>
-            <a:endParaRPr lang="en-US" sz="1500" dirty="0"/>
-          </a:p>
-        </p:txBody>
-      </p:sp>
-      <p:sp>
-        <p:nvSpPr>
-          <p:cNvPr id="11" name="Text 9"/>
-          <p:cNvSpPr/>
-          <p:nvPr/>
-        </p:nvSpPr>
-        <p:spPr>
-          <a:xfrm>
-            <a:off x="7068312" y="2587752"/>
-            <a:ext cx="4663440" cy="320040"/>
-          </a:xfrm>
-          <a:prstGeom prst="rect">
-            <a:avLst/>
-          </a:prstGeom>
-          <a:noFill/>
-          <a:ln/>
-        </p:spPr>
-        <p:txBody>
-          <a:bodyPr wrap="square" lIns="0" tIns="0" rIns="0" bIns="0" rtlCol="0" anchor="ctr"/>
-          <a:lstStyle/>
-          <a:p>
-            <a:pPr indent="0" marL="0">
-              <a:buNone/>
-            </a:pPr>
-            <a:r>
-              <a:rPr lang="en-US" sz="1700" b="1" dirty="0">
-                <a:solidFill>
-                  <a:srgbClr val="2B1620"/>
-                </a:solidFill>
-                <a:latin typeface="Calibri" pitchFamily="34" charset="0"/>
-                <a:ea typeface="Calibri" pitchFamily="34" charset="-122"/>
-                <a:cs typeface="Calibri" pitchFamily="34" charset="-120"/>
-              </a:rPr>
-              <a:t>20 minutes a day in your DMs</a:t>
-            </a:r>
-            <a:endParaRPr lang="en-US" sz="1700" dirty="0"/>
-          </a:p>
-        </p:txBody>
-      </p:sp>
-      <p:sp>
-        <p:nvSpPr>
-          <p:cNvPr id="12" name="Text 10"/>
-          <p:cNvSpPr/>
-          <p:nvPr/>
-        </p:nvSpPr>
-        <p:spPr>
-          <a:xfrm>
-            <a:off x="7068312" y="2935224"/>
-            <a:ext cx="4663440" cy="640080"/>
-          </a:xfrm>
-          <a:prstGeom prst="rect">
-            <a:avLst/>
-          </a:prstGeom>
-          <a:noFill/>
-          <a:ln/>
-        </p:spPr>
-        <p:txBody>
-          <a:bodyPr wrap="square" lIns="0" tIns="0" rIns="0" bIns="0" rtlCol="0" anchor="ctr"/>
-          <a:lstStyle/>
-          <a:p>
-            <a:pPr indent="0" marL="0">
-              <a:lnSpc>
-                <a:spcPts val="1900"/>
-              </a:lnSpc>
-              <a:buNone/>
-            </a:pPr>
-            <a:r>
-              <a:rPr lang="en-US" sz="1350" dirty="0">
+              <a:t>A short sequence over five or six days before a workshop or intake opens. This is where the sales actually happen.</a:t>
+            </a:r>
+            <a:endParaRPr lang="en-US" sz="1450" dirty="0"/>
+          </a:p>
+        </p:txBody>
+      </p:sp>
+      <p:sp>
+        <p:nvSpPr>
+          <p:cNvPr id="25" name="Text 23"/>
+          <p:cNvSpPr/>
+          <p:nvPr/>
+        </p:nvSpPr>
+        <p:spPr>
+          <a:xfrm>
+            <a:off x="713232" y="6309360"/>
+            <a:ext cx="10735056" cy="320040"/>
+          </a:xfrm>
+          <a:prstGeom prst="rect">
+            <a:avLst/>
+          </a:prstGeom>
+          <a:noFill/>
+          <a:ln/>
+        </p:spPr>
+        <p:txBody>
+          <a:bodyPr wrap="square" lIns="0" tIns="0" rIns="0" bIns="0" rtlCol="0" anchor="ctr"/>
+          <a:lstStyle/>
+          <a:p>
+            <a:pPr indent="0" marL="0">
+              <a:buNone/>
+            </a:pPr>
+            <a:r>
+              <a:rPr lang="en-US" sz="1050" i="1" dirty="0">
                 <a:solidFill>
                   <a:srgbClr val="7A6068"/>
                 </a:solidFill>
@@ -11805,353 +12440,9 @@
                 <a:ea typeface="Calibri" pitchFamily="34" charset="-122"/>
                 <a:cs typeface="Calibri" pitchFamily="34" charset="-120"/>
               </a:rPr>
-              <a:t>This one can't be outsourced — people are buying you. We'll draft the rest.</a:t>
-            </a:r>
-            <a:endParaRPr lang="en-US" sz="1350" dirty="0"/>
-          </a:p>
-        </p:txBody>
-      </p:sp>
-      <p:sp>
-        <p:nvSpPr>
-          <p:cNvPr id="13" name="Shape 11"/>
-          <p:cNvSpPr/>
-          <p:nvPr/>
-        </p:nvSpPr>
-        <p:spPr>
-          <a:xfrm>
-            <a:off x="713232" y="3840480"/>
-            <a:ext cx="502920" cy="502920"/>
-          </a:xfrm>
-          <a:prstGeom prst="ellipse">
-            <a:avLst/>
-          </a:prstGeom>
-          <a:solidFill>
-            <a:srgbClr val="6D2E46"/>
-          </a:solidFill>
-          <a:ln/>
-        </p:spPr>
-      </p:sp>
-      <p:sp>
-        <p:nvSpPr>
-          <p:cNvPr id="14" name="Text 12"/>
-          <p:cNvSpPr/>
-          <p:nvPr/>
-        </p:nvSpPr>
-        <p:spPr>
-          <a:xfrm>
-            <a:off x="713232" y="3840480"/>
-            <a:ext cx="502920" cy="502920"/>
-          </a:xfrm>
-          <a:prstGeom prst="rect">
-            <a:avLst/>
-          </a:prstGeom>
-          <a:noFill/>
-          <a:ln/>
-        </p:spPr>
-        <p:txBody>
-          <a:bodyPr wrap="square" lIns="0" tIns="0" rIns="0" bIns="0" rtlCol="0" anchor="ctr"/>
-          <a:lstStyle/>
-          <a:p>
-            <a:pPr algn="ctr" indent="0" marL="0">
-              <a:buNone/>
-            </a:pPr>
-            <a:r>
-              <a:rPr lang="en-US" sz="1500" b="1" dirty="0">
-                <a:solidFill>
-                  <a:srgbClr val="FFFFFF"/>
-                </a:solidFill>
-                <a:latin typeface="Calibri" pitchFamily="34" charset="0"/>
-                <a:ea typeface="Calibri" pitchFamily="34" charset="-122"/>
-                <a:cs typeface="Calibri" pitchFamily="34" charset="-120"/>
-              </a:rPr>
-              <a:t>3</a:t>
-            </a:r>
-            <a:endParaRPr lang="en-US" sz="1500" dirty="0"/>
-          </a:p>
-        </p:txBody>
-      </p:sp>
-      <p:sp>
-        <p:nvSpPr>
-          <p:cNvPr id="15" name="Text 13"/>
-          <p:cNvSpPr/>
-          <p:nvPr/>
-        </p:nvSpPr>
-        <p:spPr>
-          <a:xfrm>
-            <a:off x="1444752" y="3822192"/>
-            <a:ext cx="4663440" cy="320040"/>
-          </a:xfrm>
-          <a:prstGeom prst="rect">
-            <a:avLst/>
-          </a:prstGeom>
-          <a:noFill/>
-          <a:ln/>
-        </p:spPr>
-        <p:txBody>
-          <a:bodyPr wrap="square" lIns="0" tIns="0" rIns="0" bIns="0" rtlCol="0" anchor="ctr"/>
-          <a:lstStyle/>
-          <a:p>
-            <a:pPr indent="0" marL="0">
-              <a:buNone/>
-            </a:pPr>
-            <a:r>
-              <a:rPr lang="en-US" sz="1700" b="1" dirty="0">
-                <a:solidFill>
-                  <a:srgbClr val="2B1620"/>
-                </a:solidFill>
-                <a:latin typeface="Calibri" pitchFamily="34" charset="0"/>
-                <a:ea typeface="Calibri" pitchFamily="34" charset="-122"/>
-                <a:cs typeface="Calibri" pitchFamily="34" charset="-120"/>
-              </a:rPr>
-              <a:t>Willingness to speak on camera</a:t>
-            </a:r>
-            <a:endParaRPr lang="en-US" sz="1700" dirty="0"/>
-          </a:p>
-        </p:txBody>
-      </p:sp>
-      <p:sp>
-        <p:nvSpPr>
-          <p:cNvPr id="16" name="Text 14"/>
-          <p:cNvSpPr/>
-          <p:nvPr/>
-        </p:nvSpPr>
-        <p:spPr>
-          <a:xfrm>
-            <a:off x="1444752" y="4169664"/>
-            <a:ext cx="4663440" cy="640080"/>
-          </a:xfrm>
-          <a:prstGeom prst="rect">
-            <a:avLst/>
-          </a:prstGeom>
-          <a:noFill/>
-          <a:ln/>
-        </p:spPr>
-        <p:txBody>
-          <a:bodyPr wrap="square" lIns="0" tIns="0" rIns="0" bIns="0" rtlCol="0" anchor="ctr"/>
-          <a:lstStyle/>
-          <a:p>
-            <a:pPr indent="0" marL="0">
-              <a:lnSpc>
-                <a:spcPts val="1900"/>
-              </a:lnSpc>
-              <a:buNone/>
-            </a:pPr>
-            <a:r>
-              <a:rPr lang="en-US" sz="1350" dirty="0">
-                <a:solidFill>
-                  <a:srgbClr val="7A6068"/>
-                </a:solidFill>
-                <a:latin typeface="Calibri" pitchFamily="34" charset="0"/>
-                <a:ea typeface="Calibri" pitchFamily="34" charset="-122"/>
-                <a:cs typeface="Calibri" pitchFamily="34" charset="-120"/>
-              </a:rPr>
-              <a:t>In Hinglish, the way you'd talk to a friend. We'll coach you through month one.</a:t>
-            </a:r>
-            <a:endParaRPr lang="en-US" sz="1350" dirty="0"/>
-          </a:p>
-        </p:txBody>
-      </p:sp>
-      <p:sp>
-        <p:nvSpPr>
-          <p:cNvPr id="17" name="Shape 15"/>
-          <p:cNvSpPr/>
-          <p:nvPr/>
-        </p:nvSpPr>
-        <p:spPr>
-          <a:xfrm>
-            <a:off x="6336792" y="3840480"/>
-            <a:ext cx="502920" cy="502920"/>
-          </a:xfrm>
-          <a:prstGeom prst="ellipse">
-            <a:avLst/>
-          </a:prstGeom>
-          <a:solidFill>
-            <a:srgbClr val="6D2E46"/>
-          </a:solidFill>
-          <a:ln/>
-        </p:spPr>
-      </p:sp>
-      <p:sp>
-        <p:nvSpPr>
-          <p:cNvPr id="18" name="Text 16"/>
-          <p:cNvSpPr/>
-          <p:nvPr/>
-        </p:nvSpPr>
-        <p:spPr>
-          <a:xfrm>
-            <a:off x="6336792" y="3840480"/>
-            <a:ext cx="502920" cy="502920"/>
-          </a:xfrm>
-          <a:prstGeom prst="rect">
-            <a:avLst/>
-          </a:prstGeom>
-          <a:noFill/>
-          <a:ln/>
-        </p:spPr>
-        <p:txBody>
-          <a:bodyPr wrap="square" lIns="0" tIns="0" rIns="0" bIns="0" rtlCol="0" anchor="ctr"/>
-          <a:lstStyle/>
-          <a:p>
-            <a:pPr algn="ctr" indent="0" marL="0">
-              <a:buNone/>
-            </a:pPr>
-            <a:r>
-              <a:rPr lang="en-US" sz="1500" b="1" dirty="0">
-                <a:solidFill>
-                  <a:srgbClr val="FFFFFF"/>
-                </a:solidFill>
-                <a:latin typeface="Calibri" pitchFamily="34" charset="0"/>
-                <a:ea typeface="Calibri" pitchFamily="34" charset="-122"/>
-                <a:cs typeface="Calibri" pitchFamily="34" charset="-120"/>
-              </a:rPr>
-              <a:t>4</a:t>
-            </a:r>
-            <a:endParaRPr lang="en-US" sz="1500" dirty="0"/>
-          </a:p>
-        </p:txBody>
-      </p:sp>
-      <p:sp>
-        <p:nvSpPr>
-          <p:cNvPr id="19" name="Text 17"/>
-          <p:cNvSpPr/>
-          <p:nvPr/>
-        </p:nvSpPr>
-        <p:spPr>
-          <a:xfrm>
-            <a:off x="7068312" y="3822192"/>
-            <a:ext cx="4663440" cy="320040"/>
-          </a:xfrm>
-          <a:prstGeom prst="rect">
-            <a:avLst/>
-          </a:prstGeom>
-          <a:noFill/>
-          <a:ln/>
-        </p:spPr>
-        <p:txBody>
-          <a:bodyPr wrap="square" lIns="0" tIns="0" rIns="0" bIns="0" rtlCol="0" anchor="ctr"/>
-          <a:lstStyle/>
-          <a:p>
-            <a:pPr indent="0" marL="0">
-              <a:buNone/>
-            </a:pPr>
-            <a:r>
-              <a:rPr lang="en-US" sz="1700" b="1" dirty="0">
-                <a:solidFill>
-                  <a:srgbClr val="2B1620"/>
-                </a:solidFill>
-                <a:latin typeface="Calibri" pitchFamily="34" charset="0"/>
-                <a:ea typeface="Calibri" pitchFamily="34" charset="-122"/>
-                <a:cs typeface="Calibri" pitchFamily="34" charset="-120"/>
-              </a:rPr>
-              <a:t>Permission to be mid-journey</a:t>
-            </a:r>
-            <a:endParaRPr lang="en-US" sz="1700" dirty="0"/>
-          </a:p>
-        </p:txBody>
-      </p:sp>
-      <p:sp>
-        <p:nvSpPr>
-          <p:cNvPr id="20" name="Text 18"/>
-          <p:cNvSpPr/>
-          <p:nvPr/>
-        </p:nvSpPr>
-        <p:spPr>
-          <a:xfrm>
-            <a:off x="7068312" y="4169664"/>
-            <a:ext cx="4663440" cy="640080"/>
-          </a:xfrm>
-          <a:prstGeom prst="rect">
-            <a:avLst/>
-          </a:prstGeom>
-          <a:noFill/>
-          <a:ln/>
-        </p:spPr>
-        <p:txBody>
-          <a:bodyPr wrap="square" lIns="0" tIns="0" rIns="0" bIns="0" rtlCol="0" anchor="ctr"/>
-          <a:lstStyle/>
-          <a:p>
-            <a:pPr indent="0" marL="0">
-              <a:lnSpc>
-                <a:spcPts val="1900"/>
-              </a:lnSpc>
-              <a:buNone/>
-            </a:pPr>
-            <a:r>
-              <a:rPr lang="en-US" sz="1350" dirty="0">
-                <a:solidFill>
-                  <a:srgbClr val="7A6068"/>
-                </a:solidFill>
-                <a:latin typeface="Calibri" pitchFamily="34" charset="0"/>
-                <a:ea typeface="Calibri" pitchFamily="34" charset="-122"/>
-                <a:cs typeface="Calibri" pitchFamily="34" charset="-120"/>
-              </a:rPr>
-              <a:t>You don't have to have arrived. Katie's power comes from still being on the way.</a:t>
-            </a:r>
-            <a:endParaRPr lang="en-US" sz="1350" dirty="0"/>
-          </a:p>
-        </p:txBody>
-      </p:sp>
-      <p:sp>
-        <p:nvSpPr>
-          <p:cNvPr id="21" name="Shape 19"/>
-          <p:cNvSpPr/>
-          <p:nvPr/>
-        </p:nvSpPr>
-        <p:spPr>
-          <a:xfrm>
-            <a:off x="713232" y="5257800"/>
-            <a:ext cx="10735056" cy="1005840"/>
-          </a:xfrm>
-          <a:prstGeom prst="roundRect">
-            <a:avLst>
-              <a:gd name="adj" fmla="val 12727"/>
-            </a:avLst>
-          </a:prstGeom>
-          <a:solidFill>
-            <a:srgbClr val="6D2E46"/>
-          </a:solidFill>
-          <a:ln/>
-        </p:spPr>
-      </p:sp>
-      <p:sp>
-        <p:nvSpPr>
-          <p:cNvPr id="22" name="Text 20"/>
-          <p:cNvSpPr/>
-          <p:nvPr/>
-        </p:nvSpPr>
-        <p:spPr>
-          <a:xfrm>
-            <a:off x="1170432" y="5257800"/>
-            <a:ext cx="9820656" cy="1005840"/>
-          </a:xfrm>
-          <a:prstGeom prst="rect">
-            <a:avLst/>
-          </a:prstGeom>
-          <a:noFill/>
-          <a:ln/>
-        </p:spPr>
-        <p:txBody>
-          <a:bodyPr wrap="square" lIns="0" tIns="0" rIns="0" bIns="0" rtlCol="0" anchor="ctr"/>
-          <a:lstStyle/>
-          <a:p>
-            <a:pPr indent="0" marL="0">
-              <a:lnSpc>
-                <a:spcPts val="2500"/>
-              </a:lnSpc>
-              <a:buNone/>
-            </a:pPr>
-            <a:r>
-              <a:rPr lang="en-US" sz="1800" dirty="0">
-                <a:solidFill>
-                  <a:srgbClr val="FFFFFF"/>
-                </a:solidFill>
-                <a:latin typeface="Calibri" pitchFamily="34" charset="0"/>
-                <a:ea typeface="Calibri" pitchFamily="34" charset="-122"/>
-                <a:cs typeface="Calibri" pitchFamily="34" charset="-120"/>
-              </a:rPr>
-              <a:t>Everything else — shooting, editing, captions, covers, posting, YouTube, the list, the numbers — is mine to carry.</a:t>
-            </a:r>
-            <a:endParaRPr lang="en-US" sz="1800" dirty="0"/>
+              <a:t>WhatsApp benchmarks: India marketing reporting, 2026. Figures are for opted-in lists, not bought contacts — we would never buy contacts.</a:t>
+            </a:r>
+            <a:endParaRPr lang="en-US" sz="1050" dirty="0"/>
           </a:p>
         </p:txBody>
       </p:sp>
@@ -12166,6 +12457,2805 @@
 <file path=ppt/slides/slide21.xml><?xml version="1.0" encoding="utf-8"?>
 <p:sld xmlns:a="http://schemas.openxmlformats.org/drawingml/2006/main" xmlns:r="http://schemas.openxmlformats.org/officeDocument/2006/relationships" xmlns:p="http://schemas.openxmlformats.org/presentationml/2006/main">
   <p:cSld name="Slide 21">
+    <p:bg>
+      <p:bgPr>
+        <a:solidFill>
+          <a:srgbClr val="FFFFFF"/>
+        </a:solidFill>
+      </p:bgPr>
+    </p:bg>
+    <p:spTree>
+      <p:nvGrpSpPr>
+        <p:cNvPr id="1" name=""/>
+        <p:cNvGrpSpPr/>
+        <p:nvPr/>
+      </p:nvGrpSpPr>
+      <p:grpSpPr>
+        <a:xfrm>
+          <a:off x="0" y="0"/>
+          <a:ext cx="0" cy="0"/>
+          <a:chOff x="0" y="0"/>
+          <a:chExt cx="0" cy="0"/>
+        </a:xfrm>
+      </p:grpSpPr>
+      <p:sp>
+        <p:nvSpPr>
+          <p:cNvPr id="2" name="Text 0"/>
+          <p:cNvSpPr/>
+          <p:nvPr/>
+        </p:nvSpPr>
+        <p:spPr>
+          <a:xfrm>
+            <a:off x="713232" y="420624"/>
+            <a:ext cx="10735056" cy="274320"/>
+          </a:xfrm>
+          <a:prstGeom prst="rect">
+            <a:avLst/>
+          </a:prstGeom>
+          <a:noFill/>
+          <a:ln/>
+        </p:spPr>
+        <p:txBody>
+          <a:bodyPr wrap="square" lIns="0" tIns="0" rIns="0" bIns="0" rtlCol="0" anchor="ctr"/>
+          <a:lstStyle/>
+          <a:p>
+            <a:pPr indent="0" marL="0">
+              <a:buNone/>
+            </a:pPr>
+            <a:r>
+              <a:rPr lang="en-US" sz="1200" b="1" spc="220" kern="0" dirty="0">
+                <a:solidFill>
+                  <a:srgbClr val="A26769"/>
+                </a:solidFill>
+                <a:latin typeface="Calibri" pitchFamily="34" charset="0"/>
+                <a:ea typeface="Calibri" pitchFamily="34" charset="-122"/>
+                <a:cs typeface="Calibri" pitchFamily="34" charset="-120"/>
+              </a:rPr>
+              <a:t>TWO WAYS WE CAN WORK</a:t>
+            </a:r>
+            <a:endParaRPr lang="en-US" sz="1200" dirty="0"/>
+          </a:p>
+        </p:txBody>
+      </p:sp>
+      <p:sp>
+        <p:nvSpPr>
+          <p:cNvPr id="3" name="Text 1"/>
+          <p:cNvSpPr/>
+          <p:nvPr/>
+        </p:nvSpPr>
+        <p:spPr>
+          <a:xfrm>
+            <a:off x="713232" y="768096"/>
+            <a:ext cx="10735056" cy="960120"/>
+          </a:xfrm>
+          <a:prstGeom prst="rect">
+            <a:avLst/>
+          </a:prstGeom>
+          <a:noFill/>
+          <a:ln/>
+        </p:spPr>
+        <p:txBody>
+          <a:bodyPr wrap="square" lIns="0" tIns="0" rIns="0" bIns="0" rtlCol="0" anchor="ctr"/>
+          <a:lstStyle/>
+          <a:p>
+            <a:pPr indent="0" marL="0">
+              <a:lnSpc>
+                <a:spcPts val="4500"/>
+              </a:lnSpc>
+              <a:buNone/>
+            </a:pPr>
+            <a:r>
+              <a:rPr lang="en-US" sz="3900" b="1" dirty="0">
+                <a:solidFill>
+                  <a:srgbClr val="2B1620"/>
+                </a:solidFill>
+                <a:latin typeface="Cambria" pitchFamily="34" charset="0"/>
+                <a:ea typeface="Cambria" pitchFamily="34" charset="-122"/>
+                <a:cs typeface="Cambria" pitchFamily="34" charset="-120"/>
+              </a:rPr>
+              <a:t>Both are real. They do different jobs.</a:t>
+            </a:r>
+            <a:endParaRPr lang="en-US" sz="3900" dirty="0"/>
+          </a:p>
+        </p:txBody>
+      </p:sp>
+      <p:sp>
+        <p:nvSpPr>
+          <p:cNvPr id="4" name="Shape 2"/>
+          <p:cNvSpPr/>
+          <p:nvPr/>
+        </p:nvSpPr>
+        <p:spPr>
+          <a:xfrm>
+            <a:off x="713232" y="1783080"/>
+            <a:ext cx="5257800" cy="3566160"/>
+          </a:xfrm>
+          <a:prstGeom prst="roundRect">
+            <a:avLst>
+              <a:gd name="adj" fmla="val 3590"/>
+            </a:avLst>
+          </a:prstGeom>
+          <a:solidFill>
+            <a:srgbClr val="F7F2F4"/>
+          </a:solidFill>
+          <a:ln/>
+        </p:spPr>
+      </p:sp>
+      <p:sp>
+        <p:nvSpPr>
+          <p:cNvPr id="5" name="Text 3"/>
+          <p:cNvSpPr/>
+          <p:nvPr/>
+        </p:nvSpPr>
+        <p:spPr>
+          <a:xfrm>
+            <a:off x="1060704" y="1993392"/>
+            <a:ext cx="4572000" cy="256032"/>
+          </a:xfrm>
+          <a:prstGeom prst="rect">
+            <a:avLst/>
+          </a:prstGeom>
+          <a:noFill/>
+          <a:ln/>
+        </p:spPr>
+        <p:txBody>
+          <a:bodyPr wrap="square" lIns="0" tIns="0" rIns="0" bIns="0" rtlCol="0" anchor="ctr"/>
+          <a:lstStyle/>
+          <a:p>
+            <a:pPr indent="0" marL="0">
+              <a:buNone/>
+            </a:pPr>
+            <a:r>
+              <a:rPr lang="en-US" sz="1250" b="1" spc="160" kern="0" dirty="0">
+                <a:solidFill>
+                  <a:srgbClr val="7A6068"/>
+                </a:solidFill>
+                <a:latin typeface="Calibri" pitchFamily="34" charset="0"/>
+                <a:ea typeface="Calibri" pitchFamily="34" charset="-122"/>
+                <a:cs typeface="Calibri" pitchFamily="34" charset="-120"/>
+              </a:rPr>
+              <a:t>OPTION 1</a:t>
+            </a:r>
+            <a:endParaRPr lang="en-US" sz="1250" dirty="0"/>
+          </a:p>
+        </p:txBody>
+      </p:sp>
+      <p:sp>
+        <p:nvSpPr>
+          <p:cNvPr id="6" name="Text 4"/>
+          <p:cNvSpPr/>
+          <p:nvPr/>
+        </p:nvSpPr>
+        <p:spPr>
+          <a:xfrm>
+            <a:off x="1060704" y="2286000"/>
+            <a:ext cx="4572000" cy="411480"/>
+          </a:xfrm>
+          <a:prstGeom prst="rect">
+            <a:avLst/>
+          </a:prstGeom>
+          <a:noFill/>
+          <a:ln/>
+        </p:spPr>
+        <p:txBody>
+          <a:bodyPr wrap="square" lIns="0" tIns="0" rIns="0" bIns="0" rtlCol="0" anchor="ctr"/>
+          <a:lstStyle/>
+          <a:p>
+            <a:pPr indent="0" marL="0">
+              <a:buNone/>
+            </a:pPr>
+            <a:r>
+              <a:rPr lang="en-US" sz="2600" b="1" dirty="0">
+                <a:solidFill>
+                  <a:srgbClr val="2B1620"/>
+                </a:solidFill>
+                <a:latin typeface="Cambria" pitchFamily="34" charset="0"/>
+                <a:ea typeface="Cambria" pitchFamily="34" charset="-122"/>
+                <a:cs typeface="Cambria" pitchFamily="34" charset="-120"/>
+              </a:rPr>
+              <a:t>Production only</a:t>
+            </a:r>
+            <a:endParaRPr lang="en-US" sz="2600" dirty="0"/>
+          </a:p>
+        </p:txBody>
+      </p:sp>
+      <p:sp>
+        <p:nvSpPr>
+          <p:cNvPr id="7" name="Text 5"/>
+          <p:cNvSpPr/>
+          <p:nvPr/>
+        </p:nvSpPr>
+        <p:spPr>
+          <a:xfrm>
+            <a:off x="1060704" y="2743200"/>
+            <a:ext cx="4572000" cy="274320"/>
+          </a:xfrm>
+          <a:prstGeom prst="rect">
+            <a:avLst/>
+          </a:prstGeom>
+          <a:noFill/>
+          <a:ln/>
+        </p:spPr>
+        <p:txBody>
+          <a:bodyPr wrap="square" lIns="0" tIns="0" rIns="0" bIns="0" rtlCol="0" anchor="ctr"/>
+          <a:lstStyle/>
+          <a:p>
+            <a:pPr indent="0" marL="0">
+              <a:buNone/>
+            </a:pPr>
+            <a:r>
+              <a:rPr lang="en-US" sz="1400" dirty="0">
+                <a:solidFill>
+                  <a:srgbClr val="7A6068"/>
+                </a:solidFill>
+                <a:latin typeface="Calibri" pitchFamily="34" charset="0"/>
+                <a:ea typeface="Calibri" pitchFamily="34" charset="-122"/>
+                <a:cs typeface="Calibri" pitchFamily="34" charset="-120"/>
+              </a:rPr>
+              <a:t>You direct. We shoot and edit.</a:t>
+            </a:r>
+            <a:endParaRPr lang="en-US" sz="1400" dirty="0"/>
+          </a:p>
+        </p:txBody>
+      </p:sp>
+      <p:sp>
+        <p:nvSpPr>
+          <p:cNvPr id="8" name="Text 6"/>
+          <p:cNvSpPr/>
+          <p:nvPr/>
+        </p:nvSpPr>
+        <p:spPr>
+          <a:xfrm>
+            <a:off x="1060704" y="3108960"/>
+            <a:ext cx="4572000" cy="1188720"/>
+          </a:xfrm>
+          <a:prstGeom prst="rect">
+            <a:avLst/>
+          </a:prstGeom>
+          <a:noFill/>
+          <a:ln/>
+        </p:spPr>
+        <p:txBody>
+          <a:bodyPr wrap="square" lIns="0" tIns="0" rIns="0" bIns="0" rtlCol="0" anchor="ctr"/>
+          <a:lstStyle/>
+          <a:p>
+            <a:pPr marL="342900" indent="-342900">
+              <a:lnSpc>
+                <a:spcPts val="2000"/>
+              </a:lnSpc>
+              <a:spcAft>
+                <a:spcPts val="800"/>
+              </a:spcAft>
+              <a:buSzPct val="100000"/>
+              <a:buChar char="•"/>
+            </a:pPr>
+            <a:r>
+              <a:rPr lang="en-US" sz="1400" dirty="0">
+                <a:solidFill>
+                  <a:srgbClr val="2B1620"/>
+                </a:solidFill>
+                <a:latin typeface="Calibri" pitchFamily="34" charset="0"/>
+                <a:ea typeface="Calibri" pitchFamily="34" charset="-122"/>
+                <a:cs typeface="Calibri" pitchFamily="34" charset="-120"/>
+              </a:rPr>
+              <a:t>Shooting days and editing</a:t>
+            </a:r>
+            <a:endParaRPr lang="en-US" sz="1400" dirty="0"/>
+          </a:p>
+          <a:p>
+            <a:pPr marL="342900" indent="-342900">
+              <a:lnSpc>
+                <a:spcPts val="2000"/>
+              </a:lnSpc>
+              <a:spcAft>
+                <a:spcPts val="800"/>
+              </a:spcAft>
+              <a:buSzPct val="100000"/>
+              <a:buChar char="•"/>
+            </a:pPr>
+            <a:r>
+              <a:rPr lang="en-US" sz="1400" dirty="0">
+                <a:solidFill>
+                  <a:srgbClr val="2B1620"/>
+                </a:solidFill>
+                <a:latin typeface="Calibri" pitchFamily="34" charset="0"/>
+                <a:ea typeface="Calibri" pitchFamily="34" charset="-122"/>
+                <a:cs typeface="Calibri" pitchFamily="34" charset="-120"/>
+              </a:rPr>
+              <a:t>Covers, captions, subtitles</a:t>
+            </a:r>
+            <a:endParaRPr lang="en-US" sz="1400" dirty="0"/>
+          </a:p>
+          <a:p>
+            <a:pPr marL="342900" indent="-342900">
+              <a:lnSpc>
+                <a:spcPts val="2000"/>
+              </a:lnSpc>
+              <a:spcAft>
+                <a:spcPts val="800"/>
+              </a:spcAft>
+              <a:buSzPct val="100000"/>
+              <a:buChar char="•"/>
+            </a:pPr>
+            <a:r>
+              <a:rPr lang="en-US" sz="1400" dirty="0">
+                <a:solidFill>
+                  <a:srgbClr val="2B1620"/>
+                </a:solidFill>
+                <a:latin typeface="Calibri" pitchFamily="34" charset="0"/>
+                <a:ea typeface="Calibri" pitchFamily="34" charset="-122"/>
+                <a:cs typeface="Calibri" pitchFamily="34" charset="-120"/>
+              </a:rPr>
+              <a:t>You decide what to post and when</a:t>
+            </a:r>
+            <a:endParaRPr lang="en-US" sz="1400" dirty="0"/>
+          </a:p>
+          <a:p>
+            <a:pPr marL="342900" indent="-342900">
+              <a:lnSpc>
+                <a:spcPts val="2000"/>
+              </a:lnSpc>
+              <a:spcAft>
+                <a:spcPts val="800"/>
+              </a:spcAft>
+              <a:buSzPct val="100000"/>
+              <a:buChar char="•"/>
+            </a:pPr>
+            <a:r>
+              <a:rPr lang="en-US" sz="1400" dirty="0">
+                <a:solidFill>
+                  <a:srgbClr val="2B1620"/>
+                </a:solidFill>
+                <a:latin typeface="Calibri" pitchFamily="34" charset="0"/>
+                <a:ea typeface="Calibri" pitchFamily="34" charset="-122"/>
+                <a:cs typeface="Calibri" pitchFamily="34" charset="-120"/>
+              </a:rPr>
+              <a:t>Strategy, DMs and growth stay with you</a:t>
+            </a:r>
+            <a:endParaRPr lang="en-US" sz="1400" dirty="0"/>
+          </a:p>
+        </p:txBody>
+      </p:sp>
+      <p:sp>
+        <p:nvSpPr>
+          <p:cNvPr id="9" name="Text 7"/>
+          <p:cNvSpPr/>
+          <p:nvPr/>
+        </p:nvSpPr>
+        <p:spPr>
+          <a:xfrm>
+            <a:off x="1060704" y="4343400"/>
+            <a:ext cx="4572000" cy="868680"/>
+          </a:xfrm>
+          <a:prstGeom prst="rect">
+            <a:avLst/>
+          </a:prstGeom>
+          <a:noFill/>
+          <a:ln/>
+        </p:spPr>
+        <p:txBody>
+          <a:bodyPr wrap="square" lIns="0" tIns="0" rIns="0" bIns="0" rtlCol="0" anchor="ctr"/>
+          <a:lstStyle/>
+          <a:p>
+            <a:pPr indent="0" marL="0">
+              <a:lnSpc>
+                <a:spcPts val="1900"/>
+              </a:lnSpc>
+              <a:buNone/>
+            </a:pPr>
+            <a:r>
+              <a:rPr lang="en-US" sz="1300" b="1" dirty="0">
+                <a:solidFill>
+                  <a:srgbClr val="6D2E46"/>
+                </a:solidFill>
+                <a:latin typeface="Calibri" pitchFamily="34" charset="0"/>
+                <a:ea typeface="Calibri" pitchFamily="34" charset="-122"/>
+                <a:cs typeface="Calibri" pitchFamily="34" charset="-120"/>
+              </a:rPr>
+              <a:t>Straight answer: </a:t>
+            </a:r>
+            <a:pPr indent="0" marL="0">
+              <a:lnSpc>
+                <a:spcPts val="1900"/>
+              </a:lnSpc>
+              <a:buNone/>
+            </a:pPr>
+            <a:r>
+              <a:rPr lang="en-US" sz="1300" dirty="0">
+                <a:solidFill>
+                  <a:srgbClr val="6D2E46"/>
+                </a:solidFill>
+                <a:latin typeface="Calibri" pitchFamily="34" charset="0"/>
+                <a:ea typeface="Calibri" pitchFamily="34" charset="-122"/>
+                <a:cs typeface="Calibri" pitchFamily="34" charset="-120"/>
+              </a:rPr>
+              <a:t>this works well if you already know exactly what neXtHer is. It makes your content look better. It won't fix the five-identities problem — that isn't a filming problem.</a:t>
+            </a:r>
+            <a:endParaRPr lang="en-US" sz="1300" dirty="0"/>
+          </a:p>
+        </p:txBody>
+      </p:sp>
+      <p:sp>
+        <p:nvSpPr>
+          <p:cNvPr id="10" name="Shape 8"/>
+          <p:cNvSpPr/>
+          <p:nvPr/>
+        </p:nvSpPr>
+        <p:spPr>
+          <a:xfrm>
+            <a:off x="6446520" y="1783080"/>
+            <a:ext cx="5184648" cy="3566160"/>
+          </a:xfrm>
+          <a:prstGeom prst="roundRect">
+            <a:avLst>
+              <a:gd name="adj" fmla="val 3590"/>
+            </a:avLst>
+          </a:prstGeom>
+          <a:solidFill>
+            <a:srgbClr val="6D2E46"/>
+          </a:solidFill>
+          <a:ln/>
+        </p:spPr>
+      </p:sp>
+      <p:sp>
+        <p:nvSpPr>
+          <p:cNvPr id="11" name="Text 9"/>
+          <p:cNvSpPr/>
+          <p:nvPr/>
+        </p:nvSpPr>
+        <p:spPr>
+          <a:xfrm>
+            <a:off x="6793992" y="1993392"/>
+            <a:ext cx="4572000" cy="256032"/>
+          </a:xfrm>
+          <a:prstGeom prst="rect">
+            <a:avLst/>
+          </a:prstGeom>
+          <a:noFill/>
+          <a:ln/>
+        </p:spPr>
+        <p:txBody>
+          <a:bodyPr wrap="square" lIns="0" tIns="0" rIns="0" bIns="0" rtlCol="0" anchor="ctr"/>
+          <a:lstStyle/>
+          <a:p>
+            <a:pPr indent="0" marL="0">
+              <a:buNone/>
+            </a:pPr>
+            <a:r>
+              <a:rPr lang="en-US" sz="1250" b="1" spc="160" kern="0" dirty="0">
+                <a:solidFill>
+                  <a:srgbClr val="D9A441"/>
+                </a:solidFill>
+                <a:latin typeface="Calibri" pitchFamily="34" charset="0"/>
+                <a:ea typeface="Calibri" pitchFamily="34" charset="-122"/>
+                <a:cs typeface="Calibri" pitchFamily="34" charset="-120"/>
+              </a:rPr>
+              <a:t>OPTION 2 — WHAT I'D RECOMMEND</a:t>
+            </a:r>
+            <a:endParaRPr lang="en-US" sz="1250" dirty="0"/>
+          </a:p>
+        </p:txBody>
+      </p:sp>
+      <p:sp>
+        <p:nvSpPr>
+          <p:cNvPr id="12" name="Text 10"/>
+          <p:cNvSpPr/>
+          <p:nvPr/>
+        </p:nvSpPr>
+        <p:spPr>
+          <a:xfrm>
+            <a:off x="6793992" y="2286000"/>
+            <a:ext cx="4572000" cy="411480"/>
+          </a:xfrm>
+          <a:prstGeom prst="rect">
+            <a:avLst/>
+          </a:prstGeom>
+          <a:noFill/>
+          <a:ln/>
+        </p:spPr>
+        <p:txBody>
+          <a:bodyPr wrap="square" lIns="0" tIns="0" rIns="0" bIns="0" rtlCol="0" anchor="ctr"/>
+          <a:lstStyle/>
+          <a:p>
+            <a:pPr indent="0" marL="0">
+              <a:buNone/>
+            </a:pPr>
+            <a:r>
+              <a:rPr lang="en-US" sz="2600" b="1" dirty="0">
+                <a:solidFill>
+                  <a:srgbClr val="FFFFFF"/>
+                </a:solidFill>
+                <a:latin typeface="Cambria" pitchFamily="34" charset="0"/>
+                <a:ea typeface="Cambria" pitchFamily="34" charset="-122"/>
+                <a:cs typeface="Cambria" pitchFamily="34" charset="-120"/>
+              </a:rPr>
+              <a:t>Production + the system</a:t>
+            </a:r>
+            <a:endParaRPr lang="en-US" sz="2600" dirty="0"/>
+          </a:p>
+        </p:txBody>
+      </p:sp>
+      <p:sp>
+        <p:nvSpPr>
+          <p:cNvPr id="13" name="Text 11"/>
+          <p:cNvSpPr/>
+          <p:nvPr/>
+        </p:nvSpPr>
+        <p:spPr>
+          <a:xfrm>
+            <a:off x="6793992" y="2743200"/>
+            <a:ext cx="4572000" cy="274320"/>
+          </a:xfrm>
+          <a:prstGeom prst="rect">
+            <a:avLst/>
+          </a:prstGeom>
+          <a:noFill/>
+          <a:ln/>
+        </p:spPr>
+        <p:txBody>
+          <a:bodyPr wrap="square" lIns="0" tIns="0" rIns="0" bIns="0" rtlCol="0" anchor="ctr"/>
+          <a:lstStyle/>
+          <a:p>
+            <a:pPr indent="0" marL="0">
+              <a:buNone/>
+            </a:pPr>
+            <a:r>
+              <a:rPr lang="en-US" sz="1400" dirty="0">
+                <a:solidFill>
+                  <a:srgbClr val="C9AEB8"/>
+                </a:solidFill>
+                <a:latin typeface="Calibri" pitchFamily="34" charset="0"/>
+                <a:ea typeface="Calibri" pitchFamily="34" charset="-122"/>
+                <a:cs typeface="Calibri" pitchFamily="34" charset="-120"/>
+              </a:rPr>
+              <a:t>We build the brand with you, then run it every week.</a:t>
+            </a:r>
+            <a:endParaRPr lang="en-US" sz="1400" dirty="0"/>
+          </a:p>
+        </p:txBody>
+      </p:sp>
+      <p:sp>
+        <p:nvSpPr>
+          <p:cNvPr id="14" name="Text 12"/>
+          <p:cNvSpPr/>
+          <p:nvPr/>
+        </p:nvSpPr>
+        <p:spPr>
+          <a:xfrm>
+            <a:off x="6793992" y="3108960"/>
+            <a:ext cx="4526280" cy="1737360"/>
+          </a:xfrm>
+          <a:prstGeom prst="rect">
+            <a:avLst/>
+          </a:prstGeom>
+          <a:noFill/>
+          <a:ln/>
+        </p:spPr>
+        <p:txBody>
+          <a:bodyPr wrap="square" lIns="0" tIns="0" rIns="0" bIns="0" rtlCol="0" anchor="ctr"/>
+          <a:lstStyle/>
+          <a:p>
+            <a:pPr marL="342900" indent="-342900">
+              <a:lnSpc>
+                <a:spcPts val="2000"/>
+              </a:lnSpc>
+              <a:spcAft>
+                <a:spcPts val="800"/>
+              </a:spcAft>
+              <a:buSzPct val="100000"/>
+              <a:buChar char="•"/>
+            </a:pPr>
+            <a:r>
+              <a:rPr lang="en-US" sz="1400" dirty="0">
+                <a:solidFill>
+                  <a:srgbClr val="FFFFFF"/>
+                </a:solidFill>
+                <a:latin typeface="Calibri" pitchFamily="34" charset="0"/>
+                <a:ea typeface="Calibri" pitchFamily="34" charset="-122"/>
+                <a:cs typeface="Calibri" pitchFamily="34" charset="-120"/>
+              </a:rPr>
+              <a:t>Everything in Option 1</a:t>
+            </a:r>
+            <a:endParaRPr lang="en-US" sz="1400" dirty="0"/>
+          </a:p>
+          <a:p>
+            <a:pPr marL="342900" indent="-342900">
+              <a:lnSpc>
+                <a:spcPts val="2000"/>
+              </a:lnSpc>
+              <a:spcAft>
+                <a:spcPts val="800"/>
+              </a:spcAft>
+              <a:buSzPct val="100000"/>
+              <a:buChar char="•"/>
+            </a:pPr>
+            <a:r>
+              <a:rPr lang="en-US" sz="1400" dirty="0">
+                <a:solidFill>
+                  <a:srgbClr val="FFFFFF"/>
+                </a:solidFill>
+                <a:latin typeface="Calibri" pitchFamily="34" charset="0"/>
+                <a:ea typeface="Calibri" pitchFamily="34" charset="-122"/>
+                <a:cs typeface="Calibri" pitchFamily="34" charset="-120"/>
+              </a:rPr>
+              <a:t>The positioning decision and your named method</a:t>
+            </a:r>
+            <a:endParaRPr lang="en-US" sz="1400" dirty="0"/>
+          </a:p>
+          <a:p>
+            <a:pPr marL="342900" indent="-342900">
+              <a:lnSpc>
+                <a:spcPts val="2000"/>
+              </a:lnSpc>
+              <a:spcAft>
+                <a:spcPts val="800"/>
+              </a:spcAft>
+              <a:buSzPct val="100000"/>
+              <a:buChar char="•"/>
+            </a:pPr>
+            <a:r>
+              <a:rPr lang="en-US" sz="1400" dirty="0">
+                <a:solidFill>
+                  <a:srgbClr val="FFFFFF"/>
+                </a:solidFill>
+                <a:latin typeface="Calibri" pitchFamily="34" charset="0"/>
+                <a:ea typeface="Calibri" pitchFamily="34" charset="-122"/>
+                <a:cs typeface="Calibri" pitchFamily="34" charset="-120"/>
+              </a:rPr>
+              <a:t>Profile rebuilt — bio, pinned posts, highlights</a:t>
+            </a:r>
+            <a:endParaRPr lang="en-US" sz="1400" dirty="0"/>
+          </a:p>
+          <a:p>
+            <a:pPr marL="342900" indent="-342900">
+              <a:lnSpc>
+                <a:spcPts val="2000"/>
+              </a:lnSpc>
+              <a:spcAft>
+                <a:spcPts val="800"/>
+              </a:spcAft>
+              <a:buSzPct val="100000"/>
+              <a:buChar char="•"/>
+            </a:pPr>
+            <a:r>
+              <a:rPr lang="en-US" sz="1400" dirty="0">
+                <a:solidFill>
+                  <a:srgbClr val="FFFFFF"/>
+                </a:solidFill>
+                <a:latin typeface="Calibri" pitchFamily="34" charset="0"/>
+                <a:ea typeface="Calibri" pitchFamily="34" charset="-122"/>
+                <a:cs typeface="Calibri" pitchFamily="34" charset="-120"/>
+              </a:rPr>
+              <a:t>Five posts a week, published for you</a:t>
+            </a:r>
+            <a:endParaRPr lang="en-US" sz="1400" dirty="0"/>
+          </a:p>
+          <a:p>
+            <a:pPr marL="342900" indent="-342900">
+              <a:lnSpc>
+                <a:spcPts val="2000"/>
+              </a:lnSpc>
+              <a:spcAft>
+                <a:spcPts val="800"/>
+              </a:spcAft>
+              <a:buSzPct val="100000"/>
+              <a:buChar char="•"/>
+            </a:pPr>
+            <a:r>
+              <a:rPr lang="en-US" sz="1400" dirty="0">
+                <a:solidFill>
+                  <a:srgbClr val="FFFFFF"/>
+                </a:solidFill>
+                <a:latin typeface="Calibri" pitchFamily="34" charset="0"/>
+                <a:ea typeface="Calibri" pitchFamily="34" charset="-122"/>
+                <a:cs typeface="Calibri" pitchFamily="34" charset="-120"/>
+              </a:rPr>
+              <a:t>YouTube and WhatsApp from the same shoot</a:t>
+            </a:r>
+            <a:endParaRPr lang="en-US" sz="1400" dirty="0"/>
+          </a:p>
+          <a:p>
+            <a:pPr marL="342900" indent="-342900">
+              <a:lnSpc>
+                <a:spcPts val="2000"/>
+              </a:lnSpc>
+              <a:spcAft>
+                <a:spcPts val="800"/>
+              </a:spcAft>
+              <a:buSzPct val="100000"/>
+              <a:buChar char="•"/>
+            </a:pPr>
+            <a:r>
+              <a:rPr lang="en-US" sz="1400" dirty="0">
+                <a:solidFill>
+                  <a:srgbClr val="FFFFFF"/>
+                </a:solidFill>
+                <a:latin typeface="Calibri" pitchFamily="34" charset="0"/>
+                <a:ea typeface="Calibri" pitchFamily="34" charset="-122"/>
+                <a:cs typeface="Calibri" pitchFamily="34" charset="-120"/>
+              </a:rPr>
+              <a:t>Weekly numbers, so you always know what's working</a:t>
+            </a:r>
+            <a:endParaRPr lang="en-US" sz="1400" dirty="0"/>
+          </a:p>
+        </p:txBody>
+      </p:sp>
+      <p:sp>
+        <p:nvSpPr>
+          <p:cNvPr id="15" name="Text 13"/>
+          <p:cNvSpPr/>
+          <p:nvPr/>
+        </p:nvSpPr>
+        <p:spPr>
+          <a:xfrm>
+            <a:off x="6793992" y="4846320"/>
+            <a:ext cx="4526280" cy="457200"/>
+          </a:xfrm>
+          <a:prstGeom prst="rect">
+            <a:avLst/>
+          </a:prstGeom>
+          <a:noFill/>
+          <a:ln/>
+        </p:spPr>
+        <p:txBody>
+          <a:bodyPr wrap="square" lIns="0" tIns="0" rIns="0" bIns="0" rtlCol="0" anchor="ctr"/>
+          <a:lstStyle/>
+          <a:p>
+            <a:pPr indent="0" marL="0">
+              <a:lnSpc>
+                <a:spcPts val="1900"/>
+              </a:lnSpc>
+              <a:buNone/>
+            </a:pPr>
+            <a:r>
+              <a:rPr lang="en-US" sz="1300" b="1" dirty="0">
+                <a:solidFill>
+                  <a:srgbClr val="D9A441"/>
+                </a:solidFill>
+                <a:latin typeface="Calibri" pitchFamily="34" charset="0"/>
+                <a:ea typeface="Calibri" pitchFamily="34" charset="-122"/>
+                <a:cs typeface="Calibri" pitchFamily="34" charset="-120"/>
+              </a:rPr>
+              <a:t>This is the one that changes the outcome</a:t>
+            </a:r>
+            <a:pPr indent="0" marL="0">
+              <a:lnSpc>
+                <a:spcPts val="1900"/>
+              </a:lnSpc>
+              <a:buNone/>
+            </a:pPr>
+            <a:r>
+              <a:rPr lang="en-US" sz="1300" dirty="0">
+                <a:solidFill>
+                  <a:srgbClr val="D9A441"/>
+                </a:solidFill>
+                <a:latin typeface="Calibri" pitchFamily="34" charset="0"/>
+                <a:ea typeface="Calibri" pitchFamily="34" charset="-122"/>
+                <a:cs typeface="Calibri" pitchFamily="34" charset="-120"/>
+              </a:rPr>
+              <a:t>, because it fixes what's actually holding the account back.</a:t>
+            </a:r>
+            <a:endParaRPr lang="en-US" sz="1300" dirty="0"/>
+          </a:p>
+        </p:txBody>
+      </p:sp>
+      <p:sp>
+        <p:nvSpPr>
+          <p:cNvPr id="16" name="Text 14"/>
+          <p:cNvSpPr/>
+          <p:nvPr/>
+        </p:nvSpPr>
+        <p:spPr>
+          <a:xfrm>
+            <a:off x="713232" y="5577840"/>
+            <a:ext cx="10735056" cy="640080"/>
+          </a:xfrm>
+          <a:prstGeom prst="rect">
+            <a:avLst/>
+          </a:prstGeom>
+          <a:noFill/>
+          <a:ln/>
+        </p:spPr>
+        <p:txBody>
+          <a:bodyPr wrap="square" lIns="0" tIns="0" rIns="0" bIns="0" rtlCol="0" anchor="ctr"/>
+          <a:lstStyle/>
+          <a:p>
+            <a:pPr indent="0" marL="0">
+              <a:lnSpc>
+                <a:spcPts val="2400"/>
+              </a:lnSpc>
+              <a:buNone/>
+            </a:pPr>
+            <a:r>
+              <a:rPr lang="en-US" sz="1700" i="1" dirty="0">
+                <a:solidFill>
+                  <a:srgbClr val="D9A441"/>
+                </a:solidFill>
+                <a:latin typeface="Cambria" pitchFamily="34" charset="0"/>
+                <a:ea typeface="Cambria" pitchFamily="34" charset="-122"/>
+                <a:cs typeface="Cambria" pitchFamily="34" charset="-120"/>
+              </a:rPr>
+              <a:t>If Option 1 is what you want, say so and we'll do it properly. I'd just rather you chose it knowing what it does and doesn't solve.</a:t>
+            </a:r>
+            <a:endParaRPr lang="en-US" sz="1700" dirty="0"/>
+          </a:p>
+        </p:txBody>
+      </p:sp>
+    </p:spTree>
+  </p:cSld>
+  <p:clrMapOvr>
+    <a:masterClrMapping/>
+  </p:clrMapOvr>
+</p:sld>
+</file>
+
+<file path=ppt/slides/slide22.xml><?xml version="1.0" encoding="utf-8"?>
+<p:sld xmlns:a="http://schemas.openxmlformats.org/drawingml/2006/main" xmlns:r="http://schemas.openxmlformats.org/officeDocument/2006/relationships" xmlns:p="http://schemas.openxmlformats.org/presentationml/2006/main">
+  <p:cSld name="Slide 22">
+    <p:bg>
+      <p:bgPr>
+        <a:solidFill>
+          <a:srgbClr val="FFFFFF"/>
+        </a:solidFill>
+      </p:bgPr>
+    </p:bg>
+    <p:spTree>
+      <p:nvGrpSpPr>
+        <p:cNvPr id="1" name=""/>
+        <p:cNvGrpSpPr/>
+        <p:nvPr/>
+      </p:nvGrpSpPr>
+      <p:grpSpPr>
+        <a:xfrm>
+          <a:off x="0" y="0"/>
+          <a:ext cx="0" cy="0"/>
+          <a:chOff x="0" y="0"/>
+          <a:chExt cx="0" cy="0"/>
+        </a:xfrm>
+      </p:grpSpPr>
+      <p:sp>
+        <p:nvSpPr>
+          <p:cNvPr id="2" name="Text 0"/>
+          <p:cNvSpPr/>
+          <p:nvPr/>
+        </p:nvSpPr>
+        <p:spPr>
+          <a:xfrm>
+            <a:off x="713232" y="420624"/>
+            <a:ext cx="10735056" cy="274320"/>
+          </a:xfrm>
+          <a:prstGeom prst="rect">
+            <a:avLst/>
+          </a:prstGeom>
+          <a:noFill/>
+          <a:ln/>
+        </p:spPr>
+        <p:txBody>
+          <a:bodyPr wrap="square" lIns="0" tIns="0" rIns="0" bIns="0" rtlCol="0" anchor="ctr"/>
+          <a:lstStyle/>
+          <a:p>
+            <a:pPr indent="0" marL="0">
+              <a:buNone/>
+            </a:pPr>
+            <a:r>
+              <a:rPr lang="en-US" sz="1200" b="1" spc="220" kern="0" dirty="0">
+                <a:solidFill>
+                  <a:srgbClr val="A26769"/>
+                </a:solidFill>
+                <a:latin typeface="Calibri" pitchFamily="34" charset="0"/>
+                <a:ea typeface="Calibri" pitchFamily="34" charset="-122"/>
+                <a:cs typeface="Calibri" pitchFamily="34" charset="-120"/>
+              </a:rPr>
+              <a:t>WHAT CHANGES</a:t>
+            </a:r>
+            <a:endParaRPr lang="en-US" sz="1200" dirty="0"/>
+          </a:p>
+        </p:txBody>
+      </p:sp>
+      <p:sp>
+        <p:nvSpPr>
+          <p:cNvPr id="3" name="Text 1"/>
+          <p:cNvSpPr/>
+          <p:nvPr/>
+        </p:nvSpPr>
+        <p:spPr>
+          <a:xfrm>
+            <a:off x="713232" y="768096"/>
+            <a:ext cx="10735056" cy="960120"/>
+          </a:xfrm>
+          <a:prstGeom prst="rect">
+            <a:avLst/>
+          </a:prstGeom>
+          <a:noFill/>
+          <a:ln/>
+        </p:spPr>
+        <p:txBody>
+          <a:bodyPr wrap="square" lIns="0" tIns="0" rIns="0" bIns="0" rtlCol="0" anchor="ctr"/>
+          <a:lstStyle/>
+          <a:p>
+            <a:pPr indent="0" marL="0">
+              <a:lnSpc>
+                <a:spcPts val="4500"/>
+              </a:lnSpc>
+              <a:buNone/>
+            </a:pPr>
+            <a:r>
+              <a:rPr lang="en-US" sz="3900" b="1" dirty="0">
+                <a:solidFill>
+                  <a:srgbClr val="2B1620"/>
+                </a:solidFill>
+                <a:latin typeface="Cambria" pitchFamily="34" charset="0"/>
+                <a:ea typeface="Cambria" pitchFamily="34" charset="-122"/>
+                <a:cs typeface="Cambria" pitchFamily="34" charset="-120"/>
+              </a:rPr>
+              <a:t>The first 90 days, honestly</a:t>
+            </a:r>
+            <a:endParaRPr lang="en-US" sz="3900" dirty="0"/>
+          </a:p>
+        </p:txBody>
+      </p:sp>
+      <p:sp>
+        <p:nvSpPr>
+          <p:cNvPr id="4" name="Shape 2"/>
+          <p:cNvSpPr/>
+          <p:nvPr/>
+        </p:nvSpPr>
+        <p:spPr>
+          <a:xfrm>
+            <a:off x="713232" y="1783080"/>
+            <a:ext cx="3493008" cy="1874520"/>
+          </a:xfrm>
+          <a:prstGeom prst="roundRect">
+            <a:avLst>
+              <a:gd name="adj" fmla="val 6829"/>
+            </a:avLst>
+          </a:prstGeom>
+          <a:solidFill>
+            <a:srgbClr val="F7F2F4"/>
+          </a:solidFill>
+          <a:ln/>
+        </p:spPr>
+      </p:sp>
+      <p:sp>
+        <p:nvSpPr>
+          <p:cNvPr id="5" name="Text 3"/>
+          <p:cNvSpPr/>
+          <p:nvPr/>
+        </p:nvSpPr>
+        <p:spPr>
+          <a:xfrm>
+            <a:off x="987552" y="1965960"/>
+            <a:ext cx="2926080" cy="256032"/>
+          </a:xfrm>
+          <a:prstGeom prst="rect">
+            <a:avLst/>
+          </a:prstGeom>
+          <a:noFill/>
+          <a:ln/>
+        </p:spPr>
+        <p:txBody>
+          <a:bodyPr wrap="square" lIns="0" tIns="0" rIns="0" bIns="0" rtlCol="0" anchor="ctr"/>
+          <a:lstStyle/>
+          <a:p>
+            <a:pPr indent="0" marL="0">
+              <a:buNone/>
+            </a:pPr>
+            <a:r>
+              <a:rPr lang="en-US" sz="1200" b="1" spc="160" kern="0" dirty="0">
+                <a:solidFill>
+                  <a:srgbClr val="6D2E46"/>
+                </a:solidFill>
+                <a:latin typeface="Calibri" pitchFamily="34" charset="0"/>
+                <a:ea typeface="Calibri" pitchFamily="34" charset="-122"/>
+                <a:cs typeface="Calibri" pitchFamily="34" charset="-120"/>
+              </a:rPr>
+              <a:t>WEEKS 1–2</a:t>
+            </a:r>
+            <a:endParaRPr lang="en-US" sz="1200" dirty="0"/>
+          </a:p>
+        </p:txBody>
+      </p:sp>
+      <p:sp>
+        <p:nvSpPr>
+          <p:cNvPr id="6" name="Text 4"/>
+          <p:cNvSpPr/>
+          <p:nvPr/>
+        </p:nvSpPr>
+        <p:spPr>
+          <a:xfrm>
+            <a:off x="987552" y="2258568"/>
+            <a:ext cx="2926080" cy="347472"/>
+          </a:xfrm>
+          <a:prstGeom prst="rect">
+            <a:avLst/>
+          </a:prstGeom>
+          <a:noFill/>
+          <a:ln/>
+        </p:spPr>
+        <p:txBody>
+          <a:bodyPr wrap="square" lIns="0" tIns="0" rIns="0" bIns="0" rtlCol="0" anchor="ctr"/>
+          <a:lstStyle/>
+          <a:p>
+            <a:pPr indent="0" marL="0">
+              <a:buNone/>
+            </a:pPr>
+            <a:r>
+              <a:rPr lang="en-US" sz="2000" b="1" dirty="0">
+                <a:solidFill>
+                  <a:srgbClr val="2B1620"/>
+                </a:solidFill>
+                <a:latin typeface="Cambria" pitchFamily="34" charset="0"/>
+                <a:ea typeface="Cambria" pitchFamily="34" charset="-122"/>
+                <a:cs typeface="Cambria" pitchFamily="34" charset="-120"/>
+              </a:rPr>
+              <a:t>Decide and rebuild</a:t>
+            </a:r>
+            <a:endParaRPr lang="en-US" sz="2000" dirty="0"/>
+          </a:p>
+        </p:txBody>
+      </p:sp>
+      <p:sp>
+        <p:nvSpPr>
+          <p:cNvPr id="7" name="Text 5"/>
+          <p:cNvSpPr/>
+          <p:nvPr/>
+        </p:nvSpPr>
+        <p:spPr>
+          <a:xfrm>
+            <a:off x="987552" y="2688336"/>
+            <a:ext cx="2926080" cy="868680"/>
+          </a:xfrm>
+          <a:prstGeom prst="rect">
+            <a:avLst/>
+          </a:prstGeom>
+          <a:noFill/>
+          <a:ln/>
+        </p:spPr>
+        <p:txBody>
+          <a:bodyPr wrap="square" lIns="0" tIns="0" rIns="0" bIns="0" rtlCol="0" anchor="ctr"/>
+          <a:lstStyle/>
+          <a:p>
+            <a:pPr marL="342900" indent="-342900">
+              <a:lnSpc>
+                <a:spcPts val="1700"/>
+              </a:lnSpc>
+              <a:spcAft>
+                <a:spcPts val="400"/>
+              </a:spcAft>
+              <a:buSzPct val="100000"/>
+              <a:buChar char="•"/>
+            </a:pPr>
+            <a:r>
+              <a:rPr lang="en-US" sz="1250" dirty="0">
+                <a:solidFill>
+                  <a:srgbClr val="2B1620"/>
+                </a:solidFill>
+                <a:latin typeface="Calibri" pitchFamily="34" charset="0"/>
+                <a:ea typeface="Calibri" pitchFamily="34" charset="-122"/>
+                <a:cs typeface="Calibri" pitchFamily="34" charset="-120"/>
+              </a:rPr>
+              <a:t>One audience, one promise</a:t>
+            </a:r>
+            <a:endParaRPr lang="en-US" sz="1250" dirty="0"/>
+          </a:p>
+          <a:p>
+            <a:pPr marL="342900" indent="-342900">
+              <a:lnSpc>
+                <a:spcPts val="1700"/>
+              </a:lnSpc>
+              <a:spcAft>
+                <a:spcPts val="400"/>
+              </a:spcAft>
+              <a:buSzPct val="100000"/>
+              <a:buChar char="•"/>
+            </a:pPr>
+            <a:r>
+              <a:rPr lang="en-US" sz="1250" dirty="0">
+                <a:solidFill>
+                  <a:srgbClr val="2B1620"/>
+                </a:solidFill>
+                <a:latin typeface="Calibri" pitchFamily="34" charset="0"/>
+                <a:ea typeface="Calibri" pitchFamily="34" charset="-122"/>
+                <a:cs typeface="Calibri" pitchFamily="34" charset="-120"/>
+              </a:rPr>
+              <a:t>Your named method</a:t>
+            </a:r>
+            <a:endParaRPr lang="en-US" sz="1250" dirty="0"/>
+          </a:p>
+          <a:p>
+            <a:pPr marL="342900" indent="-342900">
+              <a:lnSpc>
+                <a:spcPts val="1700"/>
+              </a:lnSpc>
+              <a:spcAft>
+                <a:spcPts val="400"/>
+              </a:spcAft>
+              <a:buSzPct val="100000"/>
+              <a:buChar char="•"/>
+            </a:pPr>
+            <a:r>
+              <a:rPr lang="en-US" sz="1250" dirty="0">
+                <a:solidFill>
+                  <a:srgbClr val="2B1620"/>
+                </a:solidFill>
+                <a:latin typeface="Calibri" pitchFamily="34" charset="0"/>
+                <a:ea typeface="Calibri" pitchFamily="34" charset="-122"/>
+                <a:cs typeface="Calibri" pitchFamily="34" charset="-120"/>
+              </a:rPr>
+              <a:t>Bio, pinned posts, highlights</a:t>
+            </a:r>
+            <a:endParaRPr lang="en-US" sz="1250" dirty="0"/>
+          </a:p>
+        </p:txBody>
+      </p:sp>
+      <p:sp>
+        <p:nvSpPr>
+          <p:cNvPr id="8" name="Shape 6"/>
+          <p:cNvSpPr/>
+          <p:nvPr/>
+        </p:nvSpPr>
+        <p:spPr>
+          <a:xfrm>
+            <a:off x="4389120" y="1783080"/>
+            <a:ext cx="3493008" cy="1874520"/>
+          </a:xfrm>
+          <a:prstGeom prst="roundRect">
+            <a:avLst>
+              <a:gd name="adj" fmla="val 6829"/>
+            </a:avLst>
+          </a:prstGeom>
+          <a:solidFill>
+            <a:srgbClr val="F7F2F4"/>
+          </a:solidFill>
+          <a:ln/>
+        </p:spPr>
+      </p:sp>
+      <p:sp>
+        <p:nvSpPr>
+          <p:cNvPr id="9" name="Text 7"/>
+          <p:cNvSpPr/>
+          <p:nvPr/>
+        </p:nvSpPr>
+        <p:spPr>
+          <a:xfrm>
+            <a:off x="4663440" y="1965960"/>
+            <a:ext cx="2926080" cy="256032"/>
+          </a:xfrm>
+          <a:prstGeom prst="rect">
+            <a:avLst/>
+          </a:prstGeom>
+          <a:noFill/>
+          <a:ln/>
+        </p:spPr>
+        <p:txBody>
+          <a:bodyPr wrap="square" lIns="0" tIns="0" rIns="0" bIns="0" rtlCol="0" anchor="ctr"/>
+          <a:lstStyle/>
+          <a:p>
+            <a:pPr indent="0" marL="0">
+              <a:buNone/>
+            </a:pPr>
+            <a:r>
+              <a:rPr lang="en-US" sz="1200" b="1" spc="160" kern="0" dirty="0">
+                <a:solidFill>
+                  <a:srgbClr val="6D2E46"/>
+                </a:solidFill>
+                <a:latin typeface="Calibri" pitchFamily="34" charset="0"/>
+                <a:ea typeface="Calibri" pitchFamily="34" charset="-122"/>
+                <a:cs typeface="Calibri" pitchFamily="34" charset="-120"/>
+              </a:rPr>
+              <a:t>WEEKS 3–8</a:t>
+            </a:r>
+            <a:endParaRPr lang="en-US" sz="1200" dirty="0"/>
+          </a:p>
+        </p:txBody>
+      </p:sp>
+      <p:sp>
+        <p:nvSpPr>
+          <p:cNvPr id="10" name="Text 8"/>
+          <p:cNvSpPr/>
+          <p:nvPr/>
+        </p:nvSpPr>
+        <p:spPr>
+          <a:xfrm>
+            <a:off x="4663440" y="2258568"/>
+            <a:ext cx="2926080" cy="347472"/>
+          </a:xfrm>
+          <a:prstGeom prst="rect">
+            <a:avLst/>
+          </a:prstGeom>
+          <a:noFill/>
+          <a:ln/>
+        </p:spPr>
+        <p:txBody>
+          <a:bodyPr wrap="square" lIns="0" tIns="0" rIns="0" bIns="0" rtlCol="0" anchor="ctr"/>
+          <a:lstStyle/>
+          <a:p>
+            <a:pPr indent="0" marL="0">
+              <a:buNone/>
+            </a:pPr>
+            <a:r>
+              <a:rPr lang="en-US" sz="2000" b="1" dirty="0">
+                <a:solidFill>
+                  <a:srgbClr val="2B1620"/>
+                </a:solidFill>
+                <a:latin typeface="Cambria" pitchFamily="34" charset="0"/>
+                <a:ea typeface="Cambria" pitchFamily="34" charset="-122"/>
+                <a:cs typeface="Cambria" pitchFamily="34" charset="-120"/>
+              </a:rPr>
+              <a:t>Volume and voice</a:t>
+            </a:r>
+            <a:endParaRPr lang="en-US" sz="2000" dirty="0"/>
+          </a:p>
+        </p:txBody>
+      </p:sp>
+      <p:sp>
+        <p:nvSpPr>
+          <p:cNvPr id="11" name="Text 9"/>
+          <p:cNvSpPr/>
+          <p:nvPr/>
+        </p:nvSpPr>
+        <p:spPr>
+          <a:xfrm>
+            <a:off x="4663440" y="2688336"/>
+            <a:ext cx="2926080" cy="868680"/>
+          </a:xfrm>
+          <a:prstGeom prst="rect">
+            <a:avLst/>
+          </a:prstGeom>
+          <a:noFill/>
+          <a:ln/>
+        </p:spPr>
+        <p:txBody>
+          <a:bodyPr wrap="square" lIns="0" tIns="0" rIns="0" bIns="0" rtlCol="0" anchor="ctr"/>
+          <a:lstStyle/>
+          <a:p>
+            <a:pPr marL="342900" indent="-342900">
+              <a:lnSpc>
+                <a:spcPts val="1700"/>
+              </a:lnSpc>
+              <a:spcAft>
+                <a:spcPts val="400"/>
+              </a:spcAft>
+              <a:buSzPct val="100000"/>
+              <a:buChar char="•"/>
+            </a:pPr>
+            <a:r>
+              <a:rPr lang="en-US" sz="1250" dirty="0">
+                <a:solidFill>
+                  <a:srgbClr val="2B1620"/>
+                </a:solidFill>
+                <a:latin typeface="Calibri" pitchFamily="34" charset="0"/>
+                <a:ea typeface="Calibri" pitchFamily="34" charset="-122"/>
+                <a:cs typeface="Calibri" pitchFamily="34" charset="-120"/>
+              </a:rPr>
+              <a:t>Five posts a week, every week</a:t>
+            </a:r>
+            <a:endParaRPr lang="en-US" sz="1250" dirty="0"/>
+          </a:p>
+          <a:p>
+            <a:pPr marL="342900" indent="-342900">
+              <a:lnSpc>
+                <a:spcPts val="1700"/>
+              </a:lnSpc>
+              <a:spcAft>
+                <a:spcPts val="400"/>
+              </a:spcAft>
+              <a:buSzPct val="100000"/>
+              <a:buChar char="•"/>
+            </a:pPr>
+            <a:r>
+              <a:rPr lang="en-US" sz="1250" dirty="0">
+                <a:solidFill>
+                  <a:srgbClr val="2B1620"/>
+                </a:solidFill>
+                <a:latin typeface="Calibri" pitchFamily="34" charset="0"/>
+                <a:ea typeface="Calibri" pitchFamily="34" charset="-122"/>
+                <a:cs typeface="Calibri" pitchFamily="34" charset="-120"/>
+              </a:rPr>
+              <a:t>You, teaching, on camera</a:t>
+            </a:r>
+            <a:endParaRPr lang="en-US" sz="1250" dirty="0"/>
+          </a:p>
+          <a:p>
+            <a:pPr marL="342900" indent="-342900">
+              <a:lnSpc>
+                <a:spcPts val="1700"/>
+              </a:lnSpc>
+              <a:spcAft>
+                <a:spcPts val="400"/>
+              </a:spcAft>
+              <a:buSzPct val="100000"/>
+              <a:buChar char="•"/>
+            </a:pPr>
+            <a:r>
+              <a:rPr lang="en-US" sz="1250" dirty="0">
+                <a:solidFill>
+                  <a:srgbClr val="2B1620"/>
+                </a:solidFill>
+                <a:latin typeface="Calibri" pitchFamily="34" charset="0"/>
+                <a:ea typeface="Calibri" pitchFamily="34" charset="-122"/>
+                <a:cs typeface="Calibri" pitchFamily="34" charset="-120"/>
+              </a:rPr>
+              <a:t>YouTube from the same shoot</a:t>
+            </a:r>
+            <a:endParaRPr lang="en-US" sz="1250" dirty="0"/>
+          </a:p>
+        </p:txBody>
+      </p:sp>
+      <p:sp>
+        <p:nvSpPr>
+          <p:cNvPr id="12" name="Shape 10"/>
+          <p:cNvSpPr/>
+          <p:nvPr/>
+        </p:nvSpPr>
+        <p:spPr>
+          <a:xfrm>
+            <a:off x="8065008" y="1783080"/>
+            <a:ext cx="3493008" cy="1874520"/>
+          </a:xfrm>
+          <a:prstGeom prst="roundRect">
+            <a:avLst>
+              <a:gd name="adj" fmla="val 6829"/>
+            </a:avLst>
+          </a:prstGeom>
+          <a:solidFill>
+            <a:srgbClr val="6D2E46"/>
+          </a:solidFill>
+          <a:ln/>
+        </p:spPr>
+      </p:sp>
+      <p:sp>
+        <p:nvSpPr>
+          <p:cNvPr id="13" name="Text 11"/>
+          <p:cNvSpPr/>
+          <p:nvPr/>
+        </p:nvSpPr>
+        <p:spPr>
+          <a:xfrm>
+            <a:off x="8339328" y="1965960"/>
+            <a:ext cx="2926080" cy="256032"/>
+          </a:xfrm>
+          <a:prstGeom prst="rect">
+            <a:avLst/>
+          </a:prstGeom>
+          <a:noFill/>
+          <a:ln/>
+        </p:spPr>
+        <p:txBody>
+          <a:bodyPr wrap="square" lIns="0" tIns="0" rIns="0" bIns="0" rtlCol="0" anchor="ctr"/>
+          <a:lstStyle/>
+          <a:p>
+            <a:pPr indent="0" marL="0">
+              <a:buNone/>
+            </a:pPr>
+            <a:r>
+              <a:rPr lang="en-US" sz="1200" b="1" spc="160" kern="0" dirty="0">
+                <a:solidFill>
+                  <a:srgbClr val="D9A441"/>
+                </a:solidFill>
+                <a:latin typeface="Calibri" pitchFamily="34" charset="0"/>
+                <a:ea typeface="Calibri" pitchFamily="34" charset="-122"/>
+                <a:cs typeface="Calibri" pitchFamily="34" charset="-120"/>
+              </a:rPr>
+              <a:t>WEEKS 9–12</a:t>
+            </a:r>
+            <a:endParaRPr lang="en-US" sz="1200" dirty="0"/>
+          </a:p>
+        </p:txBody>
+      </p:sp>
+      <p:sp>
+        <p:nvSpPr>
+          <p:cNvPr id="14" name="Text 12"/>
+          <p:cNvSpPr/>
+          <p:nvPr/>
+        </p:nvSpPr>
+        <p:spPr>
+          <a:xfrm>
+            <a:off x="8339328" y="2258568"/>
+            <a:ext cx="2926080" cy="347472"/>
+          </a:xfrm>
+          <a:prstGeom prst="rect">
+            <a:avLst/>
+          </a:prstGeom>
+          <a:noFill/>
+          <a:ln/>
+        </p:spPr>
+        <p:txBody>
+          <a:bodyPr wrap="square" lIns="0" tIns="0" rIns="0" bIns="0" rtlCol="0" anchor="ctr"/>
+          <a:lstStyle/>
+          <a:p>
+            <a:pPr indent="0" marL="0">
+              <a:buNone/>
+            </a:pPr>
+            <a:r>
+              <a:rPr lang="en-US" sz="2000" b="1" dirty="0">
+                <a:solidFill>
+                  <a:srgbClr val="FFFFFF"/>
+                </a:solidFill>
+                <a:latin typeface="Cambria" pitchFamily="34" charset="0"/>
+                <a:ea typeface="Cambria" pitchFamily="34" charset="-122"/>
+                <a:cs typeface="Cambria" pitchFamily="34" charset="-120"/>
+              </a:rPr>
+              <a:t>Compound</a:t>
+            </a:r>
+            <a:endParaRPr lang="en-US" sz="2000" dirty="0"/>
+          </a:p>
+        </p:txBody>
+      </p:sp>
+      <p:sp>
+        <p:nvSpPr>
+          <p:cNvPr id="15" name="Text 13"/>
+          <p:cNvSpPr/>
+          <p:nvPr/>
+        </p:nvSpPr>
+        <p:spPr>
+          <a:xfrm>
+            <a:off x="8339328" y="2688336"/>
+            <a:ext cx="2926080" cy="868680"/>
+          </a:xfrm>
+          <a:prstGeom prst="rect">
+            <a:avLst/>
+          </a:prstGeom>
+          <a:noFill/>
+          <a:ln/>
+        </p:spPr>
+        <p:txBody>
+          <a:bodyPr wrap="square" lIns="0" tIns="0" rIns="0" bIns="0" rtlCol="0" anchor="ctr"/>
+          <a:lstStyle/>
+          <a:p>
+            <a:pPr marL="342900" indent="-342900">
+              <a:lnSpc>
+                <a:spcPts val="1700"/>
+              </a:lnSpc>
+              <a:spcAft>
+                <a:spcPts val="400"/>
+              </a:spcAft>
+              <a:buSzPct val="100000"/>
+              <a:buChar char="•"/>
+            </a:pPr>
+            <a:r>
+              <a:rPr lang="en-US" sz="1250" dirty="0">
+                <a:solidFill>
+                  <a:srgbClr val="FFFFFF"/>
+                </a:solidFill>
+                <a:latin typeface="Calibri" pitchFamily="34" charset="0"/>
+                <a:ea typeface="Calibri" pitchFamily="34" charset="-122"/>
+                <a:cs typeface="Calibri" pitchFamily="34" charset="-120"/>
+              </a:rPr>
+              <a:t>Double down on what worked</a:t>
+            </a:r>
+            <a:endParaRPr lang="en-US" sz="1250" dirty="0"/>
+          </a:p>
+          <a:p>
+            <a:pPr marL="342900" indent="-342900">
+              <a:lnSpc>
+                <a:spcPts val="1700"/>
+              </a:lnSpc>
+              <a:spcAft>
+                <a:spcPts val="400"/>
+              </a:spcAft>
+              <a:buSzPct val="100000"/>
+              <a:buChar char="•"/>
+            </a:pPr>
+            <a:r>
+              <a:rPr lang="en-US" sz="1250" dirty="0">
+                <a:solidFill>
+                  <a:srgbClr val="FFFFFF"/>
+                </a:solidFill>
+                <a:latin typeface="Calibri" pitchFamily="34" charset="0"/>
+                <a:ea typeface="Calibri" pitchFamily="34" charset="-122"/>
+                <a:cs typeface="Calibri" pitchFamily="34" charset="-120"/>
+              </a:rPr>
+              <a:t>Your first paid workshop</a:t>
+            </a:r>
+            <a:endParaRPr lang="en-US" sz="1250" dirty="0"/>
+          </a:p>
+          <a:p>
+            <a:pPr marL="342900" indent="-342900">
+              <a:lnSpc>
+                <a:spcPts val="1700"/>
+              </a:lnSpc>
+              <a:spcAft>
+                <a:spcPts val="400"/>
+              </a:spcAft>
+              <a:buSzPct val="100000"/>
+              <a:buChar char="•"/>
+            </a:pPr>
+            <a:r>
+              <a:rPr lang="en-US" sz="1250" dirty="0">
+                <a:solidFill>
+                  <a:srgbClr val="FFFFFF"/>
+                </a:solidFill>
+                <a:latin typeface="Calibri" pitchFamily="34" charset="0"/>
+                <a:ea typeface="Calibri" pitchFamily="34" charset="-122"/>
+                <a:cs typeface="Calibri" pitchFamily="34" charset="-120"/>
+              </a:rPr>
+              <a:t>Systems running on their own</a:t>
+            </a:r>
+            <a:endParaRPr lang="en-US" sz="1250" dirty="0"/>
+          </a:p>
+        </p:txBody>
+      </p:sp>
+      <p:sp>
+        <p:nvSpPr>
+          <p:cNvPr id="16" name="Text 14"/>
+          <p:cNvSpPr/>
+          <p:nvPr/>
+        </p:nvSpPr>
+        <p:spPr>
+          <a:xfrm>
+            <a:off x="713232" y="3977640"/>
+            <a:ext cx="10735056" cy="320040"/>
+          </a:xfrm>
+          <a:prstGeom prst="rect">
+            <a:avLst/>
+          </a:prstGeom>
+          <a:noFill/>
+          <a:ln/>
+        </p:spPr>
+        <p:txBody>
+          <a:bodyPr wrap="square" lIns="0" tIns="0" rIns="0" bIns="0" rtlCol="0" anchor="ctr"/>
+          <a:lstStyle/>
+          <a:p>
+            <a:pPr indent="0" marL="0">
+              <a:buNone/>
+            </a:pPr>
+            <a:r>
+              <a:rPr lang="en-US" sz="1600" b="1" dirty="0">
+                <a:solidFill>
+                  <a:srgbClr val="6D2E46"/>
+                </a:solidFill>
+                <a:latin typeface="Calibri" pitchFamily="34" charset="0"/>
+                <a:ea typeface="Calibri" pitchFamily="34" charset="-122"/>
+                <a:cs typeface="Calibri" pitchFamily="34" charset="-120"/>
+              </a:rPr>
+              <a:t>Where you'd realistically be at day 90:</a:t>
+            </a:r>
+            <a:endParaRPr lang="en-US" sz="1600" dirty="0"/>
+          </a:p>
+        </p:txBody>
+      </p:sp>
+      <p:sp>
+        <p:nvSpPr>
+          <p:cNvPr id="17" name="Shape 15"/>
+          <p:cNvSpPr/>
+          <p:nvPr/>
+        </p:nvSpPr>
+        <p:spPr>
+          <a:xfrm>
+            <a:off x="713232" y="4343400"/>
+            <a:ext cx="2532888" cy="1261872"/>
+          </a:xfrm>
+          <a:prstGeom prst="roundRect">
+            <a:avLst>
+              <a:gd name="adj" fmla="val 10145"/>
+            </a:avLst>
+          </a:prstGeom>
+          <a:solidFill>
+            <a:srgbClr val="3D1B2E"/>
+          </a:solidFill>
+          <a:ln/>
+        </p:spPr>
+      </p:sp>
+      <p:sp>
+        <p:nvSpPr>
+          <p:cNvPr id="18" name="Text 16"/>
+          <p:cNvSpPr/>
+          <p:nvPr/>
+        </p:nvSpPr>
+        <p:spPr>
+          <a:xfrm>
+            <a:off x="969264" y="4517136"/>
+            <a:ext cx="2011680" cy="457200"/>
+          </a:xfrm>
+          <a:prstGeom prst="rect">
+            <a:avLst/>
+          </a:prstGeom>
+          <a:noFill/>
+          <a:ln/>
+        </p:spPr>
+        <p:txBody>
+          <a:bodyPr wrap="square" lIns="0" tIns="0" rIns="0" bIns="0" rtlCol="0" anchor="ctr"/>
+          <a:lstStyle/>
+          <a:p>
+            <a:pPr indent="0" marL="0">
+              <a:buNone/>
+            </a:pPr>
+            <a:r>
+              <a:rPr lang="en-US" sz="3000" b="1" dirty="0">
+                <a:solidFill>
+                  <a:srgbClr val="D9A441"/>
+                </a:solidFill>
+                <a:latin typeface="Cambria" pitchFamily="34" charset="0"/>
+                <a:ea typeface="Cambria" pitchFamily="34" charset="-122"/>
+                <a:cs typeface="Cambria" pitchFamily="34" charset="-120"/>
+              </a:rPr>
+              <a:t>~65</a:t>
+            </a:r>
+            <a:endParaRPr lang="en-US" sz="3000" dirty="0"/>
+          </a:p>
+        </p:txBody>
+      </p:sp>
+      <p:sp>
+        <p:nvSpPr>
+          <p:cNvPr id="19" name="Text 17"/>
+          <p:cNvSpPr/>
+          <p:nvPr/>
+        </p:nvSpPr>
+        <p:spPr>
+          <a:xfrm>
+            <a:off x="969264" y="4992624"/>
+            <a:ext cx="2103120" cy="548640"/>
+          </a:xfrm>
+          <a:prstGeom prst="rect">
+            <a:avLst/>
+          </a:prstGeom>
+          <a:noFill/>
+          <a:ln/>
+        </p:spPr>
+        <p:txBody>
+          <a:bodyPr wrap="square" lIns="0" tIns="0" rIns="0" bIns="0" rtlCol="0" anchor="ctr"/>
+          <a:lstStyle/>
+          <a:p>
+            <a:pPr indent="0" marL="0">
+              <a:lnSpc>
+                <a:spcPts val="1600"/>
+              </a:lnSpc>
+              <a:buNone/>
+            </a:pPr>
+            <a:r>
+              <a:rPr lang="en-US" sz="1200" dirty="0">
+                <a:solidFill>
+                  <a:srgbClr val="C9AEB8"/>
+                </a:solidFill>
+                <a:latin typeface="Calibri" pitchFamily="34" charset="0"/>
+                <a:ea typeface="Calibri" pitchFamily="34" charset="-122"/>
+                <a:cs typeface="Calibri" pitchFamily="34" charset="-120"/>
+              </a:rPr>
+              <a:t>posts, vs 34 today — your library doubles</a:t>
+            </a:r>
+            <a:endParaRPr lang="en-US" sz="1200" dirty="0"/>
+          </a:p>
+        </p:txBody>
+      </p:sp>
+      <p:sp>
+        <p:nvSpPr>
+          <p:cNvPr id="20" name="Shape 18"/>
+          <p:cNvSpPr/>
+          <p:nvPr/>
+        </p:nvSpPr>
+        <p:spPr>
+          <a:xfrm>
+            <a:off x="3429000" y="4343400"/>
+            <a:ext cx="2532888" cy="1261872"/>
+          </a:xfrm>
+          <a:prstGeom prst="roundRect">
+            <a:avLst>
+              <a:gd name="adj" fmla="val 10145"/>
+            </a:avLst>
+          </a:prstGeom>
+          <a:solidFill>
+            <a:srgbClr val="3D1B2E"/>
+          </a:solidFill>
+          <a:ln/>
+        </p:spPr>
+      </p:sp>
+      <p:sp>
+        <p:nvSpPr>
+          <p:cNvPr id="21" name="Text 19"/>
+          <p:cNvSpPr/>
+          <p:nvPr/>
+        </p:nvSpPr>
+        <p:spPr>
+          <a:xfrm>
+            <a:off x="3685032" y="4517136"/>
+            <a:ext cx="2011680" cy="457200"/>
+          </a:xfrm>
+          <a:prstGeom prst="rect">
+            <a:avLst/>
+          </a:prstGeom>
+          <a:noFill/>
+          <a:ln/>
+        </p:spPr>
+        <p:txBody>
+          <a:bodyPr wrap="square" lIns="0" tIns="0" rIns="0" bIns="0" rtlCol="0" anchor="ctr"/>
+          <a:lstStyle/>
+          <a:p>
+            <a:pPr indent="0" marL="0">
+              <a:buNone/>
+            </a:pPr>
+            <a:r>
+              <a:rPr lang="en-US" sz="3000" b="1" dirty="0">
+                <a:solidFill>
+                  <a:srgbClr val="D9A441"/>
+                </a:solidFill>
+                <a:latin typeface="Cambria" pitchFamily="34" charset="0"/>
+                <a:ea typeface="Cambria" pitchFamily="34" charset="-122"/>
+                <a:cs typeface="Cambria" pitchFamily="34" charset="-120"/>
+              </a:rPr>
+              <a:t>500</a:t>
+            </a:r>
+            <a:endParaRPr lang="en-US" sz="3000" dirty="0"/>
+          </a:p>
+        </p:txBody>
+      </p:sp>
+      <p:sp>
+        <p:nvSpPr>
+          <p:cNvPr id="22" name="Text 20"/>
+          <p:cNvSpPr/>
+          <p:nvPr/>
+        </p:nvSpPr>
+        <p:spPr>
+          <a:xfrm>
+            <a:off x="3685032" y="4992624"/>
+            <a:ext cx="2103120" cy="548640"/>
+          </a:xfrm>
+          <a:prstGeom prst="rect">
+            <a:avLst/>
+          </a:prstGeom>
+          <a:noFill/>
+          <a:ln/>
+        </p:spPr>
+        <p:txBody>
+          <a:bodyPr wrap="square" lIns="0" tIns="0" rIns="0" bIns="0" rtlCol="0" anchor="ctr"/>
+          <a:lstStyle/>
+          <a:p>
+            <a:pPr indent="0" marL="0">
+              <a:lnSpc>
+                <a:spcPts val="1600"/>
+              </a:lnSpc>
+              <a:buNone/>
+            </a:pPr>
+            <a:r>
+              <a:rPr lang="en-US" sz="1200" dirty="0">
+                <a:solidFill>
+                  <a:srgbClr val="C9AEB8"/>
+                </a:solidFill>
+                <a:latin typeface="Calibri" pitchFamily="34" charset="0"/>
+                <a:ea typeface="Calibri" pitchFamily="34" charset="-122"/>
+                <a:cs typeface="Calibri" pitchFamily="34" charset="-120"/>
+              </a:rPr>
+              <a:t>people on a WhatsApp list you own</a:t>
+            </a:r>
+            <a:endParaRPr lang="en-US" sz="1200" dirty="0"/>
+          </a:p>
+        </p:txBody>
+      </p:sp>
+      <p:sp>
+        <p:nvSpPr>
+          <p:cNvPr id="23" name="Shape 21"/>
+          <p:cNvSpPr/>
+          <p:nvPr/>
+        </p:nvSpPr>
+        <p:spPr>
+          <a:xfrm>
+            <a:off x="6144768" y="4343400"/>
+            <a:ext cx="2532888" cy="1261872"/>
+          </a:xfrm>
+          <a:prstGeom prst="roundRect">
+            <a:avLst>
+              <a:gd name="adj" fmla="val 10145"/>
+            </a:avLst>
+          </a:prstGeom>
+          <a:solidFill>
+            <a:srgbClr val="3D1B2E"/>
+          </a:solidFill>
+          <a:ln/>
+        </p:spPr>
+      </p:sp>
+      <p:sp>
+        <p:nvSpPr>
+          <p:cNvPr id="24" name="Text 22"/>
+          <p:cNvSpPr/>
+          <p:nvPr/>
+        </p:nvSpPr>
+        <p:spPr>
+          <a:xfrm>
+            <a:off x="6400800" y="4517136"/>
+            <a:ext cx="2011680" cy="457200"/>
+          </a:xfrm>
+          <a:prstGeom prst="rect">
+            <a:avLst/>
+          </a:prstGeom>
+          <a:noFill/>
+          <a:ln/>
+        </p:spPr>
+        <p:txBody>
+          <a:bodyPr wrap="square" lIns="0" tIns="0" rIns="0" bIns="0" rtlCol="0" anchor="ctr"/>
+          <a:lstStyle/>
+          <a:p>
+            <a:pPr indent="0" marL="0">
+              <a:buNone/>
+            </a:pPr>
+            <a:r>
+              <a:rPr lang="en-US" sz="3000" b="1" dirty="0">
+                <a:solidFill>
+                  <a:srgbClr val="D9A441"/>
+                </a:solidFill>
+                <a:latin typeface="Cambria" pitchFamily="34" charset="0"/>
+                <a:ea typeface="Cambria" pitchFamily="34" charset="-122"/>
+                <a:cs typeface="Cambria" pitchFamily="34" charset="-120"/>
+              </a:rPr>
+              <a:t>12</a:t>
+            </a:r>
+            <a:endParaRPr lang="en-US" sz="3000" dirty="0"/>
+          </a:p>
+        </p:txBody>
+      </p:sp>
+      <p:sp>
+        <p:nvSpPr>
+          <p:cNvPr id="25" name="Text 23"/>
+          <p:cNvSpPr/>
+          <p:nvPr/>
+        </p:nvSpPr>
+        <p:spPr>
+          <a:xfrm>
+            <a:off x="6400800" y="4992624"/>
+            <a:ext cx="2103120" cy="548640"/>
+          </a:xfrm>
+          <a:prstGeom prst="rect">
+            <a:avLst/>
+          </a:prstGeom>
+          <a:noFill/>
+          <a:ln/>
+        </p:spPr>
+        <p:txBody>
+          <a:bodyPr wrap="square" lIns="0" tIns="0" rIns="0" bIns="0" rtlCol="0" anchor="ctr"/>
+          <a:lstStyle/>
+          <a:p>
+            <a:pPr indent="0" marL="0">
+              <a:lnSpc>
+                <a:spcPts val="1600"/>
+              </a:lnSpc>
+              <a:buNone/>
+            </a:pPr>
+            <a:r>
+              <a:rPr lang="en-US" sz="1200" dirty="0">
+                <a:solidFill>
+                  <a:srgbClr val="C9AEB8"/>
+                </a:solidFill>
+                <a:latin typeface="Calibri" pitchFamily="34" charset="0"/>
+                <a:ea typeface="Calibri" pitchFamily="34" charset="-122"/>
+                <a:cs typeface="Calibri" pitchFamily="34" charset="-120"/>
+              </a:rPr>
+              <a:t>YouTube videos working in search for you</a:t>
+            </a:r>
+            <a:endParaRPr lang="en-US" sz="1200" dirty="0"/>
+          </a:p>
+        </p:txBody>
+      </p:sp>
+      <p:sp>
+        <p:nvSpPr>
+          <p:cNvPr id="26" name="Shape 24"/>
+          <p:cNvSpPr/>
+          <p:nvPr/>
+        </p:nvSpPr>
+        <p:spPr>
+          <a:xfrm>
+            <a:off x="8860536" y="4343400"/>
+            <a:ext cx="2532888" cy="1261872"/>
+          </a:xfrm>
+          <a:prstGeom prst="roundRect">
+            <a:avLst>
+              <a:gd name="adj" fmla="val 10145"/>
+            </a:avLst>
+          </a:prstGeom>
+          <a:solidFill>
+            <a:srgbClr val="3D1B2E"/>
+          </a:solidFill>
+          <a:ln/>
+        </p:spPr>
+      </p:sp>
+      <p:sp>
+        <p:nvSpPr>
+          <p:cNvPr id="27" name="Text 25"/>
+          <p:cNvSpPr/>
+          <p:nvPr/>
+        </p:nvSpPr>
+        <p:spPr>
+          <a:xfrm>
+            <a:off x="9116568" y="4517136"/>
+            <a:ext cx="2011680" cy="457200"/>
+          </a:xfrm>
+          <a:prstGeom prst="rect">
+            <a:avLst/>
+          </a:prstGeom>
+          <a:noFill/>
+          <a:ln/>
+        </p:spPr>
+        <p:txBody>
+          <a:bodyPr wrap="square" lIns="0" tIns="0" rIns="0" bIns="0" rtlCol="0" anchor="ctr"/>
+          <a:lstStyle/>
+          <a:p>
+            <a:pPr indent="0" marL="0">
+              <a:buNone/>
+            </a:pPr>
+            <a:r>
+              <a:rPr lang="en-US" sz="3000" b="1" dirty="0">
+                <a:solidFill>
+                  <a:srgbClr val="D9A441"/>
+                </a:solidFill>
+                <a:latin typeface="Cambria" pitchFamily="34" charset="0"/>
+                <a:ea typeface="Cambria" pitchFamily="34" charset="-122"/>
+                <a:cs typeface="Cambria" pitchFamily="34" charset="-120"/>
+              </a:rPr>
+              <a:t>1</a:t>
+            </a:r>
+            <a:endParaRPr lang="en-US" sz="3000" dirty="0"/>
+          </a:p>
+        </p:txBody>
+      </p:sp>
+      <p:sp>
+        <p:nvSpPr>
+          <p:cNvPr id="28" name="Text 26"/>
+          <p:cNvSpPr/>
+          <p:nvPr/>
+        </p:nvSpPr>
+        <p:spPr>
+          <a:xfrm>
+            <a:off x="9116568" y="4992624"/>
+            <a:ext cx="2103120" cy="548640"/>
+          </a:xfrm>
+          <a:prstGeom prst="rect">
+            <a:avLst/>
+          </a:prstGeom>
+          <a:noFill/>
+          <a:ln/>
+        </p:spPr>
+        <p:txBody>
+          <a:bodyPr wrap="square" lIns="0" tIns="0" rIns="0" bIns="0" rtlCol="0" anchor="ctr"/>
+          <a:lstStyle/>
+          <a:p>
+            <a:pPr indent="0" marL="0">
+              <a:lnSpc>
+                <a:spcPts val="1600"/>
+              </a:lnSpc>
+              <a:buNone/>
+            </a:pPr>
+            <a:r>
+              <a:rPr lang="en-US" sz="1200" dirty="0">
+                <a:solidFill>
+                  <a:srgbClr val="C9AEB8"/>
+                </a:solidFill>
+                <a:latin typeface="Calibri" pitchFamily="34" charset="0"/>
+                <a:ea typeface="Calibri" pitchFamily="34" charset="-122"/>
+                <a:cs typeface="Calibri" pitchFamily="34" charset="-120"/>
+              </a:rPr>
+              <a:t>clear brand a stranger gets in five seconds</a:t>
+            </a:r>
+            <a:endParaRPr lang="en-US" sz="1200" dirty="0"/>
+          </a:p>
+        </p:txBody>
+      </p:sp>
+      <p:sp>
+        <p:nvSpPr>
+          <p:cNvPr id="29" name="Text 27"/>
+          <p:cNvSpPr/>
+          <p:nvPr/>
+        </p:nvSpPr>
+        <p:spPr>
+          <a:xfrm>
+            <a:off x="713232" y="6309360"/>
+            <a:ext cx="10735056" cy="320040"/>
+          </a:xfrm>
+          <a:prstGeom prst="rect">
+            <a:avLst/>
+          </a:prstGeom>
+          <a:noFill/>
+          <a:ln/>
+        </p:spPr>
+        <p:txBody>
+          <a:bodyPr wrap="square" lIns="0" tIns="0" rIns="0" bIns="0" rtlCol="0" anchor="ctr"/>
+          <a:lstStyle/>
+          <a:p>
+            <a:pPr indent="0" marL="0">
+              <a:buNone/>
+            </a:pPr>
+            <a:r>
+              <a:rPr lang="en-US" sz="1050" i="1" dirty="0">
+                <a:solidFill>
+                  <a:srgbClr val="7A6068"/>
+                </a:solidFill>
+                <a:latin typeface="Calibri" pitchFamily="34" charset="0"/>
+                <a:ea typeface="Calibri" pitchFamily="34" charset="-122"/>
+                <a:cs typeface="Calibri" pitchFamily="34" charset="-120"/>
+              </a:rPr>
+              <a:t>Katie reached 415K in about a year across 369 posts. Nobody can promise you a follower number — but volume, clarity and consistency are the levers she pulled, and they're the ones we'd pull.</a:t>
+            </a:r>
+            <a:endParaRPr lang="en-US" sz="1050" dirty="0"/>
+          </a:p>
+        </p:txBody>
+      </p:sp>
+    </p:spTree>
+  </p:cSld>
+  <p:clrMapOvr>
+    <a:masterClrMapping/>
+  </p:clrMapOvr>
+</p:sld>
+</file>
+
+<file path=ppt/slides/slide23.xml><?xml version="1.0" encoding="utf-8"?>
+<p:sld xmlns:a="http://schemas.openxmlformats.org/drawingml/2006/main" xmlns:r="http://schemas.openxmlformats.org/officeDocument/2006/relationships" xmlns:p="http://schemas.openxmlformats.org/presentationml/2006/main">
+  <p:cSld name="Slide 23">
+    <p:bg>
+      <p:bgPr>
+        <a:solidFill>
+          <a:srgbClr val="FFFFFF"/>
+        </a:solidFill>
+      </p:bgPr>
+    </p:bg>
+    <p:spTree>
+      <p:nvGrpSpPr>
+        <p:cNvPr id="1" name=""/>
+        <p:cNvGrpSpPr/>
+        <p:nvPr/>
+      </p:nvGrpSpPr>
+      <p:grpSpPr>
+        <a:xfrm>
+          <a:off x="0" y="0"/>
+          <a:ext cx="0" cy="0"/>
+          <a:chOff x="0" y="0"/>
+          <a:chExt cx="0" cy="0"/>
+        </a:xfrm>
+      </p:grpSpPr>
+      <p:sp>
+        <p:nvSpPr>
+          <p:cNvPr id="2" name="Text 0"/>
+          <p:cNvSpPr/>
+          <p:nvPr/>
+        </p:nvSpPr>
+        <p:spPr>
+          <a:xfrm>
+            <a:off x="713232" y="420624"/>
+            <a:ext cx="10735056" cy="274320"/>
+          </a:xfrm>
+          <a:prstGeom prst="rect">
+            <a:avLst/>
+          </a:prstGeom>
+          <a:noFill/>
+          <a:ln/>
+        </p:spPr>
+        <p:txBody>
+          <a:bodyPr wrap="square" lIns="0" tIns="0" rIns="0" bIns="0" rtlCol="0" anchor="ctr"/>
+          <a:lstStyle/>
+          <a:p>
+            <a:pPr indent="0" marL="0">
+              <a:buNone/>
+            </a:pPr>
+            <a:r>
+              <a:rPr lang="en-US" sz="1200" b="1" spc="220" kern="0" dirty="0">
+                <a:solidFill>
+                  <a:srgbClr val="A26769"/>
+                </a:solidFill>
+                <a:latin typeface="Calibri" pitchFamily="34" charset="0"/>
+                <a:ea typeface="Calibri" pitchFamily="34" charset="-122"/>
+                <a:cs typeface="Calibri" pitchFamily="34" charset="-120"/>
+              </a:rPr>
+              <a:t>YOUR SIDE OF IT</a:t>
+            </a:r>
+            <a:endParaRPr lang="en-US" sz="1200" dirty="0"/>
+          </a:p>
+        </p:txBody>
+      </p:sp>
+      <p:sp>
+        <p:nvSpPr>
+          <p:cNvPr id="3" name="Text 1"/>
+          <p:cNvSpPr/>
+          <p:nvPr/>
+        </p:nvSpPr>
+        <p:spPr>
+          <a:xfrm>
+            <a:off x="713232" y="768096"/>
+            <a:ext cx="10735056" cy="960120"/>
+          </a:xfrm>
+          <a:prstGeom prst="rect">
+            <a:avLst/>
+          </a:prstGeom>
+          <a:noFill/>
+          <a:ln/>
+        </p:spPr>
+        <p:txBody>
+          <a:bodyPr wrap="square" lIns="0" tIns="0" rIns="0" bIns="0" rtlCol="0" anchor="ctr"/>
+          <a:lstStyle/>
+          <a:p>
+            <a:pPr indent="0" marL="0">
+              <a:lnSpc>
+                <a:spcPts val="4500"/>
+              </a:lnSpc>
+              <a:buNone/>
+            </a:pPr>
+            <a:r>
+              <a:rPr lang="en-US" sz="3900" b="1" dirty="0">
+                <a:solidFill>
+                  <a:srgbClr val="2B1620"/>
+                </a:solidFill>
+                <a:latin typeface="Cambria" pitchFamily="34" charset="0"/>
+                <a:ea typeface="Cambria" pitchFamily="34" charset="-122"/>
+                <a:cs typeface="Cambria" pitchFamily="34" charset="-120"/>
+              </a:rPr>
+              <a:t>What I'd need from you</a:t>
+            </a:r>
+            <a:endParaRPr lang="en-US" sz="3900" dirty="0"/>
+          </a:p>
+        </p:txBody>
+      </p:sp>
+      <p:sp>
+        <p:nvSpPr>
+          <p:cNvPr id="4" name="Text 2"/>
+          <p:cNvSpPr/>
+          <p:nvPr/>
+        </p:nvSpPr>
+        <p:spPr>
+          <a:xfrm>
+            <a:off x="713232" y="1783080"/>
+            <a:ext cx="10424160" cy="548640"/>
+          </a:xfrm>
+          <a:prstGeom prst="rect">
+            <a:avLst/>
+          </a:prstGeom>
+          <a:noFill/>
+          <a:ln/>
+        </p:spPr>
+        <p:txBody>
+          <a:bodyPr wrap="square" lIns="0" tIns="0" rIns="0" bIns="0" rtlCol="0" anchor="ctr"/>
+          <a:lstStyle/>
+          <a:p>
+            <a:pPr indent="0" marL="0">
+              <a:lnSpc>
+                <a:spcPts val="2400"/>
+              </a:lnSpc>
+              <a:buNone/>
+            </a:pPr>
+            <a:r>
+              <a:rPr lang="en-US" sz="1700" dirty="0">
+                <a:solidFill>
+                  <a:srgbClr val="7A6068"/>
+                </a:solidFill>
+                <a:latin typeface="Calibri" pitchFamily="34" charset="0"/>
+                <a:ea typeface="Calibri" pitchFamily="34" charset="-122"/>
+                <a:cs typeface="Calibri" pitchFamily="34" charset="-120"/>
+              </a:rPr>
+              <a:t>Deliberately small. You have two children and a business to build — the point of a partner is that you do less, not more.</a:t>
+            </a:r>
+            <a:endParaRPr lang="en-US" sz="1700" dirty="0"/>
+          </a:p>
+        </p:txBody>
+      </p:sp>
+      <p:sp>
+        <p:nvSpPr>
+          <p:cNvPr id="5" name="Shape 3"/>
+          <p:cNvSpPr/>
+          <p:nvPr/>
+        </p:nvSpPr>
+        <p:spPr>
+          <a:xfrm>
+            <a:off x="713232" y="2606040"/>
+            <a:ext cx="502920" cy="502920"/>
+          </a:xfrm>
+          <a:prstGeom prst="ellipse">
+            <a:avLst/>
+          </a:prstGeom>
+          <a:solidFill>
+            <a:srgbClr val="6D2E46"/>
+          </a:solidFill>
+          <a:ln/>
+        </p:spPr>
+      </p:sp>
+      <p:sp>
+        <p:nvSpPr>
+          <p:cNvPr id="6" name="Text 4"/>
+          <p:cNvSpPr/>
+          <p:nvPr/>
+        </p:nvSpPr>
+        <p:spPr>
+          <a:xfrm>
+            <a:off x="713232" y="2606040"/>
+            <a:ext cx="502920" cy="502920"/>
+          </a:xfrm>
+          <a:prstGeom prst="rect">
+            <a:avLst/>
+          </a:prstGeom>
+          <a:noFill/>
+          <a:ln/>
+        </p:spPr>
+        <p:txBody>
+          <a:bodyPr wrap="square" lIns="0" tIns="0" rIns="0" bIns="0" rtlCol="0" anchor="ctr"/>
+          <a:lstStyle/>
+          <a:p>
+            <a:pPr algn="ctr" indent="0" marL="0">
+              <a:buNone/>
+            </a:pPr>
+            <a:r>
+              <a:rPr lang="en-US" sz="1500" b="1" dirty="0">
+                <a:solidFill>
+                  <a:srgbClr val="FFFFFF"/>
+                </a:solidFill>
+                <a:latin typeface="Calibri" pitchFamily="34" charset="0"/>
+                <a:ea typeface="Calibri" pitchFamily="34" charset="-122"/>
+                <a:cs typeface="Calibri" pitchFamily="34" charset="-120"/>
+              </a:rPr>
+              <a:t>1</a:t>
+            </a:r>
+            <a:endParaRPr lang="en-US" sz="1500" dirty="0"/>
+          </a:p>
+        </p:txBody>
+      </p:sp>
+      <p:sp>
+        <p:nvSpPr>
+          <p:cNvPr id="7" name="Text 5"/>
+          <p:cNvSpPr/>
+          <p:nvPr/>
+        </p:nvSpPr>
+        <p:spPr>
+          <a:xfrm>
+            <a:off x="1444752" y="2587752"/>
+            <a:ext cx="4663440" cy="320040"/>
+          </a:xfrm>
+          <a:prstGeom prst="rect">
+            <a:avLst/>
+          </a:prstGeom>
+          <a:noFill/>
+          <a:ln/>
+        </p:spPr>
+        <p:txBody>
+          <a:bodyPr wrap="square" lIns="0" tIns="0" rIns="0" bIns="0" rtlCol="0" anchor="ctr"/>
+          <a:lstStyle/>
+          <a:p>
+            <a:pPr indent="0" marL="0">
+              <a:buNone/>
+            </a:pPr>
+            <a:r>
+              <a:rPr lang="en-US" sz="1700" b="1" dirty="0">
+                <a:solidFill>
+                  <a:srgbClr val="2B1620"/>
+                </a:solidFill>
+                <a:latin typeface="Calibri" pitchFamily="34" charset="0"/>
+                <a:ea typeface="Calibri" pitchFamily="34" charset="-122"/>
+                <a:cs typeface="Calibri" pitchFamily="34" charset="-120"/>
+              </a:rPr>
+              <a:t>30 minutes of filming a week</a:t>
+            </a:r>
+            <a:endParaRPr lang="en-US" sz="1700" dirty="0"/>
+          </a:p>
+        </p:txBody>
+      </p:sp>
+      <p:sp>
+        <p:nvSpPr>
+          <p:cNvPr id="8" name="Text 6"/>
+          <p:cNvSpPr/>
+          <p:nvPr/>
+        </p:nvSpPr>
+        <p:spPr>
+          <a:xfrm>
+            <a:off x="1444752" y="2935224"/>
+            <a:ext cx="4663440" cy="640080"/>
+          </a:xfrm>
+          <a:prstGeom prst="rect">
+            <a:avLst/>
+          </a:prstGeom>
+          <a:noFill/>
+          <a:ln/>
+        </p:spPr>
+        <p:txBody>
+          <a:bodyPr wrap="square" lIns="0" tIns="0" rIns="0" bIns="0" rtlCol="0" anchor="ctr"/>
+          <a:lstStyle/>
+          <a:p>
+            <a:pPr indent="0" marL="0">
+              <a:lnSpc>
+                <a:spcPts val="1900"/>
+              </a:lnSpc>
+              <a:buNone/>
+            </a:pPr>
+            <a:r>
+              <a:rPr lang="en-US" sz="1350" dirty="0">
+                <a:solidFill>
+                  <a:srgbClr val="7A6068"/>
+                </a:solidFill>
+                <a:latin typeface="Calibri" pitchFamily="34" charset="0"/>
+                <a:ea typeface="Calibri" pitchFamily="34" charset="-122"/>
+                <a:cs typeface="Calibri" pitchFamily="34" charset="-120"/>
+              </a:rPr>
+              <a:t>On your own phone, at home. We send the shot list and the setup.</a:t>
+            </a:r>
+            <a:endParaRPr lang="en-US" sz="1350" dirty="0"/>
+          </a:p>
+        </p:txBody>
+      </p:sp>
+      <p:sp>
+        <p:nvSpPr>
+          <p:cNvPr id="9" name="Shape 7"/>
+          <p:cNvSpPr/>
+          <p:nvPr/>
+        </p:nvSpPr>
+        <p:spPr>
+          <a:xfrm>
+            <a:off x="6336792" y="2606040"/>
+            <a:ext cx="502920" cy="502920"/>
+          </a:xfrm>
+          <a:prstGeom prst="ellipse">
+            <a:avLst/>
+          </a:prstGeom>
+          <a:solidFill>
+            <a:srgbClr val="6D2E46"/>
+          </a:solidFill>
+          <a:ln/>
+        </p:spPr>
+      </p:sp>
+      <p:sp>
+        <p:nvSpPr>
+          <p:cNvPr id="10" name="Text 8"/>
+          <p:cNvSpPr/>
+          <p:nvPr/>
+        </p:nvSpPr>
+        <p:spPr>
+          <a:xfrm>
+            <a:off x="6336792" y="2606040"/>
+            <a:ext cx="502920" cy="502920"/>
+          </a:xfrm>
+          <a:prstGeom prst="rect">
+            <a:avLst/>
+          </a:prstGeom>
+          <a:noFill/>
+          <a:ln/>
+        </p:spPr>
+        <p:txBody>
+          <a:bodyPr wrap="square" lIns="0" tIns="0" rIns="0" bIns="0" rtlCol="0" anchor="ctr"/>
+          <a:lstStyle/>
+          <a:p>
+            <a:pPr algn="ctr" indent="0" marL="0">
+              <a:buNone/>
+            </a:pPr>
+            <a:r>
+              <a:rPr lang="en-US" sz="1500" b="1" dirty="0">
+                <a:solidFill>
+                  <a:srgbClr val="FFFFFF"/>
+                </a:solidFill>
+                <a:latin typeface="Calibri" pitchFamily="34" charset="0"/>
+                <a:ea typeface="Calibri" pitchFamily="34" charset="-122"/>
+                <a:cs typeface="Calibri" pitchFamily="34" charset="-120"/>
+              </a:rPr>
+              <a:t>2</a:t>
+            </a:r>
+            <a:endParaRPr lang="en-US" sz="1500" dirty="0"/>
+          </a:p>
+        </p:txBody>
+      </p:sp>
+      <p:sp>
+        <p:nvSpPr>
+          <p:cNvPr id="11" name="Text 9"/>
+          <p:cNvSpPr/>
+          <p:nvPr/>
+        </p:nvSpPr>
+        <p:spPr>
+          <a:xfrm>
+            <a:off x="7068312" y="2587752"/>
+            <a:ext cx="4663440" cy="320040"/>
+          </a:xfrm>
+          <a:prstGeom prst="rect">
+            <a:avLst/>
+          </a:prstGeom>
+          <a:noFill/>
+          <a:ln/>
+        </p:spPr>
+        <p:txBody>
+          <a:bodyPr wrap="square" lIns="0" tIns="0" rIns="0" bIns="0" rtlCol="0" anchor="ctr"/>
+          <a:lstStyle/>
+          <a:p>
+            <a:pPr indent="0" marL="0">
+              <a:buNone/>
+            </a:pPr>
+            <a:r>
+              <a:rPr lang="en-US" sz="1700" b="1" dirty="0">
+                <a:solidFill>
+                  <a:srgbClr val="2B1620"/>
+                </a:solidFill>
+                <a:latin typeface="Calibri" pitchFamily="34" charset="0"/>
+                <a:ea typeface="Calibri" pitchFamily="34" charset="-122"/>
+                <a:cs typeface="Calibri" pitchFamily="34" charset="-120"/>
+              </a:rPr>
+              <a:t>20 minutes a day in your DMs</a:t>
+            </a:r>
+            <a:endParaRPr lang="en-US" sz="1700" dirty="0"/>
+          </a:p>
+        </p:txBody>
+      </p:sp>
+      <p:sp>
+        <p:nvSpPr>
+          <p:cNvPr id="12" name="Text 10"/>
+          <p:cNvSpPr/>
+          <p:nvPr/>
+        </p:nvSpPr>
+        <p:spPr>
+          <a:xfrm>
+            <a:off x="7068312" y="2935224"/>
+            <a:ext cx="4663440" cy="640080"/>
+          </a:xfrm>
+          <a:prstGeom prst="rect">
+            <a:avLst/>
+          </a:prstGeom>
+          <a:noFill/>
+          <a:ln/>
+        </p:spPr>
+        <p:txBody>
+          <a:bodyPr wrap="square" lIns="0" tIns="0" rIns="0" bIns="0" rtlCol="0" anchor="ctr"/>
+          <a:lstStyle/>
+          <a:p>
+            <a:pPr indent="0" marL="0">
+              <a:lnSpc>
+                <a:spcPts val="1900"/>
+              </a:lnSpc>
+              <a:buNone/>
+            </a:pPr>
+            <a:r>
+              <a:rPr lang="en-US" sz="1350" dirty="0">
+                <a:solidFill>
+                  <a:srgbClr val="7A6068"/>
+                </a:solidFill>
+                <a:latin typeface="Calibri" pitchFamily="34" charset="0"/>
+                <a:ea typeface="Calibri" pitchFamily="34" charset="-122"/>
+                <a:cs typeface="Calibri" pitchFamily="34" charset="-120"/>
+              </a:rPr>
+              <a:t>This one can't be outsourced — people are buying you. We'll draft the rest.</a:t>
+            </a:r>
+            <a:endParaRPr lang="en-US" sz="1350" dirty="0"/>
+          </a:p>
+        </p:txBody>
+      </p:sp>
+      <p:sp>
+        <p:nvSpPr>
+          <p:cNvPr id="13" name="Shape 11"/>
+          <p:cNvSpPr/>
+          <p:nvPr/>
+        </p:nvSpPr>
+        <p:spPr>
+          <a:xfrm>
+            <a:off x="713232" y="3840480"/>
+            <a:ext cx="502920" cy="502920"/>
+          </a:xfrm>
+          <a:prstGeom prst="ellipse">
+            <a:avLst/>
+          </a:prstGeom>
+          <a:solidFill>
+            <a:srgbClr val="6D2E46"/>
+          </a:solidFill>
+          <a:ln/>
+        </p:spPr>
+      </p:sp>
+      <p:sp>
+        <p:nvSpPr>
+          <p:cNvPr id="14" name="Text 12"/>
+          <p:cNvSpPr/>
+          <p:nvPr/>
+        </p:nvSpPr>
+        <p:spPr>
+          <a:xfrm>
+            <a:off x="713232" y="3840480"/>
+            <a:ext cx="502920" cy="502920"/>
+          </a:xfrm>
+          <a:prstGeom prst="rect">
+            <a:avLst/>
+          </a:prstGeom>
+          <a:noFill/>
+          <a:ln/>
+        </p:spPr>
+        <p:txBody>
+          <a:bodyPr wrap="square" lIns="0" tIns="0" rIns="0" bIns="0" rtlCol="0" anchor="ctr"/>
+          <a:lstStyle/>
+          <a:p>
+            <a:pPr algn="ctr" indent="0" marL="0">
+              <a:buNone/>
+            </a:pPr>
+            <a:r>
+              <a:rPr lang="en-US" sz="1500" b="1" dirty="0">
+                <a:solidFill>
+                  <a:srgbClr val="FFFFFF"/>
+                </a:solidFill>
+                <a:latin typeface="Calibri" pitchFamily="34" charset="0"/>
+                <a:ea typeface="Calibri" pitchFamily="34" charset="-122"/>
+                <a:cs typeface="Calibri" pitchFamily="34" charset="-120"/>
+              </a:rPr>
+              <a:t>3</a:t>
+            </a:r>
+            <a:endParaRPr lang="en-US" sz="1500" dirty="0"/>
+          </a:p>
+        </p:txBody>
+      </p:sp>
+      <p:sp>
+        <p:nvSpPr>
+          <p:cNvPr id="15" name="Text 13"/>
+          <p:cNvSpPr/>
+          <p:nvPr/>
+        </p:nvSpPr>
+        <p:spPr>
+          <a:xfrm>
+            <a:off x="1444752" y="3822192"/>
+            <a:ext cx="4663440" cy="320040"/>
+          </a:xfrm>
+          <a:prstGeom prst="rect">
+            <a:avLst/>
+          </a:prstGeom>
+          <a:noFill/>
+          <a:ln/>
+        </p:spPr>
+        <p:txBody>
+          <a:bodyPr wrap="square" lIns="0" tIns="0" rIns="0" bIns="0" rtlCol="0" anchor="ctr"/>
+          <a:lstStyle/>
+          <a:p>
+            <a:pPr indent="0" marL="0">
+              <a:buNone/>
+            </a:pPr>
+            <a:r>
+              <a:rPr lang="en-US" sz="1700" b="1" dirty="0">
+                <a:solidFill>
+                  <a:srgbClr val="2B1620"/>
+                </a:solidFill>
+                <a:latin typeface="Calibri" pitchFamily="34" charset="0"/>
+                <a:ea typeface="Calibri" pitchFamily="34" charset="-122"/>
+                <a:cs typeface="Calibri" pitchFamily="34" charset="-120"/>
+              </a:rPr>
+              <a:t>Willingness to speak on camera</a:t>
+            </a:r>
+            <a:endParaRPr lang="en-US" sz="1700" dirty="0"/>
+          </a:p>
+        </p:txBody>
+      </p:sp>
+      <p:sp>
+        <p:nvSpPr>
+          <p:cNvPr id="16" name="Text 14"/>
+          <p:cNvSpPr/>
+          <p:nvPr/>
+        </p:nvSpPr>
+        <p:spPr>
+          <a:xfrm>
+            <a:off x="1444752" y="4169664"/>
+            <a:ext cx="4663440" cy="640080"/>
+          </a:xfrm>
+          <a:prstGeom prst="rect">
+            <a:avLst/>
+          </a:prstGeom>
+          <a:noFill/>
+          <a:ln/>
+        </p:spPr>
+        <p:txBody>
+          <a:bodyPr wrap="square" lIns="0" tIns="0" rIns="0" bIns="0" rtlCol="0" anchor="ctr"/>
+          <a:lstStyle/>
+          <a:p>
+            <a:pPr indent="0" marL="0">
+              <a:lnSpc>
+                <a:spcPts val="1900"/>
+              </a:lnSpc>
+              <a:buNone/>
+            </a:pPr>
+            <a:r>
+              <a:rPr lang="en-US" sz="1350" dirty="0">
+                <a:solidFill>
+                  <a:srgbClr val="7A6068"/>
+                </a:solidFill>
+                <a:latin typeface="Calibri" pitchFamily="34" charset="0"/>
+                <a:ea typeface="Calibri" pitchFamily="34" charset="-122"/>
+                <a:cs typeface="Calibri" pitchFamily="34" charset="-120"/>
+              </a:rPr>
+              <a:t>In Hinglish, the way you'd talk to a friend. We'll coach you through month one.</a:t>
+            </a:r>
+            <a:endParaRPr lang="en-US" sz="1350" dirty="0"/>
+          </a:p>
+        </p:txBody>
+      </p:sp>
+      <p:sp>
+        <p:nvSpPr>
+          <p:cNvPr id="17" name="Shape 15"/>
+          <p:cNvSpPr/>
+          <p:nvPr/>
+        </p:nvSpPr>
+        <p:spPr>
+          <a:xfrm>
+            <a:off x="6336792" y="3840480"/>
+            <a:ext cx="502920" cy="502920"/>
+          </a:xfrm>
+          <a:prstGeom prst="ellipse">
+            <a:avLst/>
+          </a:prstGeom>
+          <a:solidFill>
+            <a:srgbClr val="6D2E46"/>
+          </a:solidFill>
+          <a:ln/>
+        </p:spPr>
+      </p:sp>
+      <p:sp>
+        <p:nvSpPr>
+          <p:cNvPr id="18" name="Text 16"/>
+          <p:cNvSpPr/>
+          <p:nvPr/>
+        </p:nvSpPr>
+        <p:spPr>
+          <a:xfrm>
+            <a:off x="6336792" y="3840480"/>
+            <a:ext cx="502920" cy="502920"/>
+          </a:xfrm>
+          <a:prstGeom prst="rect">
+            <a:avLst/>
+          </a:prstGeom>
+          <a:noFill/>
+          <a:ln/>
+        </p:spPr>
+        <p:txBody>
+          <a:bodyPr wrap="square" lIns="0" tIns="0" rIns="0" bIns="0" rtlCol="0" anchor="ctr"/>
+          <a:lstStyle/>
+          <a:p>
+            <a:pPr algn="ctr" indent="0" marL="0">
+              <a:buNone/>
+            </a:pPr>
+            <a:r>
+              <a:rPr lang="en-US" sz="1500" b="1" dirty="0">
+                <a:solidFill>
+                  <a:srgbClr val="FFFFFF"/>
+                </a:solidFill>
+                <a:latin typeface="Calibri" pitchFamily="34" charset="0"/>
+                <a:ea typeface="Calibri" pitchFamily="34" charset="-122"/>
+                <a:cs typeface="Calibri" pitchFamily="34" charset="-120"/>
+              </a:rPr>
+              <a:t>4</a:t>
+            </a:r>
+            <a:endParaRPr lang="en-US" sz="1500" dirty="0"/>
+          </a:p>
+        </p:txBody>
+      </p:sp>
+      <p:sp>
+        <p:nvSpPr>
+          <p:cNvPr id="19" name="Text 17"/>
+          <p:cNvSpPr/>
+          <p:nvPr/>
+        </p:nvSpPr>
+        <p:spPr>
+          <a:xfrm>
+            <a:off x="7068312" y="3822192"/>
+            <a:ext cx="4663440" cy="320040"/>
+          </a:xfrm>
+          <a:prstGeom prst="rect">
+            <a:avLst/>
+          </a:prstGeom>
+          <a:noFill/>
+          <a:ln/>
+        </p:spPr>
+        <p:txBody>
+          <a:bodyPr wrap="square" lIns="0" tIns="0" rIns="0" bIns="0" rtlCol="0" anchor="ctr"/>
+          <a:lstStyle/>
+          <a:p>
+            <a:pPr indent="0" marL="0">
+              <a:buNone/>
+            </a:pPr>
+            <a:r>
+              <a:rPr lang="en-US" sz="1700" b="1" dirty="0">
+                <a:solidFill>
+                  <a:srgbClr val="2B1620"/>
+                </a:solidFill>
+                <a:latin typeface="Calibri" pitchFamily="34" charset="0"/>
+                <a:ea typeface="Calibri" pitchFamily="34" charset="-122"/>
+                <a:cs typeface="Calibri" pitchFamily="34" charset="-120"/>
+              </a:rPr>
+              <a:t>Permission to be mid-journey</a:t>
+            </a:r>
+            <a:endParaRPr lang="en-US" sz="1700" dirty="0"/>
+          </a:p>
+        </p:txBody>
+      </p:sp>
+      <p:sp>
+        <p:nvSpPr>
+          <p:cNvPr id="20" name="Text 18"/>
+          <p:cNvSpPr/>
+          <p:nvPr/>
+        </p:nvSpPr>
+        <p:spPr>
+          <a:xfrm>
+            <a:off x="7068312" y="4169664"/>
+            <a:ext cx="4663440" cy="640080"/>
+          </a:xfrm>
+          <a:prstGeom prst="rect">
+            <a:avLst/>
+          </a:prstGeom>
+          <a:noFill/>
+          <a:ln/>
+        </p:spPr>
+        <p:txBody>
+          <a:bodyPr wrap="square" lIns="0" tIns="0" rIns="0" bIns="0" rtlCol="0" anchor="ctr"/>
+          <a:lstStyle/>
+          <a:p>
+            <a:pPr indent="0" marL="0">
+              <a:lnSpc>
+                <a:spcPts val="1900"/>
+              </a:lnSpc>
+              <a:buNone/>
+            </a:pPr>
+            <a:r>
+              <a:rPr lang="en-US" sz="1350" dirty="0">
+                <a:solidFill>
+                  <a:srgbClr val="7A6068"/>
+                </a:solidFill>
+                <a:latin typeface="Calibri" pitchFamily="34" charset="0"/>
+                <a:ea typeface="Calibri" pitchFamily="34" charset="-122"/>
+                <a:cs typeface="Calibri" pitchFamily="34" charset="-120"/>
+              </a:rPr>
+              <a:t>You don't have to have arrived. Katie's power comes from still being on the way.</a:t>
+            </a:r>
+            <a:endParaRPr lang="en-US" sz="1350" dirty="0"/>
+          </a:p>
+        </p:txBody>
+      </p:sp>
+      <p:sp>
+        <p:nvSpPr>
+          <p:cNvPr id="21" name="Shape 19"/>
+          <p:cNvSpPr/>
+          <p:nvPr/>
+        </p:nvSpPr>
+        <p:spPr>
+          <a:xfrm>
+            <a:off x="713232" y="5257800"/>
+            <a:ext cx="10735056" cy="1005840"/>
+          </a:xfrm>
+          <a:prstGeom prst="roundRect">
+            <a:avLst>
+              <a:gd name="adj" fmla="val 12727"/>
+            </a:avLst>
+          </a:prstGeom>
+          <a:solidFill>
+            <a:srgbClr val="6D2E46"/>
+          </a:solidFill>
+          <a:ln/>
+        </p:spPr>
+      </p:sp>
+      <p:sp>
+        <p:nvSpPr>
+          <p:cNvPr id="22" name="Text 20"/>
+          <p:cNvSpPr/>
+          <p:nvPr/>
+        </p:nvSpPr>
+        <p:spPr>
+          <a:xfrm>
+            <a:off x="1170432" y="5257800"/>
+            <a:ext cx="9820656" cy="1005840"/>
+          </a:xfrm>
+          <a:prstGeom prst="rect">
+            <a:avLst/>
+          </a:prstGeom>
+          <a:noFill/>
+          <a:ln/>
+        </p:spPr>
+        <p:txBody>
+          <a:bodyPr wrap="square" lIns="0" tIns="0" rIns="0" bIns="0" rtlCol="0" anchor="ctr"/>
+          <a:lstStyle/>
+          <a:p>
+            <a:pPr indent="0" marL="0">
+              <a:lnSpc>
+                <a:spcPts val="2500"/>
+              </a:lnSpc>
+              <a:buNone/>
+            </a:pPr>
+            <a:r>
+              <a:rPr lang="en-US" sz="1800" dirty="0">
+                <a:solidFill>
+                  <a:srgbClr val="FFFFFF"/>
+                </a:solidFill>
+                <a:latin typeface="Calibri" pitchFamily="34" charset="0"/>
+                <a:ea typeface="Calibri" pitchFamily="34" charset="-122"/>
+                <a:cs typeface="Calibri" pitchFamily="34" charset="-120"/>
+              </a:rPr>
+              <a:t>Everything else — shooting, editing, captions, covers, posting, YouTube, the list, the numbers — is mine to carry.</a:t>
+            </a:r>
+            <a:endParaRPr lang="en-US" sz="1800" dirty="0"/>
+          </a:p>
+        </p:txBody>
+      </p:sp>
+    </p:spTree>
+  </p:cSld>
+  <p:clrMapOvr>
+    <a:masterClrMapping/>
+  </p:clrMapOvr>
+</p:sld>
+</file>
+
+<file path=ppt/slides/slide24.xml><?xml version="1.0" encoding="utf-8"?>
+<p:sld xmlns:a="http://schemas.openxmlformats.org/drawingml/2006/main" xmlns:r="http://schemas.openxmlformats.org/officeDocument/2006/relationships" xmlns:p="http://schemas.openxmlformats.org/presentationml/2006/main">
+  <p:cSld name="Slide 24">
     <p:bg>
       <p:bgPr>
         <a:solidFill>

--- a/clients/juhi-agarwal-nexther/neXtHer-What-I-Found.pptx
+++ b/clients/juhi-agarwal-nexther/neXtHer-What-I-Found.pptx
@@ -10526,7 +10526,7 @@
                 <a:ea typeface="Calibri" pitchFamily="34" charset="-122"/>
                 <a:cs typeface="Calibri" pitchFamily="34" charset="-120"/>
               </a:rPr>
-              <a:t>Four steps, each one a bigger commitment than the last. You don't build them all at once — you build them in this order.</a:t>
+              <a:t>You may already have this planned — if so, tell me and I'll build around it. This is simply how I'd think about it.</a:t>
             </a:r>
             <a:endParaRPr lang="en-US" sz="1600" dirty="0"/>
           </a:p>
